--- a/docs/EquipmentSetup/Networking/Equipment/Equipment.pptx
+++ b/docs/EquipmentSetup/Networking/Equipment/Equipment.pptx
@@ -5,7 +5,7 @@
     <p:sldMasterId id="2147483660" r:id="rId1"/>
   </p:sldMasterIdLst>
   <p:notesMasterIdLst>
-    <p:notesMasterId r:id="rId15"/>
+    <p:notesMasterId r:id="rId17"/>
   </p:notesMasterIdLst>
   <p:sldIdLst>
     <p:sldId id="273" r:id="rId2"/>
@@ -16,11 +16,13 @@
     <p:sldId id="265" r:id="rId7"/>
     <p:sldId id="267" r:id="rId8"/>
     <p:sldId id="272" r:id="rId9"/>
-    <p:sldId id="260" r:id="rId10"/>
-    <p:sldId id="270" r:id="rId11"/>
-    <p:sldId id="271" r:id="rId12"/>
-    <p:sldId id="268" r:id="rId13"/>
-    <p:sldId id="269" r:id="rId14"/>
+    <p:sldId id="277" r:id="rId10"/>
+    <p:sldId id="278" r:id="rId11"/>
+    <p:sldId id="260" r:id="rId12"/>
+    <p:sldId id="270" r:id="rId13"/>
+    <p:sldId id="271" r:id="rId14"/>
+    <p:sldId id="268" r:id="rId15"/>
+    <p:sldId id="269" r:id="rId16"/>
   </p:sldIdLst>
   <p:sldSz cx="6858000" cy="9144000" type="letter"/>
   <p:notesSz cx="6858000" cy="9144000"/>
@@ -220,7 +222,7 @@
           <a:p>
             <a:fld id="{B9503A7B-FFA9-4535-9439-F7DED7245B92}" type="datetimeFigureOut">
               <a:rPr lang="en-CA" smtClean="0"/>
-              <a:t>2024-02-16</a:t>
+              <a:t>2026-05-20</a:t>
             </a:fld>
             <a:endParaRPr lang="en-CA"/>
           </a:p>
@@ -1199,6 +1201,90 @@
 </p:notes>
 </file>
 
+<file path=ppt/notesSlides/notesSlide8.xml><?xml version="1.0" encoding="utf-8"?>
+<p:notes xmlns:a="http://schemas.openxmlformats.org/drawingml/2006/main" xmlns:r="http://schemas.openxmlformats.org/officeDocument/2006/relationships" xmlns:p="http://schemas.openxmlformats.org/presentationml/2006/main">
+  <p:cSld>
+    <p:spTree>
+      <p:nvGrpSpPr>
+        <p:cNvPr id="1" name=""/>
+        <p:cNvGrpSpPr/>
+        <p:nvPr/>
+      </p:nvGrpSpPr>
+      <p:grpSpPr>
+        <a:xfrm>
+          <a:off x="0" y="0"/>
+          <a:ext cx="0" cy="0"/>
+          <a:chOff x="0" y="0"/>
+          <a:chExt cx="0" cy="0"/>
+        </a:xfrm>
+      </p:grpSpPr>
+      <p:sp>
+        <p:nvSpPr>
+          <p:cNvPr id="2" name="Slide Image Placeholder 1"/>
+          <p:cNvSpPr>
+            <a:spLocks noGrp="1" noRot="1" noChangeAspect="1"/>
+          </p:cNvSpPr>
+          <p:nvPr>
+            <p:ph type="sldImg"/>
+          </p:nvPr>
+        </p:nvSpPr>
+        <p:spPr/>
+      </p:sp>
+      <p:sp>
+        <p:nvSpPr>
+          <p:cNvPr id="3" name="Notes Placeholder 2"/>
+          <p:cNvSpPr>
+            <a:spLocks noGrp="1"/>
+          </p:cNvSpPr>
+          <p:nvPr>
+            <p:ph type="body" idx="1"/>
+          </p:nvPr>
+        </p:nvSpPr>
+        <p:spPr/>
+        <p:txBody>
+          <a:bodyPr/>
+          <a:lstStyle/>
+          <a:p>
+            <a:endParaRPr lang="en-US" dirty="0"/>
+          </a:p>
+        </p:txBody>
+      </p:sp>
+      <p:sp>
+        <p:nvSpPr>
+          <p:cNvPr id="4" name="Slide Number Placeholder 3"/>
+          <p:cNvSpPr>
+            <a:spLocks noGrp="1"/>
+          </p:cNvSpPr>
+          <p:nvPr>
+            <p:ph type="sldNum" sz="quarter" idx="5"/>
+          </p:nvPr>
+        </p:nvSpPr>
+        <p:spPr/>
+        <p:txBody>
+          <a:bodyPr/>
+          <a:lstStyle/>
+          <a:p>
+            <a:fld id="{999CF908-9C7F-4E65-AA24-D27633FD7494}" type="slidenum">
+              <a:rPr lang="en-CA" smtClean="0"/>
+              <a:t>9</a:t>
+            </a:fld>
+            <a:endParaRPr lang="en-CA"/>
+          </a:p>
+        </p:txBody>
+      </p:sp>
+    </p:spTree>
+    <p:extLst>
+      <p:ext uri="{BB962C8B-B14F-4D97-AF65-F5344CB8AC3E}">
+        <p14:creationId xmlns:p14="http://schemas.microsoft.com/office/powerpoint/2010/main" val="4039730999"/>
+      </p:ext>
+    </p:extLst>
+  </p:cSld>
+  <p:clrMapOvr>
+    <a:masterClrMapping/>
+  </p:clrMapOvr>
+</p:notes>
+</file>
+
 <file path=ppt/slideLayouts/slideLayout1.xml><?xml version="1.0" encoding="utf-8"?>
 <p:sldLayout xmlns:a="http://schemas.openxmlformats.org/drawingml/2006/main" xmlns:r="http://schemas.openxmlformats.org/officeDocument/2006/relationships" xmlns:p="http://schemas.openxmlformats.org/presentationml/2006/main" type="title" preserve="1">
   <p:cSld name="Title Slide">
@@ -1330,7 +1416,7 @@
           <a:p>
             <a:fld id="{DFF2FBC3-E573-4B2D-B1C4-960EEBA08826}" type="datetimeFigureOut">
               <a:rPr lang="fr-CA" smtClean="0"/>
-              <a:t>2024-02-16</a:t>
+              <a:t>2026-05-20</a:t>
             </a:fld>
             <a:endParaRPr lang="fr-CA"/>
           </a:p>
@@ -1500,7 +1586,7 @@
           <a:p>
             <a:fld id="{DFF2FBC3-E573-4B2D-B1C4-960EEBA08826}" type="datetimeFigureOut">
               <a:rPr lang="fr-CA" smtClean="0"/>
-              <a:t>2024-02-16</a:t>
+              <a:t>2026-05-20</a:t>
             </a:fld>
             <a:endParaRPr lang="fr-CA"/>
           </a:p>
@@ -1680,7 +1766,7 @@
           <a:p>
             <a:fld id="{DFF2FBC3-E573-4B2D-B1C4-960EEBA08826}" type="datetimeFigureOut">
               <a:rPr lang="fr-CA" smtClean="0"/>
-              <a:t>2024-02-16</a:t>
+              <a:t>2026-05-20</a:t>
             </a:fld>
             <a:endParaRPr lang="fr-CA"/>
           </a:p>
@@ -1850,7 +1936,7 @@
           <a:p>
             <a:fld id="{DFF2FBC3-E573-4B2D-B1C4-960EEBA08826}" type="datetimeFigureOut">
               <a:rPr lang="fr-CA" smtClean="0"/>
-              <a:t>2024-02-16</a:t>
+              <a:t>2026-05-20</a:t>
             </a:fld>
             <a:endParaRPr lang="fr-CA"/>
           </a:p>
@@ -2094,7 +2180,7 @@
           <a:p>
             <a:fld id="{DFF2FBC3-E573-4B2D-B1C4-960EEBA08826}" type="datetimeFigureOut">
               <a:rPr lang="fr-CA" smtClean="0"/>
-              <a:t>2024-02-16</a:t>
+              <a:t>2026-05-20</a:t>
             </a:fld>
             <a:endParaRPr lang="fr-CA"/>
           </a:p>
@@ -2326,7 +2412,7 @@
           <a:p>
             <a:fld id="{DFF2FBC3-E573-4B2D-B1C4-960EEBA08826}" type="datetimeFigureOut">
               <a:rPr lang="fr-CA" smtClean="0"/>
-              <a:t>2024-02-16</a:t>
+              <a:t>2026-05-20</a:t>
             </a:fld>
             <a:endParaRPr lang="fr-CA"/>
           </a:p>
@@ -2693,7 +2779,7 @@
           <a:p>
             <a:fld id="{DFF2FBC3-E573-4B2D-B1C4-960EEBA08826}" type="datetimeFigureOut">
               <a:rPr lang="fr-CA" smtClean="0"/>
-              <a:t>2024-02-16</a:t>
+              <a:t>2026-05-20</a:t>
             </a:fld>
             <a:endParaRPr lang="fr-CA"/>
           </a:p>
@@ -2811,7 +2897,7 @@
           <a:p>
             <a:fld id="{DFF2FBC3-E573-4B2D-B1C4-960EEBA08826}" type="datetimeFigureOut">
               <a:rPr lang="fr-CA" smtClean="0"/>
-              <a:t>2024-02-16</a:t>
+              <a:t>2026-05-20</a:t>
             </a:fld>
             <a:endParaRPr lang="fr-CA"/>
           </a:p>
@@ -2906,7 +2992,7 @@
           <a:p>
             <a:fld id="{DFF2FBC3-E573-4B2D-B1C4-960EEBA08826}" type="datetimeFigureOut">
               <a:rPr lang="fr-CA" smtClean="0"/>
-              <a:t>2024-02-16</a:t>
+              <a:t>2026-05-20</a:t>
             </a:fld>
             <a:endParaRPr lang="fr-CA"/>
           </a:p>
@@ -3183,7 +3269,7 @@
           <a:p>
             <a:fld id="{DFF2FBC3-E573-4B2D-B1C4-960EEBA08826}" type="datetimeFigureOut">
               <a:rPr lang="fr-CA" smtClean="0"/>
-              <a:t>2024-02-16</a:t>
+              <a:t>2026-05-20</a:t>
             </a:fld>
             <a:endParaRPr lang="fr-CA"/>
           </a:p>
@@ -3440,7 +3526,7 @@
           <a:p>
             <a:fld id="{DFF2FBC3-E573-4B2D-B1C4-960EEBA08826}" type="datetimeFigureOut">
               <a:rPr lang="fr-CA" smtClean="0"/>
-              <a:t>2024-02-16</a:t>
+              <a:t>2026-05-20</a:t>
             </a:fld>
             <a:endParaRPr lang="fr-CA"/>
           </a:p>
@@ -3653,7 +3739,7 @@
           <a:p>
             <a:fld id="{DFF2FBC3-E573-4B2D-B1C4-960EEBA08826}" type="datetimeFigureOut">
               <a:rPr lang="fr-CA" smtClean="0"/>
-              <a:t>2024-02-16</a:t>
+              <a:t>2026-05-20</a:t>
             </a:fld>
             <a:endParaRPr lang="fr-CA"/>
           </a:p>
@@ -4119,7 +4205,7 @@
           <p:nvPr/>
         </p:nvPicPr>
         <p:blipFill rotWithShape="1">
-          <a:blip r:embed="rId3">
+          <a:blip>
             <a:duotone>
               <a:schemeClr val="accent1">
                 <a:shade val="45000"/>
@@ -4132,7 +4218,7 @@
                 <a14:useLocalDpi xmlns:a14="http://schemas.microsoft.com/office/drawing/2010/main" val="0"/>
               </a:ext>
               <a:ext uri="{96DAC541-7B7A-43D3-8B79-37D633B846F1}">
-                <asvg:svgBlip xmlns:asvg="http://schemas.microsoft.com/office/drawing/2016/SVG/main" r:embed="rId4"/>
+                <asvg:svgBlip xmlns:asvg="http://schemas.microsoft.com/office/drawing/2016/SVG/main" r:embed="rId3"/>
               </a:ext>
             </a:extLst>
           </a:blip>
@@ -4164,7 +4250,7 @@
           <p:nvPr/>
         </p:nvPicPr>
         <p:blipFill rotWithShape="1">
-          <a:blip r:embed="rId3">
+          <a:blip>
             <a:duotone>
               <a:schemeClr val="accent2">
                 <a:shade val="45000"/>
@@ -4177,7 +4263,7 @@
                 <a14:useLocalDpi xmlns:a14="http://schemas.microsoft.com/office/drawing/2010/main" val="0"/>
               </a:ext>
               <a:ext uri="{96DAC541-7B7A-43D3-8B79-37D633B846F1}">
-                <asvg:svgBlip xmlns:asvg="http://schemas.microsoft.com/office/drawing/2016/SVG/main" r:embed="rId4"/>
+                <asvg:svgBlip xmlns:asvg="http://schemas.microsoft.com/office/drawing/2016/SVG/main" r:embed="rId3"/>
               </a:ext>
             </a:extLst>
           </a:blip>
@@ -4347,7 +4433,7 @@
           <p:nvPr/>
         </p:nvPicPr>
         <p:blipFill rotWithShape="1">
-          <a:blip r:embed="rId3">
+          <a:blip>
             <a:duotone>
               <a:schemeClr val="accent2">
                 <a:shade val="45000"/>
@@ -4360,7 +4446,7 @@
                 <a14:useLocalDpi xmlns:a14="http://schemas.microsoft.com/office/drawing/2010/main" val="0"/>
               </a:ext>
               <a:ext uri="{96DAC541-7B7A-43D3-8B79-37D633B846F1}">
-                <asvg:svgBlip xmlns:asvg="http://schemas.microsoft.com/office/drawing/2016/SVG/main" r:embed="rId4"/>
+                <asvg:svgBlip xmlns:asvg="http://schemas.microsoft.com/office/drawing/2016/SVG/main" r:embed="rId3"/>
               </a:ext>
             </a:extLst>
           </a:blip>
@@ -4499,13 +4585,13 @@
             <p:nvPr/>
           </p:nvPicPr>
           <p:blipFill>
-            <a:blip r:embed="rId5">
+            <a:blip>
               <a:extLst>
                 <a:ext uri="{28A0092B-C50C-407E-A947-70E740481C1C}">
                   <a14:useLocalDpi xmlns:a14="http://schemas.microsoft.com/office/drawing/2010/main" val="0"/>
                 </a:ext>
                 <a:ext uri="{96DAC541-7B7A-43D3-8B79-37D633B846F1}">
-                  <asvg:svgBlip xmlns:asvg="http://schemas.microsoft.com/office/drawing/2016/SVG/main" r:embed="rId6"/>
+                  <asvg:svgBlip xmlns:asvg="http://schemas.microsoft.com/office/drawing/2016/SVG/main" r:embed="rId4"/>
                 </a:ext>
               </a:extLst>
             </a:blip>
@@ -4595,13 +4681,13 @@
             <p:nvPr/>
           </p:nvPicPr>
           <p:blipFill>
-            <a:blip r:embed="rId5">
+            <a:blip>
               <a:extLst>
                 <a:ext uri="{28A0092B-C50C-407E-A947-70E740481C1C}">
                   <a14:useLocalDpi xmlns:a14="http://schemas.microsoft.com/office/drawing/2010/main" val="0"/>
                 </a:ext>
                 <a:ext uri="{96DAC541-7B7A-43D3-8B79-37D633B846F1}">
-                  <asvg:svgBlip xmlns:asvg="http://schemas.microsoft.com/office/drawing/2016/SVG/main" r:embed="rId6"/>
+                  <asvg:svgBlip xmlns:asvg="http://schemas.microsoft.com/office/drawing/2016/SVG/main" r:embed="rId4"/>
                 </a:ext>
               </a:extLst>
             </a:blip>
@@ -4783,13 +4869,13 @@
             <p:nvPr/>
           </p:nvPicPr>
           <p:blipFill>
-            <a:blip r:embed="rId7">
+            <a:blip>
               <a:extLst>
                 <a:ext uri="{28A0092B-C50C-407E-A947-70E740481C1C}">
                   <a14:useLocalDpi xmlns:a14="http://schemas.microsoft.com/office/drawing/2010/main" val="0"/>
                 </a:ext>
                 <a:ext uri="{96DAC541-7B7A-43D3-8B79-37D633B846F1}">
-                  <asvg:svgBlip xmlns:asvg="http://schemas.microsoft.com/office/drawing/2016/SVG/main" r:embed="rId8"/>
+                  <asvg:svgBlip xmlns:asvg="http://schemas.microsoft.com/office/drawing/2016/SVG/main" r:embed="rId5"/>
                 </a:ext>
               </a:extLst>
             </a:blip>
@@ -4822,13 +4908,13 @@
             <p:nvPr/>
           </p:nvPicPr>
           <p:blipFill>
-            <a:blip r:embed="rId9">
+            <a:blip>
               <a:extLst>
                 <a:ext uri="{28A0092B-C50C-407E-A947-70E740481C1C}">
                   <a14:useLocalDpi xmlns:a14="http://schemas.microsoft.com/office/drawing/2010/main" val="0"/>
                 </a:ext>
                 <a:ext uri="{96DAC541-7B7A-43D3-8B79-37D633B846F1}">
-                  <asvg:svgBlip xmlns:asvg="http://schemas.microsoft.com/office/drawing/2016/SVG/main" r:embed="rId10"/>
+                  <asvg:svgBlip xmlns:asvg="http://schemas.microsoft.com/office/drawing/2016/SVG/main" r:embed="rId6"/>
                 </a:ext>
               </a:extLst>
             </a:blip>
@@ -4928,13 +5014,13 @@
             <p:nvPr/>
           </p:nvPicPr>
           <p:blipFill>
-            <a:blip r:embed="rId7">
+            <a:blip>
               <a:extLst>
                 <a:ext uri="{28A0092B-C50C-407E-A947-70E740481C1C}">
                   <a14:useLocalDpi xmlns:a14="http://schemas.microsoft.com/office/drawing/2010/main" val="0"/>
                 </a:ext>
                 <a:ext uri="{96DAC541-7B7A-43D3-8B79-37D633B846F1}">
-                  <asvg:svgBlip xmlns:asvg="http://schemas.microsoft.com/office/drawing/2016/SVG/main" r:embed="rId8"/>
+                  <asvg:svgBlip xmlns:asvg="http://schemas.microsoft.com/office/drawing/2016/SVG/main" r:embed="rId5"/>
                 </a:ext>
               </a:extLst>
             </a:blip>
@@ -4967,13 +5053,13 @@
             <p:nvPr/>
           </p:nvPicPr>
           <p:blipFill>
-            <a:blip r:embed="rId9">
+            <a:blip>
               <a:extLst>
                 <a:ext uri="{28A0092B-C50C-407E-A947-70E740481C1C}">
                   <a14:useLocalDpi xmlns:a14="http://schemas.microsoft.com/office/drawing/2010/main" val="0"/>
                 </a:ext>
                 <a:ext uri="{96DAC541-7B7A-43D3-8B79-37D633B846F1}">
-                  <asvg:svgBlip xmlns:asvg="http://schemas.microsoft.com/office/drawing/2016/SVG/main" r:embed="rId10"/>
+                  <asvg:svgBlip xmlns:asvg="http://schemas.microsoft.com/office/drawing/2016/SVG/main" r:embed="rId6"/>
                 </a:ext>
               </a:extLst>
             </a:blip>
@@ -5073,13 +5159,13 @@
             <p:nvPr/>
           </p:nvPicPr>
           <p:blipFill>
-            <a:blip r:embed="rId7">
+            <a:blip>
               <a:extLst>
                 <a:ext uri="{28A0092B-C50C-407E-A947-70E740481C1C}">
                   <a14:useLocalDpi xmlns:a14="http://schemas.microsoft.com/office/drawing/2010/main" val="0"/>
                 </a:ext>
                 <a:ext uri="{96DAC541-7B7A-43D3-8B79-37D633B846F1}">
-                  <asvg:svgBlip xmlns:asvg="http://schemas.microsoft.com/office/drawing/2016/SVG/main" r:embed="rId8"/>
+                  <asvg:svgBlip xmlns:asvg="http://schemas.microsoft.com/office/drawing/2016/SVG/main" r:embed="rId5"/>
                 </a:ext>
               </a:extLst>
             </a:blip>
@@ -5112,13 +5198,13 @@
             <p:nvPr/>
           </p:nvPicPr>
           <p:blipFill>
-            <a:blip r:embed="rId9">
+            <a:blip>
               <a:extLst>
                 <a:ext uri="{28A0092B-C50C-407E-A947-70E740481C1C}">
                   <a14:useLocalDpi xmlns:a14="http://schemas.microsoft.com/office/drawing/2010/main" val="0"/>
                 </a:ext>
                 <a:ext uri="{96DAC541-7B7A-43D3-8B79-37D633B846F1}">
-                  <asvg:svgBlip xmlns:asvg="http://schemas.microsoft.com/office/drawing/2016/SVG/main" r:embed="rId10"/>
+                  <asvg:svgBlip xmlns:asvg="http://schemas.microsoft.com/office/drawing/2016/SVG/main" r:embed="rId6"/>
                 </a:ext>
               </a:extLst>
             </a:blip>
@@ -5485,13 +5571,13 @@
               <p:nvPr/>
             </p:nvPicPr>
             <p:blipFill>
-              <a:blip r:embed="rId5">
+              <a:blip>
                 <a:extLst>
                   <a:ext uri="{28A0092B-C50C-407E-A947-70E740481C1C}">
                     <a14:useLocalDpi xmlns:a14="http://schemas.microsoft.com/office/drawing/2010/main" val="0"/>
                   </a:ext>
                   <a:ext uri="{96DAC541-7B7A-43D3-8B79-37D633B846F1}">
-                    <asvg:svgBlip xmlns:asvg="http://schemas.microsoft.com/office/drawing/2016/SVG/main" r:embed="rId6"/>
+                    <asvg:svgBlip xmlns:asvg="http://schemas.microsoft.com/office/drawing/2016/SVG/main" r:embed="rId4"/>
                   </a:ext>
                 </a:extLst>
               </a:blip>
@@ -5636,13 +5722,13 @@
               <p:nvPr/>
             </p:nvPicPr>
             <p:blipFill>
-              <a:blip r:embed="rId7">
+              <a:blip>
                 <a:extLst>
                   <a:ext uri="{28A0092B-C50C-407E-A947-70E740481C1C}">
                     <a14:useLocalDpi xmlns:a14="http://schemas.microsoft.com/office/drawing/2010/main" val="0"/>
                   </a:ext>
                   <a:ext uri="{96DAC541-7B7A-43D3-8B79-37D633B846F1}">
-                    <asvg:svgBlip xmlns:asvg="http://schemas.microsoft.com/office/drawing/2016/SVG/main" r:embed="rId8"/>
+                    <asvg:svgBlip xmlns:asvg="http://schemas.microsoft.com/office/drawing/2016/SVG/main" r:embed="rId5"/>
                   </a:ext>
                 </a:extLst>
               </a:blip>
@@ -5675,13 +5761,13 @@
               <p:nvPr/>
             </p:nvPicPr>
             <p:blipFill>
-              <a:blip r:embed="rId9">
+              <a:blip>
                 <a:extLst>
                   <a:ext uri="{28A0092B-C50C-407E-A947-70E740481C1C}">
                     <a14:useLocalDpi xmlns:a14="http://schemas.microsoft.com/office/drawing/2010/main" val="0"/>
                   </a:ext>
                   <a:ext uri="{96DAC541-7B7A-43D3-8B79-37D633B846F1}">
-                    <asvg:svgBlip xmlns:asvg="http://schemas.microsoft.com/office/drawing/2016/SVG/main" r:embed="rId10"/>
+                    <asvg:svgBlip xmlns:asvg="http://schemas.microsoft.com/office/drawing/2016/SVG/main" r:embed="rId6"/>
                   </a:ext>
                 </a:extLst>
               </a:blip>
@@ -5781,13 +5867,13 @@
               <p:nvPr/>
             </p:nvPicPr>
             <p:blipFill>
-              <a:blip r:embed="rId7">
+              <a:blip>
                 <a:extLst>
                   <a:ext uri="{28A0092B-C50C-407E-A947-70E740481C1C}">
                     <a14:useLocalDpi xmlns:a14="http://schemas.microsoft.com/office/drawing/2010/main" val="0"/>
                   </a:ext>
                   <a:ext uri="{96DAC541-7B7A-43D3-8B79-37D633B846F1}">
-                    <asvg:svgBlip xmlns:asvg="http://schemas.microsoft.com/office/drawing/2016/SVG/main" r:embed="rId8"/>
+                    <asvg:svgBlip xmlns:asvg="http://schemas.microsoft.com/office/drawing/2016/SVG/main" r:embed="rId5"/>
                   </a:ext>
                 </a:extLst>
               </a:blip>
@@ -5820,13 +5906,13 @@
               <p:nvPr/>
             </p:nvPicPr>
             <p:blipFill>
-              <a:blip r:embed="rId9">
+              <a:blip>
                 <a:extLst>
                   <a:ext uri="{28A0092B-C50C-407E-A947-70E740481C1C}">
                     <a14:useLocalDpi xmlns:a14="http://schemas.microsoft.com/office/drawing/2010/main" val="0"/>
                   </a:ext>
                   <a:ext uri="{96DAC541-7B7A-43D3-8B79-37D633B846F1}">
-                    <asvg:svgBlip xmlns:asvg="http://schemas.microsoft.com/office/drawing/2016/SVG/main" r:embed="rId10"/>
+                    <asvg:svgBlip xmlns:asvg="http://schemas.microsoft.com/office/drawing/2016/SVG/main" r:embed="rId6"/>
                   </a:ext>
                 </a:extLst>
               </a:blip>
@@ -5926,13 +6012,13 @@
               <p:nvPr/>
             </p:nvPicPr>
             <p:blipFill>
-              <a:blip r:embed="rId7">
+              <a:blip>
                 <a:extLst>
                   <a:ext uri="{28A0092B-C50C-407E-A947-70E740481C1C}">
                     <a14:useLocalDpi xmlns:a14="http://schemas.microsoft.com/office/drawing/2010/main" val="0"/>
                   </a:ext>
                   <a:ext uri="{96DAC541-7B7A-43D3-8B79-37D633B846F1}">
-                    <asvg:svgBlip xmlns:asvg="http://schemas.microsoft.com/office/drawing/2016/SVG/main" r:embed="rId8"/>
+                    <asvg:svgBlip xmlns:asvg="http://schemas.microsoft.com/office/drawing/2016/SVG/main" r:embed="rId5"/>
                   </a:ext>
                 </a:extLst>
               </a:blip>
@@ -5965,13 +6051,13 @@
               <p:nvPr/>
             </p:nvPicPr>
             <p:blipFill>
-              <a:blip r:embed="rId9">
+              <a:blip>
                 <a:extLst>
                   <a:ext uri="{28A0092B-C50C-407E-A947-70E740481C1C}">
                     <a14:useLocalDpi xmlns:a14="http://schemas.microsoft.com/office/drawing/2010/main" val="0"/>
                   </a:ext>
                   <a:ext uri="{96DAC541-7B7A-43D3-8B79-37D633B846F1}">
-                    <asvg:svgBlip xmlns:asvg="http://schemas.microsoft.com/office/drawing/2016/SVG/main" r:embed="rId10"/>
+                    <asvg:svgBlip xmlns:asvg="http://schemas.microsoft.com/office/drawing/2016/SVG/main" r:embed="rId6"/>
                   </a:ext>
                 </a:extLst>
               </a:blip>
@@ -6363,13 +6449,13 @@
           <p:nvPr/>
         </p:nvPicPr>
         <p:blipFill>
-          <a:blip r:embed="rId11">
+          <a:blip>
             <a:extLst>
               <a:ext uri="{28A0092B-C50C-407E-A947-70E740481C1C}">
                 <a14:useLocalDpi xmlns:a14="http://schemas.microsoft.com/office/drawing/2010/main" val="0"/>
               </a:ext>
               <a:ext uri="{96DAC541-7B7A-43D3-8B79-37D633B846F1}">
-                <asvg:svgBlip xmlns:asvg="http://schemas.microsoft.com/office/drawing/2016/SVG/main" r:embed="rId12"/>
+                <asvg:svgBlip xmlns:asvg="http://schemas.microsoft.com/office/drawing/2016/SVG/main" r:embed="rId7"/>
               </a:ext>
             </a:extLst>
           </a:blip>
@@ -6456,13 +6542,13 @@
           <p:nvPr/>
         </p:nvPicPr>
         <p:blipFill>
-          <a:blip r:embed="rId11">
+          <a:blip>
             <a:extLst>
               <a:ext uri="{28A0092B-C50C-407E-A947-70E740481C1C}">
                 <a14:useLocalDpi xmlns:a14="http://schemas.microsoft.com/office/drawing/2010/main" val="0"/>
               </a:ext>
               <a:ext uri="{96DAC541-7B7A-43D3-8B79-37D633B846F1}">
-                <asvg:svgBlip xmlns:asvg="http://schemas.microsoft.com/office/drawing/2016/SVG/main" r:embed="rId12"/>
+                <asvg:svgBlip xmlns:asvg="http://schemas.microsoft.com/office/drawing/2016/SVG/main" r:embed="rId7"/>
               </a:ext>
             </a:extLst>
           </a:blip>
@@ -6495,7 +6581,7 @@
           <p:nvPr/>
         </p:nvPicPr>
         <p:blipFill>
-          <a:blip r:embed="rId13">
+          <a:blip r:embed="rId8">
             <a:extLst>
               <a:ext uri="{28A0092B-C50C-407E-A947-70E740481C1C}">
                 <a14:useLocalDpi xmlns:a14="http://schemas.microsoft.com/office/drawing/2010/main" val="0"/>
@@ -6919,13 +7005,13 @@
               <p:nvPr/>
             </p:nvPicPr>
             <p:blipFill>
-              <a:blip r:embed="rId5">
+              <a:blip>
                 <a:extLst>
                   <a:ext uri="{28A0092B-C50C-407E-A947-70E740481C1C}">
                     <a14:useLocalDpi xmlns:a14="http://schemas.microsoft.com/office/drawing/2010/main" val="0"/>
                   </a:ext>
                   <a:ext uri="{96DAC541-7B7A-43D3-8B79-37D633B846F1}">
-                    <asvg:svgBlip xmlns:asvg="http://schemas.microsoft.com/office/drawing/2016/SVG/main" r:embed="rId6"/>
+                    <asvg:svgBlip xmlns:asvg="http://schemas.microsoft.com/office/drawing/2016/SVG/main" r:embed="rId4"/>
                   </a:ext>
                 </a:extLst>
               </a:blip>
@@ -7045,13 +7131,13 @@
             <p:nvPr/>
           </p:nvPicPr>
           <p:blipFill>
-            <a:blip r:embed="rId11">
+            <a:blip>
               <a:extLst>
                 <a:ext uri="{28A0092B-C50C-407E-A947-70E740481C1C}">
                   <a14:useLocalDpi xmlns:a14="http://schemas.microsoft.com/office/drawing/2010/main" val="0"/>
                 </a:ext>
                 <a:ext uri="{96DAC541-7B7A-43D3-8B79-37D633B846F1}">
-                  <asvg:svgBlip xmlns:asvg="http://schemas.microsoft.com/office/drawing/2016/SVG/main" r:embed="rId12"/>
+                  <asvg:svgBlip xmlns:asvg="http://schemas.microsoft.com/office/drawing/2016/SVG/main" r:embed="rId7"/>
                 </a:ext>
               </a:extLst>
             </a:blip>
@@ -7124,13 +7210,13 @@
             <p:nvPr/>
           </p:nvPicPr>
           <p:blipFill>
-            <a:blip r:embed="rId11">
+            <a:blip>
               <a:extLst>
                 <a:ext uri="{28A0092B-C50C-407E-A947-70E740481C1C}">
                   <a14:useLocalDpi xmlns:a14="http://schemas.microsoft.com/office/drawing/2010/main" val="0"/>
                 </a:ext>
                 <a:ext uri="{96DAC541-7B7A-43D3-8B79-37D633B846F1}">
-                  <asvg:svgBlip xmlns:asvg="http://schemas.microsoft.com/office/drawing/2016/SVG/main" r:embed="rId12"/>
+                  <asvg:svgBlip xmlns:asvg="http://schemas.microsoft.com/office/drawing/2016/SVG/main" r:embed="rId7"/>
                 </a:ext>
               </a:extLst>
             </a:blip>
@@ -7163,7 +7249,7 @@
             <p:nvPr/>
           </p:nvPicPr>
           <p:blipFill>
-            <a:blip r:embed="rId13">
+            <a:blip r:embed="rId8">
               <a:extLst>
                 <a:ext uri="{28A0092B-C50C-407E-A947-70E740481C1C}">
                   <a14:useLocalDpi xmlns:a14="http://schemas.microsoft.com/office/drawing/2010/main" val="0"/>
@@ -7387,13 +7473,13 @@
             <p:nvPr/>
           </p:nvPicPr>
           <p:blipFill>
-            <a:blip r:embed="rId11">
+            <a:blip>
               <a:extLst>
                 <a:ext uri="{28A0092B-C50C-407E-A947-70E740481C1C}">
                   <a14:useLocalDpi xmlns:a14="http://schemas.microsoft.com/office/drawing/2010/main" val="0"/>
                 </a:ext>
                 <a:ext uri="{96DAC541-7B7A-43D3-8B79-37D633B846F1}">
-                  <asvg:svgBlip xmlns:asvg="http://schemas.microsoft.com/office/drawing/2016/SVG/main" r:embed="rId12"/>
+                  <asvg:svgBlip xmlns:asvg="http://schemas.microsoft.com/office/drawing/2016/SVG/main" r:embed="rId7"/>
                 </a:ext>
               </a:extLst>
             </a:blip>
@@ -7727,13 +7813,13 @@
           <p:nvPr/>
         </p:nvPicPr>
         <p:blipFill>
-          <a:blip r:embed="rId14">
+          <a:blip>
             <a:extLst>
               <a:ext uri="{28A0092B-C50C-407E-A947-70E740481C1C}">
                 <a14:useLocalDpi xmlns:a14="http://schemas.microsoft.com/office/drawing/2010/main" val="0"/>
               </a:ext>
               <a:ext uri="{96DAC541-7B7A-43D3-8B79-37D633B846F1}">
-                <asvg:svgBlip xmlns:asvg="http://schemas.microsoft.com/office/drawing/2016/SVG/main" r:embed="rId15"/>
+                <asvg:svgBlip xmlns:asvg="http://schemas.microsoft.com/office/drawing/2016/SVG/main" r:embed="rId9"/>
               </a:ext>
             </a:extLst>
           </a:blip>
@@ -7825,13 +7911,13 @@
           <p:nvPr/>
         </p:nvPicPr>
         <p:blipFill>
-          <a:blip r:embed="rId14">
+          <a:blip>
             <a:extLst>
               <a:ext uri="{28A0092B-C50C-407E-A947-70E740481C1C}">
                 <a14:useLocalDpi xmlns:a14="http://schemas.microsoft.com/office/drawing/2010/main" val="0"/>
               </a:ext>
               <a:ext uri="{96DAC541-7B7A-43D3-8B79-37D633B846F1}">
-                <asvg:svgBlip xmlns:asvg="http://schemas.microsoft.com/office/drawing/2016/SVG/main" r:embed="rId15"/>
+                <asvg:svgBlip xmlns:asvg="http://schemas.microsoft.com/office/drawing/2016/SVG/main" r:embed="rId9"/>
               </a:ext>
             </a:extLst>
           </a:blip>
@@ -9437,13 +9523,13 @@
           <p:nvPr/>
         </p:nvPicPr>
         <p:blipFill>
-          <a:blip r:embed="rId16">
+          <a:blip>
             <a:extLst>
               <a:ext uri="{28A0092B-C50C-407E-A947-70E740481C1C}">
                 <a14:useLocalDpi xmlns:a14="http://schemas.microsoft.com/office/drawing/2010/main" val="0"/>
               </a:ext>
               <a:ext uri="{96DAC541-7B7A-43D3-8B79-37D633B846F1}">
-                <asvg:svgBlip xmlns:asvg="http://schemas.microsoft.com/office/drawing/2016/SVG/main" r:embed="rId17"/>
+                <asvg:svgBlip xmlns:asvg="http://schemas.microsoft.com/office/drawing/2016/SVG/main" r:embed="rId10"/>
               </a:ext>
             </a:extLst>
           </a:blip>
@@ -9568,13 +9654,13 @@
           <p:nvPr/>
         </p:nvPicPr>
         <p:blipFill>
-          <a:blip r:embed="rId18">
+          <a:blip>
             <a:extLst>
               <a:ext uri="{28A0092B-C50C-407E-A947-70E740481C1C}">
                 <a14:useLocalDpi xmlns:a14="http://schemas.microsoft.com/office/drawing/2010/main" val="0"/>
               </a:ext>
               <a:ext uri="{96DAC541-7B7A-43D3-8B79-37D633B846F1}">
-                <asvg:svgBlip xmlns:asvg="http://schemas.microsoft.com/office/drawing/2016/SVG/main" r:embed="rId19"/>
+                <asvg:svgBlip xmlns:asvg="http://schemas.microsoft.com/office/drawing/2016/SVG/main" r:embed="rId11"/>
               </a:ext>
             </a:extLst>
           </a:blip>
@@ -10058,6 +10144,2331 @@
   <p:cSld>
     <p:spTree>
       <p:nvGrpSpPr>
+        <p:cNvPr id="1" name="">
+          <a:extLst>
+            <a:ext uri="{FF2B5EF4-FFF2-40B4-BE49-F238E27FC236}">
+              <a16:creationId xmlns:a16="http://schemas.microsoft.com/office/drawing/2014/main" id="{60407F4C-E53E-7EC8-C6FB-D7D397BD3E92}"/>
+            </a:ext>
+          </a:extLst>
+        </p:cNvPr>
+        <p:cNvGrpSpPr/>
+        <p:nvPr/>
+      </p:nvGrpSpPr>
+      <p:grpSpPr>
+        <a:xfrm>
+          <a:off x="0" y="0"/>
+          <a:ext cx="0" cy="0"/>
+          <a:chOff x="0" y="0"/>
+          <a:chExt cx="0" cy="0"/>
+        </a:xfrm>
+      </p:grpSpPr>
+      <p:sp>
+        <p:nvSpPr>
+          <p:cNvPr id="10" name="TextBox 9">
+            <a:extLst>
+              <a:ext uri="{FF2B5EF4-FFF2-40B4-BE49-F238E27FC236}">
+                <a16:creationId xmlns:a16="http://schemas.microsoft.com/office/drawing/2014/main" id="{3C824899-6586-0767-7783-847946D3A251}"/>
+              </a:ext>
+            </a:extLst>
+          </p:cNvPr>
+          <p:cNvSpPr txBox="1"/>
+          <p:nvPr/>
+        </p:nvSpPr>
+        <p:spPr>
+          <a:xfrm>
+            <a:off x="3595935" y="2411126"/>
+            <a:ext cx="587020" cy="248209"/>
+          </a:xfrm>
+          <a:prstGeom prst="rect">
+            <a:avLst/>
+          </a:prstGeom>
+          <a:noFill/>
+        </p:spPr>
+        <p:txBody>
+          <a:bodyPr wrap="none" rtlCol="0">
+            <a:spAutoFit/>
+          </a:bodyPr>
+          <a:lstStyle/>
+          <a:p>
+            <a:pPr algn="ctr"/>
+            <a:r>
+              <a:rPr lang="fr-CA" sz="1013" dirty="0">
+                <a:solidFill>
+                  <a:schemeClr val="accent1"/>
+                </a:solidFill>
+              </a:rPr>
+              <a:t>owlcms</a:t>
+            </a:r>
+          </a:p>
+        </p:txBody>
+      </p:sp>
+      <p:pic>
+        <p:nvPicPr>
+          <p:cNvPr id="11" name="Graphic 10" descr="Laptop">
+            <a:extLst>
+              <a:ext uri="{FF2B5EF4-FFF2-40B4-BE49-F238E27FC236}">
+                <a16:creationId xmlns:a16="http://schemas.microsoft.com/office/drawing/2014/main" id="{D9C48FF0-EEBC-4783-6769-627AF2774012}"/>
+              </a:ext>
+            </a:extLst>
+          </p:cNvPr>
+          <p:cNvPicPr>
+            <a:picLocks noChangeAspect="1"/>
+          </p:cNvPicPr>
+          <p:nvPr/>
+        </p:nvPicPr>
+        <p:blipFill>
+          <a:blip>
+            <a:extLst>
+              <a:ext uri="{28A0092B-C50C-407E-A947-70E740481C1C}">
+                <a14:useLocalDpi xmlns:a14="http://schemas.microsoft.com/office/drawing/2010/main" val="0"/>
+              </a:ext>
+              <a:ext uri="{96DAC541-7B7A-43D3-8B79-37D633B846F1}">
+                <asvg:svgBlip xmlns:asvg="http://schemas.microsoft.com/office/drawing/2016/SVG/main" r:embed="rId2"/>
+              </a:ext>
+            </a:extLst>
+          </a:blip>
+          <a:stretch>
+            <a:fillRect/>
+          </a:stretch>
+        </p:blipFill>
+        <p:spPr>
+          <a:xfrm>
+            <a:off x="3619971" y="2075063"/>
+            <a:ext cx="514350" cy="514350"/>
+          </a:xfrm>
+          <a:prstGeom prst="rect">
+            <a:avLst/>
+          </a:prstGeom>
+        </p:spPr>
+      </p:pic>
+      <p:grpSp>
+        <p:nvGrpSpPr>
+          <p:cNvPr id="12" name="Group 11">
+            <a:extLst>
+              <a:ext uri="{FF2B5EF4-FFF2-40B4-BE49-F238E27FC236}">
+                <a16:creationId xmlns:a16="http://schemas.microsoft.com/office/drawing/2014/main" id="{399A5D17-20D8-BD66-F152-5477CB851CC9}"/>
+              </a:ext>
+            </a:extLst>
+          </p:cNvPr>
+          <p:cNvGrpSpPr/>
+          <p:nvPr/>
+        </p:nvGrpSpPr>
+        <p:grpSpPr>
+          <a:xfrm>
+            <a:off x="1711029" y="2052591"/>
+            <a:ext cx="437452" cy="728430"/>
+            <a:chOff x="2313501" y="958704"/>
+            <a:chExt cx="437452" cy="728430"/>
+          </a:xfrm>
+        </p:grpSpPr>
+        <p:pic>
+          <p:nvPicPr>
+            <p:cNvPr id="13" name="Graphic 12" descr="Laptop">
+              <a:extLst>
+                <a:ext uri="{FF2B5EF4-FFF2-40B4-BE49-F238E27FC236}">
+                  <a16:creationId xmlns:a16="http://schemas.microsoft.com/office/drawing/2014/main" id="{C8815DEF-49C9-75E6-DD9B-ACF05241624E}"/>
+                </a:ext>
+              </a:extLst>
+            </p:cNvPr>
+            <p:cNvPicPr>
+              <a:picLocks noChangeAspect="1"/>
+            </p:cNvPicPr>
+            <p:nvPr/>
+          </p:nvPicPr>
+          <p:blipFill>
+            <a:blip>
+              <a:extLst>
+                <a:ext uri="{28A0092B-C50C-407E-A947-70E740481C1C}">
+                  <a14:useLocalDpi xmlns:a14="http://schemas.microsoft.com/office/drawing/2010/main" val="0"/>
+                </a:ext>
+                <a:ext uri="{96DAC541-7B7A-43D3-8B79-37D633B846F1}">
+                  <asvg:svgBlip xmlns:asvg="http://schemas.microsoft.com/office/drawing/2016/SVG/main" r:embed="rId3"/>
+                </a:ext>
+              </a:extLst>
+            </a:blip>
+            <a:stretch>
+              <a:fillRect/>
+            </a:stretch>
+          </p:blipFill>
+          <p:spPr>
+            <a:xfrm>
+              <a:off x="2313501" y="958704"/>
+              <a:ext cx="437452" cy="456245"/>
+            </a:xfrm>
+            <a:prstGeom prst="rect">
+              <a:avLst/>
+            </a:prstGeom>
+          </p:spPr>
+        </p:pic>
+        <p:sp>
+          <p:nvSpPr>
+            <p:cNvPr id="14" name="TextBox 13">
+              <a:extLst>
+                <a:ext uri="{FF2B5EF4-FFF2-40B4-BE49-F238E27FC236}">
+                  <a16:creationId xmlns:a16="http://schemas.microsoft.com/office/drawing/2014/main" id="{2FD3CA30-DF00-B6F2-5AF1-A8AE81DCAB7A}"/>
+                </a:ext>
+              </a:extLst>
+            </p:cNvPr>
+            <p:cNvSpPr txBox="1"/>
+            <p:nvPr/>
+          </p:nvSpPr>
+          <p:spPr>
+            <a:xfrm>
+              <a:off x="2439868" y="1283049"/>
+              <a:ext cx="184730" cy="404085"/>
+            </a:xfrm>
+            <a:prstGeom prst="rect">
+              <a:avLst/>
+            </a:prstGeom>
+            <a:noFill/>
+          </p:spPr>
+          <p:txBody>
+            <a:bodyPr wrap="none" rtlCol="0">
+              <a:spAutoFit/>
+            </a:bodyPr>
+            <a:lstStyle/>
+            <a:p>
+              <a:pPr algn="ctr"/>
+              <a:br>
+                <a:rPr lang="fr-CA" sz="1013" dirty="0"/>
+              </a:br>
+              <a:endParaRPr lang="fr-CA" sz="1013" dirty="0"/>
+            </a:p>
+          </p:txBody>
+        </p:sp>
+      </p:grpSp>
+      <p:pic>
+        <p:nvPicPr>
+          <p:cNvPr id="15" name="Graphic 14" descr="Monitor with solid fill">
+            <a:extLst>
+              <a:ext uri="{FF2B5EF4-FFF2-40B4-BE49-F238E27FC236}">
+                <a16:creationId xmlns:a16="http://schemas.microsoft.com/office/drawing/2014/main" id="{A5A3D275-403E-3030-07AD-23C7CB8E2DD4}"/>
+              </a:ext>
+            </a:extLst>
+          </p:cNvPr>
+          <p:cNvPicPr>
+            <a:picLocks noChangeAspect="1"/>
+          </p:cNvPicPr>
+          <p:nvPr/>
+        </p:nvPicPr>
+        <p:blipFill>
+          <a:blip>
+            <a:extLst>
+              <a:ext uri="{28A0092B-C50C-407E-A947-70E740481C1C}">
+                <a14:useLocalDpi xmlns:a14="http://schemas.microsoft.com/office/drawing/2010/main" val="0"/>
+              </a:ext>
+              <a:ext uri="{96DAC541-7B7A-43D3-8B79-37D633B846F1}">
+                <asvg:svgBlip xmlns:asvg="http://schemas.microsoft.com/office/drawing/2016/SVG/main" r:embed="rId4"/>
+              </a:ext>
+            </a:extLst>
+          </a:blip>
+          <a:stretch>
+            <a:fillRect/>
+          </a:stretch>
+        </p:blipFill>
+        <p:spPr>
+          <a:xfrm>
+            <a:off x="781729" y="2052591"/>
+            <a:ext cx="463422" cy="463422"/>
+          </a:xfrm>
+          <a:prstGeom prst="rect">
+            <a:avLst/>
+          </a:prstGeom>
+        </p:spPr>
+      </p:pic>
+      <p:sp>
+        <p:nvSpPr>
+          <p:cNvPr id="16" name="TextBox 15">
+            <a:extLst>
+              <a:ext uri="{FF2B5EF4-FFF2-40B4-BE49-F238E27FC236}">
+                <a16:creationId xmlns:a16="http://schemas.microsoft.com/office/drawing/2014/main" id="{D05A6CD3-0DB0-2C6A-2CA1-E9A00416F55C}"/>
+              </a:ext>
+            </a:extLst>
+          </p:cNvPr>
+          <p:cNvSpPr txBox="1"/>
+          <p:nvPr/>
+        </p:nvSpPr>
+        <p:spPr>
+          <a:xfrm>
+            <a:off x="548680" y="2454149"/>
+            <a:ext cx="939371" cy="317651"/>
+          </a:xfrm>
+          <a:prstGeom prst="rect">
+            <a:avLst/>
+          </a:prstGeom>
+          <a:noFill/>
+        </p:spPr>
+        <p:txBody>
+          <a:bodyPr wrap="square" rtlCol="0">
+            <a:spAutoFit/>
+          </a:bodyPr>
+          <a:lstStyle/>
+          <a:p>
+            <a:pPr algn="ctr">
+              <a:lnSpc>
+                <a:spcPct val="70000"/>
+              </a:lnSpc>
+            </a:pPr>
+            <a:r>
+              <a:rPr lang="fr-CA" sz="1013" dirty="0"/>
+              <a:t>Scoreboard</a:t>
+            </a:r>
+            <a:br>
+              <a:rPr lang="fr-CA" sz="1013" dirty="0"/>
+            </a:br>
+            <a:r>
+              <a:rPr lang="fr-CA" sz="1013" dirty="0"/>
+              <a:t>TV</a:t>
+            </a:r>
+          </a:p>
+        </p:txBody>
+      </p:sp>
+      <p:cxnSp>
+        <p:nvCxnSpPr>
+          <p:cNvPr id="17" name="Straight Arrow Connector 16">
+            <a:extLst>
+              <a:ext uri="{FF2B5EF4-FFF2-40B4-BE49-F238E27FC236}">
+                <a16:creationId xmlns:a16="http://schemas.microsoft.com/office/drawing/2014/main" id="{4A2A3567-27C8-FCBF-EF13-5F30A4538A5E}"/>
+              </a:ext>
+            </a:extLst>
+          </p:cNvPr>
+          <p:cNvCxnSpPr>
+            <a:stCxn id="13" idx="1"/>
+            <a:endCxn id="15" idx="3"/>
+          </p:cNvCxnSpPr>
+          <p:nvPr/>
+        </p:nvCxnSpPr>
+        <p:spPr>
+          <a:xfrm flipH="1">
+            <a:off x="1245151" y="2280714"/>
+            <a:ext cx="465878" cy="3588"/>
+          </a:xfrm>
+          <a:prstGeom prst="straightConnector1">
+            <a:avLst/>
+          </a:prstGeom>
+          <a:ln w="25400">
+            <a:solidFill>
+              <a:schemeClr val="accent6">
+                <a:lumMod val="75000"/>
+              </a:schemeClr>
+            </a:solidFill>
+            <a:tailEnd type="triangle"/>
+          </a:ln>
+        </p:spPr>
+        <p:style>
+          <a:lnRef idx="1">
+            <a:schemeClr val="accent1"/>
+          </a:lnRef>
+          <a:fillRef idx="0">
+            <a:schemeClr val="accent1"/>
+          </a:fillRef>
+          <a:effectRef idx="0">
+            <a:schemeClr val="accent1"/>
+          </a:effectRef>
+          <a:fontRef idx="minor">
+            <a:schemeClr val="tx1"/>
+          </a:fontRef>
+        </p:style>
+      </p:cxnSp>
+      <p:sp>
+        <p:nvSpPr>
+          <p:cNvPr id="21" name="TextBox 20">
+            <a:extLst>
+              <a:ext uri="{FF2B5EF4-FFF2-40B4-BE49-F238E27FC236}">
+                <a16:creationId xmlns:a16="http://schemas.microsoft.com/office/drawing/2014/main" id="{7958EAE2-6460-094E-D591-F39683ECBFA0}"/>
+              </a:ext>
+            </a:extLst>
+          </p:cNvPr>
+          <p:cNvSpPr txBox="1"/>
+          <p:nvPr/>
+        </p:nvSpPr>
+        <p:spPr>
+          <a:xfrm>
+            <a:off x="3068960" y="539552"/>
+            <a:ext cx="862685" cy="317651"/>
+          </a:xfrm>
+          <a:prstGeom prst="rect">
+            <a:avLst/>
+          </a:prstGeom>
+          <a:noFill/>
+        </p:spPr>
+        <p:txBody>
+          <a:bodyPr wrap="square" rtlCol="0">
+            <a:spAutoFit/>
+          </a:bodyPr>
+          <a:lstStyle/>
+          <a:p>
+            <a:pPr algn="ctr">
+              <a:lnSpc>
+                <a:spcPct val="70000"/>
+              </a:lnSpc>
+            </a:pPr>
+            <a:r>
+              <a:rPr lang="fr-CA" sz="1013" dirty="0"/>
+              <a:t>Venue</a:t>
+            </a:r>
+            <a:br>
+              <a:rPr lang="fr-CA" sz="1013" dirty="0"/>
+            </a:br>
+            <a:r>
+              <a:rPr lang="fr-CA" sz="1013" dirty="0" err="1"/>
+              <a:t>WiFi</a:t>
+            </a:r>
+            <a:endParaRPr lang="fr-CA" sz="1013" dirty="0"/>
+          </a:p>
+        </p:txBody>
+      </p:sp>
+      <p:sp>
+        <p:nvSpPr>
+          <p:cNvPr id="22" name="TextBox 21">
+            <a:extLst>
+              <a:ext uri="{FF2B5EF4-FFF2-40B4-BE49-F238E27FC236}">
+                <a16:creationId xmlns:a16="http://schemas.microsoft.com/office/drawing/2014/main" id="{BA67FB58-5020-359F-6888-DFD3302C3894}"/>
+              </a:ext>
+            </a:extLst>
+          </p:cNvPr>
+          <p:cNvSpPr txBox="1"/>
+          <p:nvPr/>
+        </p:nvSpPr>
+        <p:spPr>
+          <a:xfrm>
+            <a:off x="1319323" y="2116321"/>
+            <a:ext cx="425116" cy="184089"/>
+          </a:xfrm>
+          <a:prstGeom prst="rect">
+            <a:avLst/>
+          </a:prstGeom>
+          <a:noFill/>
+        </p:spPr>
+        <p:txBody>
+          <a:bodyPr wrap="none" rtlCol="0">
+            <a:spAutoFit/>
+          </a:bodyPr>
+          <a:lstStyle/>
+          <a:p>
+            <a:pPr algn="ctr">
+              <a:lnSpc>
+                <a:spcPct val="70000"/>
+              </a:lnSpc>
+            </a:pPr>
+            <a:r>
+              <a:rPr lang="en-CA" sz="800" dirty="0"/>
+              <a:t>HDMI</a:t>
+            </a:r>
+          </a:p>
+        </p:txBody>
+      </p:sp>
+      <p:sp>
+        <p:nvSpPr>
+          <p:cNvPr id="23" name="TextBox 22">
+            <a:extLst>
+              <a:ext uri="{FF2B5EF4-FFF2-40B4-BE49-F238E27FC236}">
+                <a16:creationId xmlns:a16="http://schemas.microsoft.com/office/drawing/2014/main" id="{D0292344-F63F-99B8-3873-38F482D65EE3}"/>
+              </a:ext>
+            </a:extLst>
+          </p:cNvPr>
+          <p:cNvSpPr txBox="1"/>
+          <p:nvPr/>
+        </p:nvSpPr>
+        <p:spPr>
+          <a:xfrm>
+            <a:off x="3455273" y="2616660"/>
+            <a:ext cx="939371" cy="208519"/>
+          </a:xfrm>
+          <a:prstGeom prst="rect">
+            <a:avLst/>
+          </a:prstGeom>
+          <a:noFill/>
+        </p:spPr>
+        <p:txBody>
+          <a:bodyPr wrap="square" rtlCol="0">
+            <a:spAutoFit/>
+          </a:bodyPr>
+          <a:lstStyle/>
+          <a:p>
+            <a:pPr algn="ctr">
+              <a:lnSpc>
+                <a:spcPct val="70000"/>
+              </a:lnSpc>
+            </a:pPr>
+            <a:r>
+              <a:rPr lang="fr-CA" sz="1013" dirty="0" err="1"/>
+              <a:t>Announcer</a:t>
+            </a:r>
+            <a:endParaRPr lang="fr-CA" sz="1013" dirty="0"/>
+          </a:p>
+        </p:txBody>
+      </p:sp>
+      <p:sp>
+        <p:nvSpPr>
+          <p:cNvPr id="24" name="TextBox 23">
+            <a:extLst>
+              <a:ext uri="{FF2B5EF4-FFF2-40B4-BE49-F238E27FC236}">
+                <a16:creationId xmlns:a16="http://schemas.microsoft.com/office/drawing/2014/main" id="{D3544067-5EAA-78FA-04BE-2AD9B41499D6}"/>
+              </a:ext>
+            </a:extLst>
+          </p:cNvPr>
+          <p:cNvSpPr txBox="1"/>
+          <p:nvPr/>
+        </p:nvSpPr>
+        <p:spPr>
+          <a:xfrm>
+            <a:off x="1481517" y="2439998"/>
+            <a:ext cx="939371" cy="208519"/>
+          </a:xfrm>
+          <a:prstGeom prst="rect">
+            <a:avLst/>
+          </a:prstGeom>
+          <a:noFill/>
+        </p:spPr>
+        <p:txBody>
+          <a:bodyPr wrap="square" rtlCol="0">
+            <a:spAutoFit/>
+          </a:bodyPr>
+          <a:lstStyle/>
+          <a:p>
+            <a:pPr algn="ctr">
+              <a:lnSpc>
+                <a:spcPct val="70000"/>
+              </a:lnSpc>
+            </a:pPr>
+            <a:r>
+              <a:rPr lang="fr-CA" sz="1013" dirty="0"/>
+              <a:t>Marshal</a:t>
+            </a:r>
+          </a:p>
+        </p:txBody>
+      </p:sp>
+      <p:pic>
+        <p:nvPicPr>
+          <p:cNvPr id="25" name="Graphic 24" descr="Monitor with solid fill">
+            <a:extLst>
+              <a:ext uri="{FF2B5EF4-FFF2-40B4-BE49-F238E27FC236}">
+                <a16:creationId xmlns:a16="http://schemas.microsoft.com/office/drawing/2014/main" id="{5D027278-F880-6D86-D6BE-84C72EEBA8CB}"/>
+              </a:ext>
+            </a:extLst>
+          </p:cNvPr>
+          <p:cNvPicPr>
+            <a:picLocks noChangeAspect="1"/>
+          </p:cNvPicPr>
+          <p:nvPr/>
+        </p:nvPicPr>
+        <p:blipFill>
+          <a:blip>
+            <a:extLst>
+              <a:ext uri="{28A0092B-C50C-407E-A947-70E740481C1C}">
+                <a14:useLocalDpi xmlns:a14="http://schemas.microsoft.com/office/drawing/2010/main" val="0"/>
+              </a:ext>
+              <a:ext uri="{96DAC541-7B7A-43D3-8B79-37D633B846F1}">
+                <asvg:svgBlip xmlns:asvg="http://schemas.microsoft.com/office/drawing/2016/SVG/main" r:embed="rId4"/>
+              </a:ext>
+            </a:extLst>
+          </a:blip>
+          <a:stretch>
+            <a:fillRect/>
+          </a:stretch>
+        </p:blipFill>
+        <p:spPr>
+          <a:xfrm>
+            <a:off x="2725330" y="2087724"/>
+            <a:ext cx="463422" cy="463422"/>
+          </a:xfrm>
+          <a:prstGeom prst="rect">
+            <a:avLst/>
+          </a:prstGeom>
+        </p:spPr>
+      </p:pic>
+      <p:sp>
+        <p:nvSpPr>
+          <p:cNvPr id="26" name="TextBox 25">
+            <a:extLst>
+              <a:ext uri="{FF2B5EF4-FFF2-40B4-BE49-F238E27FC236}">
+                <a16:creationId xmlns:a16="http://schemas.microsoft.com/office/drawing/2014/main" id="{B9571A5B-5916-647E-F33F-F4F51655195A}"/>
+              </a:ext>
+            </a:extLst>
+          </p:cNvPr>
+          <p:cNvSpPr txBox="1"/>
+          <p:nvPr/>
+        </p:nvSpPr>
+        <p:spPr>
+          <a:xfrm>
+            <a:off x="2506039" y="2381020"/>
+            <a:ext cx="939371" cy="535916"/>
+          </a:xfrm>
+          <a:prstGeom prst="rect">
+            <a:avLst/>
+          </a:prstGeom>
+          <a:noFill/>
+        </p:spPr>
+        <p:txBody>
+          <a:bodyPr wrap="square" rtlCol="0">
+            <a:spAutoFit/>
+          </a:bodyPr>
+          <a:lstStyle/>
+          <a:p>
+            <a:pPr algn="ctr">
+              <a:lnSpc>
+                <a:spcPct val="70000"/>
+              </a:lnSpc>
+            </a:pPr>
+            <a:br>
+              <a:rPr lang="fr-CA" sz="1013" dirty="0"/>
+            </a:br>
+            <a:r>
+              <a:rPr lang="fr-CA" sz="1013" dirty="0" err="1"/>
+              <a:t>Attempt</a:t>
+            </a:r>
+            <a:endParaRPr lang="fr-CA" sz="1013" dirty="0"/>
+          </a:p>
+          <a:p>
+            <a:pPr algn="ctr">
+              <a:lnSpc>
+                <a:spcPct val="70000"/>
+              </a:lnSpc>
+            </a:pPr>
+            <a:r>
+              <a:rPr lang="fr-CA" sz="1013" dirty="0"/>
+              <a:t>Board</a:t>
+            </a:r>
+            <a:br>
+              <a:rPr lang="fr-CA" sz="1013" dirty="0"/>
+            </a:br>
+            <a:r>
+              <a:rPr lang="fr-CA" sz="1013" dirty="0"/>
+              <a:t>TV</a:t>
+            </a:r>
+          </a:p>
+        </p:txBody>
+      </p:sp>
+      <p:cxnSp>
+        <p:nvCxnSpPr>
+          <p:cNvPr id="27" name="Straight Arrow Connector 26">
+            <a:extLst>
+              <a:ext uri="{FF2B5EF4-FFF2-40B4-BE49-F238E27FC236}">
+                <a16:creationId xmlns:a16="http://schemas.microsoft.com/office/drawing/2014/main" id="{CE8583DC-BD21-6FAF-4539-2C5D9BB2DB68}"/>
+              </a:ext>
+            </a:extLst>
+          </p:cNvPr>
+          <p:cNvCxnSpPr>
+            <a:endCxn id="25" idx="3"/>
+          </p:cNvCxnSpPr>
+          <p:nvPr/>
+        </p:nvCxnSpPr>
+        <p:spPr>
+          <a:xfrm flipH="1">
+            <a:off x="3188752" y="2315847"/>
+            <a:ext cx="465878" cy="3588"/>
+          </a:xfrm>
+          <a:prstGeom prst="straightConnector1">
+            <a:avLst/>
+          </a:prstGeom>
+          <a:ln w="25400">
+            <a:solidFill>
+              <a:schemeClr val="accent6">
+                <a:lumMod val="75000"/>
+              </a:schemeClr>
+            </a:solidFill>
+            <a:tailEnd type="triangle"/>
+          </a:ln>
+        </p:spPr>
+        <p:style>
+          <a:lnRef idx="1">
+            <a:schemeClr val="accent1"/>
+          </a:lnRef>
+          <a:fillRef idx="0">
+            <a:schemeClr val="accent1"/>
+          </a:fillRef>
+          <a:effectRef idx="0">
+            <a:schemeClr val="accent1"/>
+          </a:effectRef>
+          <a:fontRef idx="minor">
+            <a:schemeClr val="tx1"/>
+          </a:fontRef>
+        </p:style>
+      </p:cxnSp>
+      <p:sp>
+        <p:nvSpPr>
+          <p:cNvPr id="28" name="TextBox 27">
+            <a:extLst>
+              <a:ext uri="{FF2B5EF4-FFF2-40B4-BE49-F238E27FC236}">
+                <a16:creationId xmlns:a16="http://schemas.microsoft.com/office/drawing/2014/main" id="{8CDBB9FC-00BF-1F47-0B9F-B7978870CB4E}"/>
+              </a:ext>
+            </a:extLst>
+          </p:cNvPr>
+          <p:cNvSpPr txBox="1"/>
+          <p:nvPr/>
+        </p:nvSpPr>
+        <p:spPr>
+          <a:xfrm>
+            <a:off x="3262924" y="2151454"/>
+            <a:ext cx="425116" cy="184089"/>
+          </a:xfrm>
+          <a:prstGeom prst="rect">
+            <a:avLst/>
+          </a:prstGeom>
+          <a:noFill/>
+        </p:spPr>
+        <p:txBody>
+          <a:bodyPr wrap="none" rtlCol="0">
+            <a:spAutoFit/>
+          </a:bodyPr>
+          <a:lstStyle/>
+          <a:p>
+            <a:pPr algn="ctr">
+              <a:lnSpc>
+                <a:spcPct val="70000"/>
+              </a:lnSpc>
+            </a:pPr>
+            <a:r>
+              <a:rPr lang="en-CA" sz="800" dirty="0"/>
+              <a:t>HDMI</a:t>
+            </a:r>
+          </a:p>
+        </p:txBody>
+      </p:sp>
+      <p:pic>
+        <p:nvPicPr>
+          <p:cNvPr id="29" name="Graphic 28" descr="Smart Phone">
+            <a:extLst>
+              <a:ext uri="{FF2B5EF4-FFF2-40B4-BE49-F238E27FC236}">
+                <a16:creationId xmlns:a16="http://schemas.microsoft.com/office/drawing/2014/main" id="{BA98D282-CDD4-2C08-7318-B4299BA41509}"/>
+              </a:ext>
+            </a:extLst>
+          </p:cNvPr>
+          <p:cNvPicPr>
+            <a:picLocks noChangeAspect="1"/>
+          </p:cNvPicPr>
+          <p:nvPr/>
+        </p:nvPicPr>
+        <p:blipFill>
+          <a:blip>
+            <a:extLst>
+              <a:ext uri="{28A0092B-C50C-407E-A947-70E740481C1C}">
+                <a14:useLocalDpi xmlns:a14="http://schemas.microsoft.com/office/drawing/2010/main" val="0"/>
+              </a:ext>
+              <a:ext uri="{96DAC541-7B7A-43D3-8B79-37D633B846F1}">
+                <asvg:svgBlip xmlns:asvg="http://schemas.microsoft.com/office/drawing/2016/SVG/main" r:embed="rId5"/>
+              </a:ext>
+            </a:extLst>
+          </a:blip>
+          <a:stretch>
+            <a:fillRect/>
+          </a:stretch>
+        </p:blipFill>
+        <p:spPr>
+          <a:xfrm>
+            <a:off x="5538677" y="2153951"/>
+            <a:ext cx="257175" cy="257175"/>
+          </a:xfrm>
+          <a:prstGeom prst="rect">
+            <a:avLst/>
+          </a:prstGeom>
+        </p:spPr>
+      </p:pic>
+      <p:pic>
+        <p:nvPicPr>
+          <p:cNvPr id="30" name="Graphic 29" descr="Smart Phone">
+            <a:extLst>
+              <a:ext uri="{FF2B5EF4-FFF2-40B4-BE49-F238E27FC236}">
+                <a16:creationId xmlns:a16="http://schemas.microsoft.com/office/drawing/2014/main" id="{606A102A-C26D-5A0F-B74A-7FD8E5E4283B}"/>
+              </a:ext>
+            </a:extLst>
+          </p:cNvPr>
+          <p:cNvPicPr>
+            <a:picLocks noChangeAspect="1"/>
+          </p:cNvPicPr>
+          <p:nvPr/>
+        </p:nvPicPr>
+        <p:blipFill>
+          <a:blip>
+            <a:extLst>
+              <a:ext uri="{28A0092B-C50C-407E-A947-70E740481C1C}">
+                <a14:useLocalDpi xmlns:a14="http://schemas.microsoft.com/office/drawing/2010/main" val="0"/>
+              </a:ext>
+              <a:ext uri="{96DAC541-7B7A-43D3-8B79-37D633B846F1}">
+                <asvg:svgBlip xmlns:asvg="http://schemas.microsoft.com/office/drawing/2016/SVG/main" r:embed="rId5"/>
+              </a:ext>
+            </a:extLst>
+          </a:blip>
+          <a:stretch>
+            <a:fillRect/>
+          </a:stretch>
+        </p:blipFill>
+        <p:spPr>
+          <a:xfrm>
+            <a:off x="5290933" y="2153636"/>
+            <a:ext cx="257175" cy="257175"/>
+          </a:xfrm>
+          <a:prstGeom prst="rect">
+            <a:avLst/>
+          </a:prstGeom>
+        </p:spPr>
+      </p:pic>
+      <p:pic>
+        <p:nvPicPr>
+          <p:cNvPr id="31" name="Graphic 30" descr="Smart Phone">
+            <a:extLst>
+              <a:ext uri="{FF2B5EF4-FFF2-40B4-BE49-F238E27FC236}">
+                <a16:creationId xmlns:a16="http://schemas.microsoft.com/office/drawing/2014/main" id="{160D714A-F058-AF6C-E24C-7A261102799C}"/>
+              </a:ext>
+            </a:extLst>
+          </p:cNvPr>
+          <p:cNvPicPr>
+            <a:picLocks noChangeAspect="1"/>
+          </p:cNvPicPr>
+          <p:nvPr/>
+        </p:nvPicPr>
+        <p:blipFill>
+          <a:blip>
+            <a:extLst>
+              <a:ext uri="{28A0092B-C50C-407E-A947-70E740481C1C}">
+                <a14:useLocalDpi xmlns:a14="http://schemas.microsoft.com/office/drawing/2010/main" val="0"/>
+              </a:ext>
+              <a:ext uri="{96DAC541-7B7A-43D3-8B79-37D633B846F1}">
+                <asvg:svgBlip xmlns:asvg="http://schemas.microsoft.com/office/drawing/2016/SVG/main" r:embed="rId5"/>
+              </a:ext>
+            </a:extLst>
+          </a:blip>
+          <a:stretch>
+            <a:fillRect/>
+          </a:stretch>
+        </p:blipFill>
+        <p:spPr>
+          <a:xfrm>
+            <a:off x="5043189" y="2153321"/>
+            <a:ext cx="257175" cy="257175"/>
+          </a:xfrm>
+          <a:prstGeom prst="rect">
+            <a:avLst/>
+          </a:prstGeom>
+        </p:spPr>
+      </p:pic>
+      <p:pic>
+        <p:nvPicPr>
+          <p:cNvPr id="32" name="Picture 31">
+            <a:extLst>
+              <a:ext uri="{FF2B5EF4-FFF2-40B4-BE49-F238E27FC236}">
+                <a16:creationId xmlns:a16="http://schemas.microsoft.com/office/drawing/2014/main" id="{DE3EE9BC-0429-081B-6603-054CEC08FA29}"/>
+              </a:ext>
+            </a:extLst>
+          </p:cNvPr>
+          <p:cNvPicPr>
+            <a:picLocks noChangeAspect="1"/>
+          </p:cNvPicPr>
+          <p:nvPr/>
+        </p:nvPicPr>
+        <p:blipFill>
+          <a:blip r:embed="rId6">
+            <a:extLst>
+              <a:ext uri="{28A0092B-C50C-407E-A947-70E740481C1C}">
+                <a14:useLocalDpi xmlns:a14="http://schemas.microsoft.com/office/drawing/2010/main" val="0"/>
+              </a:ext>
+              <a:ext uri="{837473B0-CC2E-450A-ABE3-18F120FF3D39}">
+                <a1611:picAttrSrcUrl xmlns:a1611="http://schemas.microsoft.com/office/drawing/2016/11/main" r:id="rId7"/>
+              </a:ext>
+            </a:extLst>
+          </a:blip>
+          <a:stretch>
+            <a:fillRect/>
+          </a:stretch>
+        </p:blipFill>
+        <p:spPr>
+          <a:xfrm>
+            <a:off x="4545124" y="1367644"/>
+            <a:ext cx="182880" cy="134684"/>
+          </a:xfrm>
+          <a:prstGeom prst="rect">
+            <a:avLst/>
+          </a:prstGeom>
+        </p:spPr>
+      </p:pic>
+      <p:sp>
+        <p:nvSpPr>
+          <p:cNvPr id="33" name="TextBox 32">
+            <a:extLst>
+              <a:ext uri="{FF2B5EF4-FFF2-40B4-BE49-F238E27FC236}">
+                <a16:creationId xmlns:a16="http://schemas.microsoft.com/office/drawing/2014/main" id="{621EEA97-384F-9ED0-2024-B0CE309A4170}"/>
+              </a:ext>
+            </a:extLst>
+          </p:cNvPr>
+          <p:cNvSpPr txBox="1"/>
+          <p:nvPr/>
+        </p:nvSpPr>
+        <p:spPr>
+          <a:xfrm>
+            <a:off x="5043189" y="2430587"/>
+            <a:ext cx="862685" cy="317651"/>
+          </a:xfrm>
+          <a:prstGeom prst="rect">
+            <a:avLst/>
+          </a:prstGeom>
+          <a:noFill/>
+        </p:spPr>
+        <p:txBody>
+          <a:bodyPr wrap="square" rtlCol="0">
+            <a:spAutoFit/>
+          </a:bodyPr>
+          <a:lstStyle/>
+          <a:p>
+            <a:pPr algn="ctr">
+              <a:lnSpc>
+                <a:spcPct val="70000"/>
+              </a:lnSpc>
+            </a:pPr>
+            <a:r>
+              <a:rPr lang="fr-CA" sz="1013" dirty="0"/>
+              <a:t>Referee</a:t>
+            </a:r>
+            <a:br>
+              <a:rPr lang="fr-CA" sz="1013" dirty="0"/>
+            </a:br>
+            <a:r>
+              <a:rPr lang="fr-CA" sz="1013" dirty="0"/>
+              <a:t>phones</a:t>
+            </a:r>
+          </a:p>
+        </p:txBody>
+      </p:sp>
+      <p:cxnSp>
+        <p:nvCxnSpPr>
+          <p:cNvPr id="36" name="Connector: Curved 35">
+            <a:extLst>
+              <a:ext uri="{FF2B5EF4-FFF2-40B4-BE49-F238E27FC236}">
+                <a16:creationId xmlns:a16="http://schemas.microsoft.com/office/drawing/2014/main" id="{9A701F6D-3A72-DAC5-0F60-6CE6CEBE491C}"/>
+              </a:ext>
+            </a:extLst>
+          </p:cNvPr>
+          <p:cNvCxnSpPr>
+            <a:cxnSpLocks/>
+            <a:stCxn id="13" idx="0"/>
+          </p:cNvCxnSpPr>
+          <p:nvPr/>
+        </p:nvCxnSpPr>
+        <p:spPr>
+          <a:xfrm rot="5400000" flipH="1" flipV="1">
+            <a:off x="2166616" y="810660"/>
+            <a:ext cx="1005071" cy="1478793"/>
+          </a:xfrm>
+          <a:prstGeom prst="curvedConnector3">
+            <a:avLst>
+              <a:gd name="adj1" fmla="val 50000"/>
+            </a:avLst>
+          </a:prstGeom>
+          <a:ln>
+            <a:prstDash val="lgDash"/>
+            <a:headEnd type="triangle"/>
+            <a:tailEnd type="triangle"/>
+          </a:ln>
+        </p:spPr>
+        <p:style>
+          <a:lnRef idx="1">
+            <a:schemeClr val="accent1"/>
+          </a:lnRef>
+          <a:fillRef idx="0">
+            <a:schemeClr val="accent1"/>
+          </a:fillRef>
+          <a:effectRef idx="0">
+            <a:schemeClr val="accent1"/>
+          </a:effectRef>
+          <a:fontRef idx="minor">
+            <a:schemeClr val="tx1"/>
+          </a:fontRef>
+        </p:style>
+      </p:cxnSp>
+      <p:cxnSp>
+        <p:nvCxnSpPr>
+          <p:cNvPr id="42" name="Connector: Curved 41">
+            <a:extLst>
+              <a:ext uri="{FF2B5EF4-FFF2-40B4-BE49-F238E27FC236}">
+                <a16:creationId xmlns:a16="http://schemas.microsoft.com/office/drawing/2014/main" id="{ED45275C-71E5-34F6-8B13-55FCDE891D93}"/>
+              </a:ext>
+            </a:extLst>
+          </p:cNvPr>
+          <p:cNvCxnSpPr/>
+          <p:nvPr/>
+        </p:nvCxnSpPr>
+        <p:spPr>
+          <a:xfrm rot="16200000" flipV="1">
+            <a:off x="3234006" y="1409450"/>
+            <a:ext cx="1005071" cy="281211"/>
+          </a:xfrm>
+          <a:prstGeom prst="curvedConnector3">
+            <a:avLst/>
+          </a:prstGeom>
+          <a:ln>
+            <a:prstDash val="lgDash"/>
+            <a:headEnd type="triangle"/>
+            <a:tailEnd type="triangle"/>
+          </a:ln>
+        </p:spPr>
+        <p:style>
+          <a:lnRef idx="1">
+            <a:schemeClr val="accent1"/>
+          </a:lnRef>
+          <a:fillRef idx="0">
+            <a:schemeClr val="accent1"/>
+          </a:fillRef>
+          <a:effectRef idx="0">
+            <a:schemeClr val="accent1"/>
+          </a:effectRef>
+          <a:fontRef idx="minor">
+            <a:schemeClr val="tx1"/>
+          </a:fontRef>
+        </p:style>
+      </p:cxnSp>
+      <p:cxnSp>
+        <p:nvCxnSpPr>
+          <p:cNvPr id="44" name="Connector: Curved 43">
+            <a:extLst>
+              <a:ext uri="{FF2B5EF4-FFF2-40B4-BE49-F238E27FC236}">
+                <a16:creationId xmlns:a16="http://schemas.microsoft.com/office/drawing/2014/main" id="{D7D68AB4-7053-8B04-3A26-0EA406770E65}"/>
+              </a:ext>
+            </a:extLst>
+          </p:cNvPr>
+          <p:cNvCxnSpPr>
+            <a:cxnSpLocks/>
+            <a:stCxn id="29" idx="0"/>
+          </p:cNvCxnSpPr>
+          <p:nvPr/>
+        </p:nvCxnSpPr>
+        <p:spPr>
+          <a:xfrm rot="16200000" flipV="1">
+            <a:off x="4087062" y="573748"/>
+            <a:ext cx="1257163" cy="1903244"/>
+          </a:xfrm>
+          <a:prstGeom prst="curvedConnector2">
+            <a:avLst/>
+          </a:prstGeom>
+          <a:ln>
+            <a:prstDash val="lgDash"/>
+            <a:headEnd type="triangle"/>
+            <a:tailEnd type="triangle"/>
+          </a:ln>
+        </p:spPr>
+        <p:style>
+          <a:lnRef idx="1">
+            <a:schemeClr val="accent1"/>
+          </a:lnRef>
+          <a:fillRef idx="0">
+            <a:schemeClr val="accent1"/>
+          </a:fillRef>
+          <a:effectRef idx="0">
+            <a:schemeClr val="accent1"/>
+          </a:effectRef>
+          <a:fontRef idx="minor">
+            <a:schemeClr val="tx1"/>
+          </a:fontRef>
+        </p:style>
+      </p:cxnSp>
+      <p:cxnSp>
+        <p:nvCxnSpPr>
+          <p:cNvPr id="46" name="Connector: Curved 45">
+            <a:extLst>
+              <a:ext uri="{FF2B5EF4-FFF2-40B4-BE49-F238E27FC236}">
+                <a16:creationId xmlns:a16="http://schemas.microsoft.com/office/drawing/2014/main" id="{9459FDA8-5424-E55C-5064-B6A6DA062D00}"/>
+              </a:ext>
+            </a:extLst>
+          </p:cNvPr>
+          <p:cNvCxnSpPr>
+            <a:cxnSpLocks/>
+            <a:stCxn id="30" idx="0"/>
+          </p:cNvCxnSpPr>
+          <p:nvPr/>
+        </p:nvCxnSpPr>
+        <p:spPr>
+          <a:xfrm rot="16200000" flipV="1">
+            <a:off x="3963347" y="697462"/>
+            <a:ext cx="1256848" cy="1655500"/>
+          </a:xfrm>
+          <a:prstGeom prst="curvedConnector2">
+            <a:avLst/>
+          </a:prstGeom>
+          <a:ln>
+            <a:prstDash val="lgDash"/>
+            <a:headEnd type="triangle"/>
+            <a:tailEnd type="triangle"/>
+          </a:ln>
+        </p:spPr>
+        <p:style>
+          <a:lnRef idx="1">
+            <a:schemeClr val="accent1"/>
+          </a:lnRef>
+          <a:fillRef idx="0">
+            <a:schemeClr val="accent1"/>
+          </a:fillRef>
+          <a:effectRef idx="0">
+            <a:schemeClr val="accent1"/>
+          </a:effectRef>
+          <a:fontRef idx="minor">
+            <a:schemeClr val="tx1"/>
+          </a:fontRef>
+        </p:style>
+      </p:cxnSp>
+      <p:cxnSp>
+        <p:nvCxnSpPr>
+          <p:cNvPr id="47" name="Connector: Curved 46">
+            <a:extLst>
+              <a:ext uri="{FF2B5EF4-FFF2-40B4-BE49-F238E27FC236}">
+                <a16:creationId xmlns:a16="http://schemas.microsoft.com/office/drawing/2014/main" id="{8F16D631-EB72-3F53-5502-953D6B6E6C9C}"/>
+              </a:ext>
+            </a:extLst>
+          </p:cNvPr>
+          <p:cNvCxnSpPr>
+            <a:cxnSpLocks/>
+            <a:stCxn id="31" idx="0"/>
+          </p:cNvCxnSpPr>
+          <p:nvPr/>
+        </p:nvCxnSpPr>
+        <p:spPr>
+          <a:xfrm rot="16200000" flipV="1">
+            <a:off x="3842013" y="823557"/>
+            <a:ext cx="1251773" cy="1407756"/>
+          </a:xfrm>
+          <a:prstGeom prst="curvedConnector2">
+            <a:avLst/>
+          </a:prstGeom>
+          <a:ln>
+            <a:prstDash val="lgDash"/>
+            <a:headEnd type="triangle"/>
+            <a:tailEnd type="triangle"/>
+          </a:ln>
+        </p:spPr>
+        <p:style>
+          <a:lnRef idx="1">
+            <a:schemeClr val="accent1"/>
+          </a:lnRef>
+          <a:fillRef idx="0">
+            <a:schemeClr val="accent1"/>
+          </a:fillRef>
+          <a:effectRef idx="0">
+            <a:schemeClr val="accent1"/>
+          </a:effectRef>
+          <a:fontRef idx="minor">
+            <a:schemeClr val="tx1"/>
+          </a:fontRef>
+        </p:style>
+      </p:cxnSp>
+      <p:sp>
+        <p:nvSpPr>
+          <p:cNvPr id="54" name="TextBox 53">
+            <a:extLst>
+              <a:ext uri="{FF2B5EF4-FFF2-40B4-BE49-F238E27FC236}">
+                <a16:creationId xmlns:a16="http://schemas.microsoft.com/office/drawing/2014/main" id="{ADBEF359-6CFF-BCE1-53E7-CEE4BCF4D10F}"/>
+              </a:ext>
+            </a:extLst>
+          </p:cNvPr>
+          <p:cNvSpPr txBox="1"/>
+          <p:nvPr/>
+        </p:nvSpPr>
+        <p:spPr>
+          <a:xfrm>
+            <a:off x="2130870" y="1375948"/>
+            <a:ext cx="939371" cy="208519"/>
+          </a:xfrm>
+          <a:prstGeom prst="rect">
+            <a:avLst/>
+          </a:prstGeom>
+          <a:noFill/>
+        </p:spPr>
+        <p:txBody>
+          <a:bodyPr wrap="square" rtlCol="0">
+            <a:spAutoFit/>
+          </a:bodyPr>
+          <a:lstStyle/>
+          <a:p>
+            <a:pPr algn="ctr">
+              <a:lnSpc>
+                <a:spcPct val="70000"/>
+              </a:lnSpc>
+            </a:pPr>
+            <a:r>
+              <a:rPr lang="fr-CA" sz="1013" dirty="0" err="1"/>
+              <a:t>WiFi</a:t>
+            </a:r>
+            <a:endParaRPr lang="fr-CA" sz="1013" dirty="0"/>
+          </a:p>
+        </p:txBody>
+      </p:sp>
+      <p:sp>
+        <p:nvSpPr>
+          <p:cNvPr id="55" name="TextBox 54">
+            <a:extLst>
+              <a:ext uri="{FF2B5EF4-FFF2-40B4-BE49-F238E27FC236}">
+                <a16:creationId xmlns:a16="http://schemas.microsoft.com/office/drawing/2014/main" id="{A292BAD6-6C52-109B-8A15-ECAE6C09D54E}"/>
+              </a:ext>
+            </a:extLst>
+          </p:cNvPr>
+          <p:cNvSpPr txBox="1"/>
+          <p:nvPr/>
+        </p:nvSpPr>
+        <p:spPr>
+          <a:xfrm>
+            <a:off x="3061972" y="1563130"/>
+            <a:ext cx="939371" cy="208519"/>
+          </a:xfrm>
+          <a:prstGeom prst="rect">
+            <a:avLst/>
+          </a:prstGeom>
+          <a:noFill/>
+        </p:spPr>
+        <p:txBody>
+          <a:bodyPr wrap="square" rtlCol="0">
+            <a:spAutoFit/>
+          </a:bodyPr>
+          <a:lstStyle/>
+          <a:p>
+            <a:pPr algn="ctr">
+              <a:lnSpc>
+                <a:spcPct val="70000"/>
+              </a:lnSpc>
+            </a:pPr>
+            <a:r>
+              <a:rPr lang="fr-CA" sz="1013" dirty="0" err="1"/>
+              <a:t>WiFi</a:t>
+            </a:r>
+            <a:endParaRPr lang="fr-CA" sz="1013" dirty="0"/>
+          </a:p>
+        </p:txBody>
+      </p:sp>
+      <p:sp>
+        <p:nvSpPr>
+          <p:cNvPr id="56" name="TextBox 55">
+            <a:extLst>
+              <a:ext uri="{FF2B5EF4-FFF2-40B4-BE49-F238E27FC236}">
+                <a16:creationId xmlns:a16="http://schemas.microsoft.com/office/drawing/2014/main" id="{038B5F13-D2DB-87A7-0F2A-9C1B72E7E15F}"/>
+              </a:ext>
+            </a:extLst>
+          </p:cNvPr>
+          <p:cNvSpPr txBox="1"/>
+          <p:nvPr/>
+        </p:nvSpPr>
+        <p:spPr>
+          <a:xfrm>
+            <a:off x="4178973" y="1515046"/>
+            <a:ext cx="939371" cy="208519"/>
+          </a:xfrm>
+          <a:prstGeom prst="rect">
+            <a:avLst/>
+          </a:prstGeom>
+          <a:noFill/>
+        </p:spPr>
+        <p:txBody>
+          <a:bodyPr wrap="square" rtlCol="0">
+            <a:spAutoFit/>
+          </a:bodyPr>
+          <a:lstStyle/>
+          <a:p>
+            <a:pPr algn="ctr">
+              <a:lnSpc>
+                <a:spcPct val="70000"/>
+              </a:lnSpc>
+            </a:pPr>
+            <a:r>
+              <a:rPr lang="fr-CA" sz="1013" dirty="0" err="1"/>
+              <a:t>WiFi</a:t>
+            </a:r>
+            <a:endParaRPr lang="fr-CA" sz="1013" dirty="0"/>
+          </a:p>
+        </p:txBody>
+      </p:sp>
+      <p:pic>
+        <p:nvPicPr>
+          <p:cNvPr id="7" name="Picture 6">
+            <a:extLst>
+              <a:ext uri="{FF2B5EF4-FFF2-40B4-BE49-F238E27FC236}">
+                <a16:creationId xmlns:a16="http://schemas.microsoft.com/office/drawing/2014/main" id="{504955E6-905A-FD1F-5D4A-CBA65BF80634}"/>
+              </a:ext>
+            </a:extLst>
+          </p:cNvPr>
+          <p:cNvPicPr>
+            <a:picLocks noChangeAspect="1"/>
+          </p:cNvPicPr>
+          <p:nvPr/>
+        </p:nvPicPr>
+        <p:blipFill>
+          <a:blip r:embed="rId6">
+            <a:extLst>
+              <a:ext uri="{28A0092B-C50C-407E-A947-70E740481C1C}">
+                <a14:useLocalDpi xmlns:a14="http://schemas.microsoft.com/office/drawing/2010/main" val="0"/>
+              </a:ext>
+              <a:ext uri="{837473B0-CC2E-450A-ABE3-18F120FF3D39}">
+                <a1611:picAttrSrcUrl xmlns:a1611="http://schemas.microsoft.com/office/drawing/2016/11/main" r:id="rId7"/>
+              </a:ext>
+            </a:extLst>
+          </a:blip>
+          <a:stretch>
+            <a:fillRect/>
+          </a:stretch>
+        </p:blipFill>
+        <p:spPr>
+          <a:xfrm>
+            <a:off x="3424836" y="845079"/>
+            <a:ext cx="182880" cy="134684"/>
+          </a:xfrm>
+          <a:prstGeom prst="rect">
+            <a:avLst/>
+          </a:prstGeom>
+        </p:spPr>
+      </p:pic>
+    </p:spTree>
+    <p:extLst>
+      <p:ext uri="{BB962C8B-B14F-4D97-AF65-F5344CB8AC3E}">
+        <p14:creationId xmlns:p14="http://schemas.microsoft.com/office/powerpoint/2010/main" val="477224890"/>
+      </p:ext>
+    </p:extLst>
+  </p:cSld>
+  <p:clrMapOvr>
+    <a:masterClrMapping/>
+  </p:clrMapOvr>
+</p:sld>
+</file>
+
+<file path=ppt/slides/slide11.xml><?xml version="1.0" encoding="utf-8"?>
+<p:sld xmlns:a="http://schemas.openxmlformats.org/drawingml/2006/main" xmlns:r="http://schemas.openxmlformats.org/officeDocument/2006/relationships" xmlns:p="http://schemas.openxmlformats.org/presentationml/2006/main">
+  <p:cSld>
+    <p:spTree>
+      <p:nvGrpSpPr>
+        <p:cNvPr id="1" name=""/>
+        <p:cNvGrpSpPr/>
+        <p:nvPr/>
+      </p:nvGrpSpPr>
+      <p:grpSpPr>
+        <a:xfrm>
+          <a:off x="0" y="0"/>
+          <a:ext cx="0" cy="0"/>
+          <a:chOff x="0" y="0"/>
+          <a:chExt cx="0" cy="0"/>
+        </a:xfrm>
+      </p:grpSpPr>
+      <p:sp>
+        <p:nvSpPr>
+          <p:cNvPr id="72" name="TextBox 71">
+            <a:extLst>
+              <a:ext uri="{FF2B5EF4-FFF2-40B4-BE49-F238E27FC236}">
+                <a16:creationId xmlns:a16="http://schemas.microsoft.com/office/drawing/2014/main" id="{2203EEF7-8763-B761-8E52-FD53115C8BC4}"/>
+              </a:ext>
+            </a:extLst>
+          </p:cNvPr>
+          <p:cNvSpPr txBox="1"/>
+          <p:nvPr/>
+        </p:nvSpPr>
+        <p:spPr>
+          <a:xfrm>
+            <a:off x="3582792" y="2879178"/>
+            <a:ext cx="587020" cy="248209"/>
+          </a:xfrm>
+          <a:prstGeom prst="rect">
+            <a:avLst/>
+          </a:prstGeom>
+          <a:noFill/>
+        </p:spPr>
+        <p:txBody>
+          <a:bodyPr wrap="none" rtlCol="0">
+            <a:spAutoFit/>
+          </a:bodyPr>
+          <a:lstStyle/>
+          <a:p>
+            <a:pPr algn="ctr"/>
+            <a:r>
+              <a:rPr lang="fr-CA" sz="1013" dirty="0">
+                <a:solidFill>
+                  <a:schemeClr val="accent1"/>
+                </a:solidFill>
+              </a:rPr>
+              <a:t>owlcms</a:t>
+            </a:r>
+          </a:p>
+        </p:txBody>
+      </p:sp>
+      <p:pic>
+        <p:nvPicPr>
+          <p:cNvPr id="78" name="Graphic 77" descr="Laptop">
+            <a:extLst>
+              <a:ext uri="{FF2B5EF4-FFF2-40B4-BE49-F238E27FC236}">
+                <a16:creationId xmlns:a16="http://schemas.microsoft.com/office/drawing/2014/main" id="{4BF89AD2-596B-7C94-1344-0D34039A4EE0}"/>
+              </a:ext>
+            </a:extLst>
+          </p:cNvPr>
+          <p:cNvPicPr>
+            <a:picLocks noChangeAspect="1"/>
+          </p:cNvPicPr>
+          <p:nvPr/>
+        </p:nvPicPr>
+        <p:blipFill>
+          <a:blip>
+            <a:extLst>
+              <a:ext uri="{28A0092B-C50C-407E-A947-70E740481C1C}">
+                <a14:useLocalDpi xmlns:a14="http://schemas.microsoft.com/office/drawing/2010/main" val="0"/>
+              </a:ext>
+              <a:ext uri="{96DAC541-7B7A-43D3-8B79-37D633B846F1}">
+                <asvg:svgBlip xmlns:asvg="http://schemas.microsoft.com/office/drawing/2016/SVG/main" r:embed="rId2"/>
+              </a:ext>
+            </a:extLst>
+          </a:blip>
+          <a:stretch>
+            <a:fillRect/>
+          </a:stretch>
+        </p:blipFill>
+        <p:spPr>
+          <a:xfrm>
+            <a:off x="3606828" y="2543115"/>
+            <a:ext cx="514350" cy="514350"/>
+          </a:xfrm>
+          <a:prstGeom prst="rect">
+            <a:avLst/>
+          </a:prstGeom>
+        </p:spPr>
+      </p:pic>
+      <p:grpSp>
+        <p:nvGrpSpPr>
+          <p:cNvPr id="60" name="Group 59">
+            <a:extLst>
+              <a:ext uri="{FF2B5EF4-FFF2-40B4-BE49-F238E27FC236}">
+                <a16:creationId xmlns:a16="http://schemas.microsoft.com/office/drawing/2014/main" id="{74AFF561-DD6F-5BB8-4DC0-216725C3D8B7}"/>
+              </a:ext>
+            </a:extLst>
+          </p:cNvPr>
+          <p:cNvGrpSpPr/>
+          <p:nvPr/>
+        </p:nvGrpSpPr>
+        <p:grpSpPr>
+          <a:xfrm>
+            <a:off x="3655245" y="1695889"/>
+            <a:ext cx="437452" cy="728430"/>
+            <a:chOff x="2313501" y="958704"/>
+            <a:chExt cx="437452" cy="728430"/>
+          </a:xfrm>
+        </p:grpSpPr>
+        <p:pic>
+          <p:nvPicPr>
+            <p:cNvPr id="68" name="Graphic 67" descr="Laptop">
+              <a:extLst>
+                <a:ext uri="{FF2B5EF4-FFF2-40B4-BE49-F238E27FC236}">
+                  <a16:creationId xmlns:a16="http://schemas.microsoft.com/office/drawing/2014/main" id="{0856CCFE-A969-C49A-E832-1C0E6BA50241}"/>
+                </a:ext>
+              </a:extLst>
+            </p:cNvPr>
+            <p:cNvPicPr>
+              <a:picLocks noChangeAspect="1"/>
+            </p:cNvPicPr>
+            <p:nvPr/>
+          </p:nvPicPr>
+          <p:blipFill>
+            <a:blip>
+              <a:extLst>
+                <a:ext uri="{28A0092B-C50C-407E-A947-70E740481C1C}">
+                  <a14:useLocalDpi xmlns:a14="http://schemas.microsoft.com/office/drawing/2010/main" val="0"/>
+                </a:ext>
+                <a:ext uri="{96DAC541-7B7A-43D3-8B79-37D633B846F1}">
+                  <asvg:svgBlip xmlns:asvg="http://schemas.microsoft.com/office/drawing/2016/SVG/main" r:embed="rId3"/>
+                </a:ext>
+              </a:extLst>
+            </a:blip>
+            <a:stretch>
+              <a:fillRect/>
+            </a:stretch>
+          </p:blipFill>
+          <p:spPr>
+            <a:xfrm>
+              <a:off x="2313501" y="958704"/>
+              <a:ext cx="437452" cy="456245"/>
+            </a:xfrm>
+            <a:prstGeom prst="rect">
+              <a:avLst/>
+            </a:prstGeom>
+          </p:spPr>
+        </p:pic>
+        <p:sp>
+          <p:nvSpPr>
+            <p:cNvPr id="73" name="TextBox 72">
+              <a:extLst>
+                <a:ext uri="{FF2B5EF4-FFF2-40B4-BE49-F238E27FC236}">
+                  <a16:creationId xmlns:a16="http://schemas.microsoft.com/office/drawing/2014/main" id="{0925C640-24D2-31D1-53A7-2FF27E10A476}"/>
+                </a:ext>
+              </a:extLst>
+            </p:cNvPr>
+            <p:cNvSpPr txBox="1"/>
+            <p:nvPr/>
+          </p:nvSpPr>
+          <p:spPr>
+            <a:xfrm>
+              <a:off x="2439868" y="1283049"/>
+              <a:ext cx="184730" cy="404085"/>
+            </a:xfrm>
+            <a:prstGeom prst="rect">
+              <a:avLst/>
+            </a:prstGeom>
+            <a:noFill/>
+          </p:spPr>
+          <p:txBody>
+            <a:bodyPr wrap="none" rtlCol="0">
+              <a:spAutoFit/>
+            </a:bodyPr>
+            <a:lstStyle/>
+            <a:p>
+              <a:pPr algn="ctr"/>
+              <a:br>
+                <a:rPr lang="fr-CA" sz="1013" dirty="0"/>
+              </a:br>
+              <a:endParaRPr lang="fr-CA" sz="1013" dirty="0"/>
+            </a:p>
+          </p:txBody>
+        </p:sp>
+      </p:grpSp>
+      <p:pic>
+        <p:nvPicPr>
+          <p:cNvPr id="107" name="Graphic 106" descr="Monitor with solid fill">
+            <a:extLst>
+              <a:ext uri="{FF2B5EF4-FFF2-40B4-BE49-F238E27FC236}">
+                <a16:creationId xmlns:a16="http://schemas.microsoft.com/office/drawing/2014/main" id="{F2E2F63C-280E-F8B1-E28C-3D71849220AE}"/>
+              </a:ext>
+            </a:extLst>
+          </p:cNvPr>
+          <p:cNvPicPr>
+            <a:picLocks noChangeAspect="1"/>
+          </p:cNvPicPr>
+          <p:nvPr/>
+        </p:nvPicPr>
+        <p:blipFill>
+          <a:blip>
+            <a:extLst>
+              <a:ext uri="{28A0092B-C50C-407E-A947-70E740481C1C}">
+                <a14:useLocalDpi xmlns:a14="http://schemas.microsoft.com/office/drawing/2010/main" val="0"/>
+              </a:ext>
+              <a:ext uri="{96DAC541-7B7A-43D3-8B79-37D633B846F1}">
+                <asvg:svgBlip xmlns:asvg="http://schemas.microsoft.com/office/drawing/2016/SVG/main" r:embed="rId4"/>
+              </a:ext>
+            </a:extLst>
+          </a:blip>
+          <a:stretch>
+            <a:fillRect/>
+          </a:stretch>
+        </p:blipFill>
+        <p:spPr>
+          <a:xfrm>
+            <a:off x="2725945" y="1695889"/>
+            <a:ext cx="463422" cy="463422"/>
+          </a:xfrm>
+          <a:prstGeom prst="rect">
+            <a:avLst/>
+          </a:prstGeom>
+        </p:spPr>
+      </p:pic>
+      <p:sp>
+        <p:nvSpPr>
+          <p:cNvPr id="116" name="TextBox 115">
+            <a:extLst>
+              <a:ext uri="{FF2B5EF4-FFF2-40B4-BE49-F238E27FC236}">
+                <a16:creationId xmlns:a16="http://schemas.microsoft.com/office/drawing/2014/main" id="{BE3673FE-B82F-67A8-446D-0436EA62049E}"/>
+              </a:ext>
+            </a:extLst>
+          </p:cNvPr>
+          <p:cNvSpPr txBox="1"/>
+          <p:nvPr/>
+        </p:nvSpPr>
+        <p:spPr>
+          <a:xfrm>
+            <a:off x="2492896" y="2060104"/>
+            <a:ext cx="939371" cy="317651"/>
+          </a:xfrm>
+          <a:prstGeom prst="rect">
+            <a:avLst/>
+          </a:prstGeom>
+          <a:noFill/>
+        </p:spPr>
+        <p:txBody>
+          <a:bodyPr wrap="square" rtlCol="0">
+            <a:spAutoFit/>
+          </a:bodyPr>
+          <a:lstStyle/>
+          <a:p>
+            <a:pPr algn="ctr">
+              <a:lnSpc>
+                <a:spcPct val="70000"/>
+              </a:lnSpc>
+            </a:pPr>
+            <a:r>
+              <a:rPr lang="fr-CA" sz="1013" dirty="0" err="1"/>
+              <a:t>Warmup</a:t>
+            </a:r>
+            <a:br>
+              <a:rPr lang="fr-CA" sz="1013" dirty="0"/>
+            </a:br>
+            <a:r>
+              <a:rPr lang="fr-CA" sz="1013" dirty="0"/>
+              <a:t>Scoreboard</a:t>
+            </a:r>
+          </a:p>
+        </p:txBody>
+      </p:sp>
+      <p:cxnSp>
+        <p:nvCxnSpPr>
+          <p:cNvPr id="156" name="Straight Arrow Connector 155">
+            <a:extLst>
+              <a:ext uri="{FF2B5EF4-FFF2-40B4-BE49-F238E27FC236}">
+                <a16:creationId xmlns:a16="http://schemas.microsoft.com/office/drawing/2014/main" id="{4DA848C7-A301-8B2E-29CB-1AF6F55C4FE1}"/>
+              </a:ext>
+            </a:extLst>
+          </p:cNvPr>
+          <p:cNvCxnSpPr>
+            <a:stCxn id="68" idx="1"/>
+            <a:endCxn id="107" idx="3"/>
+          </p:cNvCxnSpPr>
+          <p:nvPr/>
+        </p:nvCxnSpPr>
+        <p:spPr>
+          <a:xfrm flipH="1">
+            <a:off x="3189367" y="1924012"/>
+            <a:ext cx="465878" cy="3588"/>
+          </a:xfrm>
+          <a:prstGeom prst="straightConnector1">
+            <a:avLst/>
+          </a:prstGeom>
+          <a:ln w="25400">
+            <a:solidFill>
+              <a:schemeClr val="accent6">
+                <a:lumMod val="75000"/>
+              </a:schemeClr>
+            </a:solidFill>
+            <a:tailEnd type="triangle"/>
+          </a:ln>
+        </p:spPr>
+        <p:style>
+          <a:lnRef idx="1">
+            <a:schemeClr val="accent1"/>
+          </a:lnRef>
+          <a:fillRef idx="0">
+            <a:schemeClr val="accent1"/>
+          </a:fillRef>
+          <a:effectRef idx="0">
+            <a:schemeClr val="accent1"/>
+          </a:effectRef>
+          <a:fontRef idx="minor">
+            <a:schemeClr val="tx1"/>
+          </a:fontRef>
+        </p:style>
+      </p:cxnSp>
+      <p:pic>
+        <p:nvPicPr>
+          <p:cNvPr id="269" name="Graphic 268">
+            <a:extLst>
+              <a:ext uri="{FF2B5EF4-FFF2-40B4-BE49-F238E27FC236}">
+                <a16:creationId xmlns:a16="http://schemas.microsoft.com/office/drawing/2014/main" id="{1E362577-7114-0110-5DE8-8E20B2BB9FFE}"/>
+              </a:ext>
+            </a:extLst>
+          </p:cNvPr>
+          <p:cNvPicPr>
+            <a:picLocks noChangeAspect="1"/>
+          </p:cNvPicPr>
+          <p:nvPr/>
+        </p:nvPicPr>
+        <p:blipFill rotWithShape="1">
+          <a:blip>
+            <a:duotone>
+              <a:schemeClr val="accent1">
+                <a:shade val="45000"/>
+                <a:satMod val="135000"/>
+              </a:schemeClr>
+              <a:prstClr val="white"/>
+            </a:duotone>
+            <a:extLst>
+              <a:ext uri="{28A0092B-C50C-407E-A947-70E740481C1C}">
+                <a14:useLocalDpi xmlns:a14="http://schemas.microsoft.com/office/drawing/2010/main" val="0"/>
+              </a:ext>
+              <a:ext uri="{96DAC541-7B7A-43D3-8B79-37D633B846F1}">
+                <asvg:svgBlip xmlns:asvg="http://schemas.microsoft.com/office/drawing/2016/SVG/main" r:embed="rId5"/>
+              </a:ext>
+            </a:extLst>
+          </a:blip>
+          <a:srcRect t="19758" b="39178"/>
+          <a:stretch/>
+        </p:blipFill>
+        <p:spPr>
+          <a:xfrm>
+            <a:off x="4293096" y="2987212"/>
+            <a:ext cx="710946" cy="291944"/>
+          </a:xfrm>
+          <a:prstGeom prst="rect">
+            <a:avLst/>
+          </a:prstGeom>
+        </p:spPr>
+      </p:pic>
+      <p:cxnSp>
+        <p:nvCxnSpPr>
+          <p:cNvPr id="337" name="Straight Arrow Connector 336">
+            <a:extLst>
+              <a:ext uri="{FF2B5EF4-FFF2-40B4-BE49-F238E27FC236}">
+                <a16:creationId xmlns:a16="http://schemas.microsoft.com/office/drawing/2014/main" id="{1985680E-6AB2-BF60-CFEB-6ED7AB3E08BA}"/>
+              </a:ext>
+            </a:extLst>
+          </p:cNvPr>
+          <p:cNvCxnSpPr>
+            <a:cxnSpLocks/>
+          </p:cNvCxnSpPr>
+          <p:nvPr/>
+        </p:nvCxnSpPr>
+        <p:spPr>
+          <a:xfrm flipH="1">
+            <a:off x="4048428" y="2800290"/>
+            <a:ext cx="320174" cy="0"/>
+          </a:xfrm>
+          <a:prstGeom prst="straightConnector1">
+            <a:avLst/>
+          </a:prstGeom>
+          <a:ln w="12700">
+            <a:solidFill>
+              <a:schemeClr val="accent1"/>
+            </a:solidFill>
+            <a:headEnd type="triangle"/>
+            <a:tailEnd type="triangle"/>
+          </a:ln>
+        </p:spPr>
+        <p:style>
+          <a:lnRef idx="1">
+            <a:schemeClr val="accent1"/>
+          </a:lnRef>
+          <a:fillRef idx="0">
+            <a:schemeClr val="accent1"/>
+          </a:fillRef>
+          <a:effectRef idx="0">
+            <a:schemeClr val="accent1"/>
+          </a:effectRef>
+          <a:fontRef idx="minor">
+            <a:schemeClr val="tx1"/>
+          </a:fontRef>
+        </p:style>
+      </p:cxnSp>
+      <p:cxnSp>
+        <p:nvCxnSpPr>
+          <p:cNvPr id="386" name="Connector: Elbow 385">
+            <a:extLst>
+              <a:ext uri="{FF2B5EF4-FFF2-40B4-BE49-F238E27FC236}">
+                <a16:creationId xmlns:a16="http://schemas.microsoft.com/office/drawing/2014/main" id="{B9268D69-00FB-E4C8-1218-14CB2BF516D2}"/>
+              </a:ext>
+            </a:extLst>
+          </p:cNvPr>
+          <p:cNvCxnSpPr>
+            <a:cxnSpLocks/>
+            <a:stCxn id="94" idx="3"/>
+            <a:endCxn id="68" idx="3"/>
+          </p:cNvCxnSpPr>
+          <p:nvPr/>
+        </p:nvCxnSpPr>
+        <p:spPr>
+          <a:xfrm flipV="1">
+            <a:off x="3992590" y="1924012"/>
+            <a:ext cx="100107" cy="1953033"/>
+          </a:xfrm>
+          <a:prstGeom prst="bentConnector3">
+            <a:avLst>
+              <a:gd name="adj1" fmla="val 401429"/>
+            </a:avLst>
+          </a:prstGeom>
+          <a:ln w="12700">
+            <a:headEnd type="triangle" w="med" len="med"/>
+            <a:tailEnd type="triangle" w="med" len="med"/>
+          </a:ln>
+        </p:spPr>
+        <p:style>
+          <a:lnRef idx="1">
+            <a:schemeClr val="accent1"/>
+          </a:lnRef>
+          <a:fillRef idx="0">
+            <a:schemeClr val="accent1"/>
+          </a:fillRef>
+          <a:effectRef idx="0">
+            <a:schemeClr val="accent1"/>
+          </a:effectRef>
+          <a:fontRef idx="minor">
+            <a:schemeClr val="tx1"/>
+          </a:fontRef>
+        </p:style>
+      </p:cxnSp>
+      <p:sp>
+        <p:nvSpPr>
+          <p:cNvPr id="407" name="TextBox 406">
+            <a:extLst>
+              <a:ext uri="{FF2B5EF4-FFF2-40B4-BE49-F238E27FC236}">
+                <a16:creationId xmlns:a16="http://schemas.microsoft.com/office/drawing/2014/main" id="{BE01BD03-1013-EEB8-B968-1DB1110B6135}"/>
+              </a:ext>
+            </a:extLst>
+          </p:cNvPr>
+          <p:cNvSpPr txBox="1"/>
+          <p:nvPr/>
+        </p:nvSpPr>
+        <p:spPr>
+          <a:xfrm>
+            <a:off x="4827855" y="3003282"/>
+            <a:ext cx="862685" cy="317651"/>
+          </a:xfrm>
+          <a:prstGeom prst="rect">
+            <a:avLst/>
+          </a:prstGeom>
+          <a:noFill/>
+        </p:spPr>
+        <p:txBody>
+          <a:bodyPr wrap="square" rtlCol="0">
+            <a:spAutoFit/>
+          </a:bodyPr>
+          <a:lstStyle/>
+          <a:p>
+            <a:pPr algn="ctr">
+              <a:lnSpc>
+                <a:spcPct val="70000"/>
+              </a:lnSpc>
+            </a:pPr>
+            <a:r>
+              <a:rPr lang="fr-CA" sz="1013" dirty="0" err="1"/>
+              <a:t>Competition</a:t>
+            </a:r>
+            <a:br>
+              <a:rPr lang="fr-CA" sz="1013" dirty="0"/>
+            </a:br>
+            <a:r>
+              <a:rPr lang="fr-CA" sz="1013" dirty="0"/>
+              <a:t>Router</a:t>
+            </a:r>
+          </a:p>
+        </p:txBody>
+      </p:sp>
+      <p:sp>
+        <p:nvSpPr>
+          <p:cNvPr id="12" name="TextBox 11">
+            <a:extLst>
+              <a:ext uri="{FF2B5EF4-FFF2-40B4-BE49-F238E27FC236}">
+                <a16:creationId xmlns:a16="http://schemas.microsoft.com/office/drawing/2014/main" id="{BE21DD6A-F02D-D638-943C-F12CEEF526A6}"/>
+              </a:ext>
+            </a:extLst>
+          </p:cNvPr>
+          <p:cNvSpPr txBox="1"/>
+          <p:nvPr/>
+        </p:nvSpPr>
+        <p:spPr>
+          <a:xfrm>
+            <a:off x="3263539" y="1759619"/>
+            <a:ext cx="425116" cy="184089"/>
+          </a:xfrm>
+          <a:prstGeom prst="rect">
+            <a:avLst/>
+          </a:prstGeom>
+          <a:noFill/>
+        </p:spPr>
+        <p:txBody>
+          <a:bodyPr wrap="none" rtlCol="0">
+            <a:spAutoFit/>
+          </a:bodyPr>
+          <a:lstStyle/>
+          <a:p>
+            <a:pPr algn="ctr">
+              <a:lnSpc>
+                <a:spcPct val="70000"/>
+              </a:lnSpc>
+            </a:pPr>
+            <a:r>
+              <a:rPr lang="en-CA" sz="800" dirty="0"/>
+              <a:t>HDMI</a:t>
+            </a:r>
+          </a:p>
+        </p:txBody>
+      </p:sp>
+      <p:sp>
+        <p:nvSpPr>
+          <p:cNvPr id="18" name="TextBox 17">
+            <a:extLst>
+              <a:ext uri="{FF2B5EF4-FFF2-40B4-BE49-F238E27FC236}">
+                <a16:creationId xmlns:a16="http://schemas.microsoft.com/office/drawing/2014/main" id="{E2C70ECE-016A-9A22-AD05-903DFA223D4B}"/>
+              </a:ext>
+            </a:extLst>
+          </p:cNvPr>
+          <p:cNvSpPr txBox="1"/>
+          <p:nvPr/>
+        </p:nvSpPr>
+        <p:spPr>
+          <a:xfrm>
+            <a:off x="3392996" y="3023828"/>
+            <a:ext cx="939371" cy="317651"/>
+          </a:xfrm>
+          <a:prstGeom prst="rect">
+            <a:avLst/>
+          </a:prstGeom>
+          <a:noFill/>
+        </p:spPr>
+        <p:txBody>
+          <a:bodyPr wrap="square" rtlCol="0">
+            <a:spAutoFit/>
+          </a:bodyPr>
+          <a:lstStyle/>
+          <a:p>
+            <a:pPr algn="ctr">
+              <a:lnSpc>
+                <a:spcPct val="70000"/>
+              </a:lnSpc>
+            </a:pPr>
+            <a:r>
+              <a:rPr lang="fr-CA" sz="1013" dirty="0" err="1"/>
+              <a:t>Announcer</a:t>
+            </a:r>
+            <a:br>
+              <a:rPr lang="fr-CA" sz="1013" dirty="0"/>
+            </a:br>
+            <a:r>
+              <a:rPr lang="fr-CA" sz="1013" dirty="0" err="1"/>
+              <a:t>Timekeeper</a:t>
+            </a:r>
+            <a:endParaRPr lang="fr-CA" sz="1013" dirty="0"/>
+          </a:p>
+        </p:txBody>
+      </p:sp>
+      <p:sp>
+        <p:nvSpPr>
+          <p:cNvPr id="79" name="TextBox 78">
+            <a:extLst>
+              <a:ext uri="{FF2B5EF4-FFF2-40B4-BE49-F238E27FC236}">
+                <a16:creationId xmlns:a16="http://schemas.microsoft.com/office/drawing/2014/main" id="{90C8B18D-E554-35ED-B5A1-FB8971D127E8}"/>
+              </a:ext>
+            </a:extLst>
+          </p:cNvPr>
+          <p:cNvSpPr txBox="1"/>
+          <p:nvPr/>
+        </p:nvSpPr>
+        <p:spPr>
+          <a:xfrm>
+            <a:off x="3422911" y="2052591"/>
+            <a:ext cx="939371" cy="317651"/>
+          </a:xfrm>
+          <a:prstGeom prst="rect">
+            <a:avLst/>
+          </a:prstGeom>
+          <a:noFill/>
+        </p:spPr>
+        <p:txBody>
+          <a:bodyPr wrap="square" rtlCol="0">
+            <a:spAutoFit/>
+          </a:bodyPr>
+          <a:lstStyle/>
+          <a:p>
+            <a:pPr algn="ctr">
+              <a:lnSpc>
+                <a:spcPct val="70000"/>
+              </a:lnSpc>
+            </a:pPr>
+            <a:r>
+              <a:rPr lang="fr-CA" sz="1013" dirty="0"/>
+              <a:t>Marshall</a:t>
+            </a:r>
+            <a:br>
+              <a:rPr lang="fr-CA" sz="1013" dirty="0"/>
+            </a:br>
+            <a:r>
+              <a:rPr lang="fr-CA" sz="1013" dirty="0" err="1"/>
+              <a:t>Secretary</a:t>
+            </a:r>
+            <a:endParaRPr lang="fr-CA" sz="1013" dirty="0"/>
+          </a:p>
+        </p:txBody>
+      </p:sp>
+      <p:pic>
+        <p:nvPicPr>
+          <p:cNvPr id="87" name="Graphic 86" descr="Monitor with solid fill">
+            <a:extLst>
+              <a:ext uri="{FF2B5EF4-FFF2-40B4-BE49-F238E27FC236}">
+                <a16:creationId xmlns:a16="http://schemas.microsoft.com/office/drawing/2014/main" id="{6ACA4A9E-0CD9-FF26-669D-2D0AE15C084F}"/>
+              </a:ext>
+            </a:extLst>
+          </p:cNvPr>
+          <p:cNvPicPr>
+            <a:picLocks noChangeAspect="1"/>
+          </p:cNvPicPr>
+          <p:nvPr/>
+        </p:nvPicPr>
+        <p:blipFill>
+          <a:blip>
+            <a:extLst>
+              <a:ext uri="{28A0092B-C50C-407E-A947-70E740481C1C}">
+                <a14:useLocalDpi xmlns:a14="http://schemas.microsoft.com/office/drawing/2010/main" val="0"/>
+              </a:ext>
+              <a:ext uri="{96DAC541-7B7A-43D3-8B79-37D633B846F1}">
+                <asvg:svgBlip xmlns:asvg="http://schemas.microsoft.com/office/drawing/2016/SVG/main" r:embed="rId4"/>
+              </a:ext>
+            </a:extLst>
+          </a:blip>
+          <a:stretch>
+            <a:fillRect/>
+          </a:stretch>
+        </p:blipFill>
+        <p:spPr>
+          <a:xfrm>
+            <a:off x="2712187" y="2555776"/>
+            <a:ext cx="463422" cy="463422"/>
+          </a:xfrm>
+          <a:prstGeom prst="rect">
+            <a:avLst/>
+          </a:prstGeom>
+        </p:spPr>
+      </p:pic>
+      <p:sp>
+        <p:nvSpPr>
+          <p:cNvPr id="88" name="TextBox 87">
+            <a:extLst>
+              <a:ext uri="{FF2B5EF4-FFF2-40B4-BE49-F238E27FC236}">
+                <a16:creationId xmlns:a16="http://schemas.microsoft.com/office/drawing/2014/main" id="{5BBB9911-3114-A179-1134-162E24C1AD3A}"/>
+              </a:ext>
+            </a:extLst>
+          </p:cNvPr>
+          <p:cNvSpPr txBox="1"/>
+          <p:nvPr/>
+        </p:nvSpPr>
+        <p:spPr>
+          <a:xfrm>
+            <a:off x="2492896" y="2849072"/>
+            <a:ext cx="939371" cy="426784"/>
+          </a:xfrm>
+          <a:prstGeom prst="rect">
+            <a:avLst/>
+          </a:prstGeom>
+          <a:noFill/>
+        </p:spPr>
+        <p:txBody>
+          <a:bodyPr wrap="square" rtlCol="0">
+            <a:spAutoFit/>
+          </a:bodyPr>
+          <a:lstStyle/>
+          <a:p>
+            <a:pPr algn="ctr">
+              <a:lnSpc>
+                <a:spcPct val="70000"/>
+              </a:lnSpc>
+            </a:pPr>
+            <a:br>
+              <a:rPr lang="fr-CA" sz="1013" dirty="0"/>
+            </a:br>
+            <a:r>
+              <a:rPr lang="fr-CA" sz="1013" dirty="0" err="1"/>
+              <a:t>Attempt</a:t>
+            </a:r>
+            <a:endParaRPr lang="fr-CA" sz="1013" dirty="0"/>
+          </a:p>
+          <a:p>
+            <a:pPr algn="ctr">
+              <a:lnSpc>
+                <a:spcPct val="70000"/>
+              </a:lnSpc>
+            </a:pPr>
+            <a:r>
+              <a:rPr lang="fr-CA" sz="1013" dirty="0" err="1"/>
+              <a:t>Board</a:t>
+            </a:r>
+            <a:endParaRPr lang="fr-CA" sz="1013" dirty="0"/>
+          </a:p>
+        </p:txBody>
+      </p:sp>
+      <p:cxnSp>
+        <p:nvCxnSpPr>
+          <p:cNvPr id="91" name="Straight Arrow Connector 90">
+            <a:extLst>
+              <a:ext uri="{FF2B5EF4-FFF2-40B4-BE49-F238E27FC236}">
+                <a16:creationId xmlns:a16="http://schemas.microsoft.com/office/drawing/2014/main" id="{7B4A887B-52B4-A7A8-4678-09EAEEA5EDCF}"/>
+              </a:ext>
+            </a:extLst>
+          </p:cNvPr>
+          <p:cNvCxnSpPr>
+            <a:endCxn id="87" idx="3"/>
+          </p:cNvCxnSpPr>
+          <p:nvPr/>
+        </p:nvCxnSpPr>
+        <p:spPr>
+          <a:xfrm flipH="1">
+            <a:off x="3175609" y="2783899"/>
+            <a:ext cx="465878" cy="3588"/>
+          </a:xfrm>
+          <a:prstGeom prst="straightConnector1">
+            <a:avLst/>
+          </a:prstGeom>
+          <a:ln w="25400">
+            <a:solidFill>
+              <a:schemeClr val="accent6">
+                <a:lumMod val="75000"/>
+              </a:schemeClr>
+            </a:solidFill>
+            <a:tailEnd type="triangle"/>
+          </a:ln>
+        </p:spPr>
+        <p:style>
+          <a:lnRef idx="1">
+            <a:schemeClr val="accent1"/>
+          </a:lnRef>
+          <a:fillRef idx="0">
+            <a:schemeClr val="accent1"/>
+          </a:fillRef>
+          <a:effectRef idx="0">
+            <a:schemeClr val="accent1"/>
+          </a:effectRef>
+          <a:fontRef idx="minor">
+            <a:schemeClr val="tx1"/>
+          </a:fontRef>
+        </p:style>
+      </p:cxnSp>
+      <p:sp>
+        <p:nvSpPr>
+          <p:cNvPr id="93" name="TextBox 92">
+            <a:extLst>
+              <a:ext uri="{FF2B5EF4-FFF2-40B4-BE49-F238E27FC236}">
+                <a16:creationId xmlns:a16="http://schemas.microsoft.com/office/drawing/2014/main" id="{2F7B7D8D-39F5-1A4D-9DE3-F1C990EBED96}"/>
+              </a:ext>
+            </a:extLst>
+          </p:cNvPr>
+          <p:cNvSpPr txBox="1"/>
+          <p:nvPr/>
+        </p:nvSpPr>
+        <p:spPr>
+          <a:xfrm>
+            <a:off x="3249781" y="2619506"/>
+            <a:ext cx="425116" cy="184089"/>
+          </a:xfrm>
+          <a:prstGeom prst="rect">
+            <a:avLst/>
+          </a:prstGeom>
+          <a:noFill/>
+        </p:spPr>
+        <p:txBody>
+          <a:bodyPr wrap="none" rtlCol="0">
+            <a:spAutoFit/>
+          </a:bodyPr>
+          <a:lstStyle/>
+          <a:p>
+            <a:pPr algn="ctr">
+              <a:lnSpc>
+                <a:spcPct val="70000"/>
+              </a:lnSpc>
+            </a:pPr>
+            <a:r>
+              <a:rPr lang="en-CA" sz="800" dirty="0"/>
+              <a:t>HDMI</a:t>
+            </a:r>
+          </a:p>
+        </p:txBody>
+      </p:sp>
+      <p:pic>
+        <p:nvPicPr>
+          <p:cNvPr id="94" name="Graphic 93" descr="Smart Phone">
+            <a:extLst>
+              <a:ext uri="{FF2B5EF4-FFF2-40B4-BE49-F238E27FC236}">
+                <a16:creationId xmlns:a16="http://schemas.microsoft.com/office/drawing/2014/main" id="{7C77A85E-7AAA-8DAA-EC3F-67A83B132FDE}"/>
+              </a:ext>
+            </a:extLst>
+          </p:cNvPr>
+          <p:cNvPicPr>
+            <a:picLocks noChangeAspect="1"/>
+          </p:cNvPicPr>
+          <p:nvPr/>
+        </p:nvPicPr>
+        <p:blipFill>
+          <a:blip>
+            <a:extLst>
+              <a:ext uri="{28A0092B-C50C-407E-A947-70E740481C1C}">
+                <a14:useLocalDpi xmlns:a14="http://schemas.microsoft.com/office/drawing/2010/main" val="0"/>
+              </a:ext>
+              <a:ext uri="{96DAC541-7B7A-43D3-8B79-37D633B846F1}">
+                <asvg:svgBlip xmlns:asvg="http://schemas.microsoft.com/office/drawing/2016/SVG/main" r:embed="rId6"/>
+              </a:ext>
+            </a:extLst>
+          </a:blip>
+          <a:stretch>
+            <a:fillRect/>
+          </a:stretch>
+        </p:blipFill>
+        <p:spPr>
+          <a:xfrm>
+            <a:off x="3735415" y="3748457"/>
+            <a:ext cx="257175" cy="257175"/>
+          </a:xfrm>
+          <a:prstGeom prst="rect">
+            <a:avLst/>
+          </a:prstGeom>
+        </p:spPr>
+      </p:pic>
+      <p:pic>
+        <p:nvPicPr>
+          <p:cNvPr id="98" name="Graphic 97" descr="Smart Phone">
+            <a:extLst>
+              <a:ext uri="{FF2B5EF4-FFF2-40B4-BE49-F238E27FC236}">
+                <a16:creationId xmlns:a16="http://schemas.microsoft.com/office/drawing/2014/main" id="{C185BAE4-F4A2-B662-61BA-B911E5DF12DE}"/>
+              </a:ext>
+            </a:extLst>
+          </p:cNvPr>
+          <p:cNvPicPr>
+            <a:picLocks noChangeAspect="1"/>
+          </p:cNvPicPr>
+          <p:nvPr/>
+        </p:nvPicPr>
+        <p:blipFill>
+          <a:blip>
+            <a:extLst>
+              <a:ext uri="{28A0092B-C50C-407E-A947-70E740481C1C}">
+                <a14:useLocalDpi xmlns:a14="http://schemas.microsoft.com/office/drawing/2010/main" val="0"/>
+              </a:ext>
+              <a:ext uri="{96DAC541-7B7A-43D3-8B79-37D633B846F1}">
+                <asvg:svgBlip xmlns:asvg="http://schemas.microsoft.com/office/drawing/2016/SVG/main" r:embed="rId6"/>
+              </a:ext>
+            </a:extLst>
+          </a:blip>
+          <a:stretch>
+            <a:fillRect/>
+          </a:stretch>
+        </p:blipFill>
+        <p:spPr>
+          <a:xfrm>
+            <a:off x="3487671" y="3748142"/>
+            <a:ext cx="257175" cy="257175"/>
+          </a:xfrm>
+          <a:prstGeom prst="rect">
+            <a:avLst/>
+          </a:prstGeom>
+        </p:spPr>
+      </p:pic>
+      <p:pic>
+        <p:nvPicPr>
+          <p:cNvPr id="99" name="Graphic 98" descr="Smart Phone">
+            <a:extLst>
+              <a:ext uri="{FF2B5EF4-FFF2-40B4-BE49-F238E27FC236}">
+                <a16:creationId xmlns:a16="http://schemas.microsoft.com/office/drawing/2014/main" id="{371710D2-DDB3-16DC-BC2D-4ADDACCA58BE}"/>
+              </a:ext>
+            </a:extLst>
+          </p:cNvPr>
+          <p:cNvPicPr>
+            <a:picLocks noChangeAspect="1"/>
+          </p:cNvPicPr>
+          <p:nvPr/>
+        </p:nvPicPr>
+        <p:blipFill>
+          <a:blip>
+            <a:extLst>
+              <a:ext uri="{28A0092B-C50C-407E-A947-70E740481C1C}">
+                <a14:useLocalDpi xmlns:a14="http://schemas.microsoft.com/office/drawing/2010/main" val="0"/>
+              </a:ext>
+              <a:ext uri="{96DAC541-7B7A-43D3-8B79-37D633B846F1}">
+                <asvg:svgBlip xmlns:asvg="http://schemas.microsoft.com/office/drawing/2016/SVG/main" r:embed="rId6"/>
+              </a:ext>
+            </a:extLst>
+          </a:blip>
+          <a:stretch>
+            <a:fillRect/>
+          </a:stretch>
+        </p:blipFill>
+        <p:spPr>
+          <a:xfrm>
+            <a:off x="3239927" y="3747827"/>
+            <a:ext cx="257175" cy="257175"/>
+          </a:xfrm>
+          <a:prstGeom prst="rect">
+            <a:avLst/>
+          </a:prstGeom>
+        </p:spPr>
+      </p:pic>
+      <p:pic>
+        <p:nvPicPr>
+          <p:cNvPr id="109" name="Picture 108">
+            <a:extLst>
+              <a:ext uri="{FF2B5EF4-FFF2-40B4-BE49-F238E27FC236}">
+                <a16:creationId xmlns:a16="http://schemas.microsoft.com/office/drawing/2014/main" id="{0FECFE45-D370-6CD6-A81A-3660C17F1505}"/>
+              </a:ext>
+            </a:extLst>
+          </p:cNvPr>
+          <p:cNvPicPr>
+            <a:picLocks noChangeAspect="1"/>
+          </p:cNvPicPr>
+          <p:nvPr/>
+        </p:nvPicPr>
+        <p:blipFill>
+          <a:blip r:embed="rId7">
+            <a:extLst>
+              <a:ext uri="{28A0092B-C50C-407E-A947-70E740481C1C}">
+                <a14:useLocalDpi xmlns:a14="http://schemas.microsoft.com/office/drawing/2010/main" val="0"/>
+              </a:ext>
+              <a:ext uri="{837473B0-CC2E-450A-ABE3-18F120FF3D39}">
+                <a1611:picAttrSrcUrl xmlns:a1611="http://schemas.microsoft.com/office/drawing/2016/11/main" r:id="rId8"/>
+              </a:ext>
+            </a:extLst>
+          </a:blip>
+          <a:stretch>
+            <a:fillRect/>
+          </a:stretch>
+        </p:blipFill>
+        <p:spPr>
+          <a:xfrm>
+            <a:off x="4108515" y="3695051"/>
+            <a:ext cx="182880" cy="134684"/>
+          </a:xfrm>
+          <a:prstGeom prst="rect">
+            <a:avLst/>
+          </a:prstGeom>
+        </p:spPr>
+      </p:pic>
+      <p:sp>
+        <p:nvSpPr>
+          <p:cNvPr id="110" name="TextBox 109">
+            <a:extLst>
+              <a:ext uri="{FF2B5EF4-FFF2-40B4-BE49-F238E27FC236}">
+                <a16:creationId xmlns:a16="http://schemas.microsoft.com/office/drawing/2014/main" id="{8B3F18EF-195C-F030-D7F5-D1C95D7DFBFE}"/>
+              </a:ext>
+            </a:extLst>
+          </p:cNvPr>
+          <p:cNvSpPr txBox="1"/>
+          <p:nvPr/>
+        </p:nvSpPr>
+        <p:spPr>
+          <a:xfrm>
+            <a:off x="2507645" y="3718213"/>
+            <a:ext cx="862685" cy="317651"/>
+          </a:xfrm>
+          <a:prstGeom prst="rect">
+            <a:avLst/>
+          </a:prstGeom>
+          <a:noFill/>
+        </p:spPr>
+        <p:txBody>
+          <a:bodyPr wrap="square" rtlCol="0">
+            <a:spAutoFit/>
+          </a:bodyPr>
+          <a:lstStyle/>
+          <a:p>
+            <a:pPr algn="ctr">
+              <a:lnSpc>
+                <a:spcPct val="70000"/>
+              </a:lnSpc>
+            </a:pPr>
+            <a:r>
+              <a:rPr lang="fr-CA" sz="1013" dirty="0"/>
+              <a:t>Referee</a:t>
+            </a:r>
+            <a:br>
+              <a:rPr lang="fr-CA" sz="1013" dirty="0"/>
+            </a:br>
+            <a:r>
+              <a:rPr lang="fr-CA" sz="1013" dirty="0"/>
+              <a:t>phones</a:t>
+            </a:r>
+          </a:p>
+        </p:txBody>
+      </p:sp>
+    </p:spTree>
+    <p:extLst>
+      <p:ext uri="{BB962C8B-B14F-4D97-AF65-F5344CB8AC3E}">
+        <p14:creationId xmlns:p14="http://schemas.microsoft.com/office/powerpoint/2010/main" val="2910309073"/>
+      </p:ext>
+    </p:extLst>
+  </p:cSld>
+  <p:clrMapOvr>
+    <a:masterClrMapping/>
+  </p:clrMapOvr>
+</p:sld>
+</file>
+
+<file path=ppt/slides/slide12.xml><?xml version="1.0" encoding="utf-8"?>
+<p:sld xmlns:a="http://schemas.openxmlformats.org/drawingml/2006/main" xmlns:r="http://schemas.openxmlformats.org/officeDocument/2006/relationships" xmlns:p="http://schemas.openxmlformats.org/presentationml/2006/main">
+  <p:cSld>
+    <p:spTree>
+      <p:nvGrpSpPr>
         <p:cNvPr id="1" name=""/>
         <p:cNvGrpSpPr/>
         <p:nvPr/>
@@ -10178,13 +12589,13 @@
           <p:nvPr/>
         </p:nvPicPr>
         <p:blipFill>
-          <a:blip r:embed="rId2">
+          <a:blip>
             <a:extLst>
               <a:ext uri="{28A0092B-C50C-407E-A947-70E740481C1C}">
                 <a14:useLocalDpi xmlns:a14="http://schemas.microsoft.com/office/drawing/2010/main" val="0"/>
               </a:ext>
               <a:ext uri="{96DAC541-7B7A-43D3-8B79-37D633B846F1}">
-                <asvg:svgBlip xmlns:asvg="http://schemas.microsoft.com/office/drawing/2016/SVG/main" r:embed="rId3"/>
+                <asvg:svgBlip xmlns:asvg="http://schemas.microsoft.com/office/drawing/2016/SVG/main" r:embed="rId2"/>
               </a:ext>
             </a:extLst>
           </a:blip>
@@ -10217,13 +12628,13 @@
           <p:nvPr/>
         </p:nvPicPr>
         <p:blipFill>
-          <a:blip r:embed="rId4">
+          <a:blip>
             <a:extLst>
               <a:ext uri="{28A0092B-C50C-407E-A947-70E740481C1C}">
                 <a14:useLocalDpi xmlns:a14="http://schemas.microsoft.com/office/drawing/2010/main" val="0"/>
               </a:ext>
               <a:ext uri="{96DAC541-7B7A-43D3-8B79-37D633B846F1}">
-                <asvg:svgBlip xmlns:asvg="http://schemas.microsoft.com/office/drawing/2016/SVG/main" r:embed="rId5"/>
+                <asvg:svgBlip xmlns:asvg="http://schemas.microsoft.com/office/drawing/2016/SVG/main" r:embed="rId3"/>
               </a:ext>
             </a:extLst>
           </a:blip>
@@ -10256,13 +12667,13 @@
           <p:nvPr/>
         </p:nvPicPr>
         <p:blipFill>
-          <a:blip r:embed="rId6">
+          <a:blip>
             <a:extLst>
               <a:ext uri="{28A0092B-C50C-407E-A947-70E740481C1C}">
                 <a14:useLocalDpi xmlns:a14="http://schemas.microsoft.com/office/drawing/2010/main" val="0"/>
               </a:ext>
               <a:ext uri="{96DAC541-7B7A-43D3-8B79-37D633B846F1}">
-                <asvg:svgBlip xmlns:asvg="http://schemas.microsoft.com/office/drawing/2016/SVG/main" r:embed="rId7"/>
+                <asvg:svgBlip xmlns:asvg="http://schemas.microsoft.com/office/drawing/2016/SVG/main" r:embed="rId4"/>
               </a:ext>
             </a:extLst>
           </a:blip>
@@ -10435,13 +12846,13 @@
           <p:nvPr/>
         </p:nvPicPr>
         <p:blipFill>
-          <a:blip r:embed="rId8">
+          <a:blip r:embed="rId5">
             <a:extLst>
               <a:ext uri="{28A0092B-C50C-407E-A947-70E740481C1C}">
                 <a14:useLocalDpi xmlns:a14="http://schemas.microsoft.com/office/drawing/2010/main" val="0"/>
               </a:ext>
               <a:ext uri="{837473B0-CC2E-450A-ABE3-18F120FF3D39}">
-                <a1611:picAttrSrcUrl xmlns:a1611="http://schemas.microsoft.com/office/drawing/2016/11/main" r:id="rId9"/>
+                <a1611:picAttrSrcUrl xmlns:a1611="http://schemas.microsoft.com/office/drawing/2016/11/main" r:id="rId6"/>
               </a:ext>
             </a:extLst>
           </a:blip>
@@ -10521,7 +12932,7 @@
           <p:nvPr/>
         </p:nvPicPr>
         <p:blipFill rotWithShape="1">
-          <a:blip r:embed="rId10">
+          <a:blip>
             <a:duotone>
               <a:schemeClr val="bg2">
                 <a:shade val="45000"/>
@@ -10534,7 +12945,7 @@
                 <a14:useLocalDpi xmlns:a14="http://schemas.microsoft.com/office/drawing/2010/main" val="0"/>
               </a:ext>
               <a:ext uri="{96DAC541-7B7A-43D3-8B79-37D633B846F1}">
-                <asvg:svgBlip xmlns:asvg="http://schemas.microsoft.com/office/drawing/2016/SVG/main" r:embed="rId11"/>
+                <asvg:svgBlip xmlns:asvg="http://schemas.microsoft.com/office/drawing/2016/SVG/main" r:embed="rId7"/>
               </a:ext>
             </a:extLst>
           </a:blip>
@@ -11063,7 +13474,7 @@
 </p:sld>
 </file>
 
-<file path=ppt/slides/slide11.xml><?xml version="1.0" encoding="utf-8"?>
+<file path=ppt/slides/slide13.xml><?xml version="1.0" encoding="utf-8"?>
 <p:sld xmlns:a="http://schemas.openxmlformats.org/drawingml/2006/main" xmlns:r="http://schemas.openxmlformats.org/officeDocument/2006/relationships" xmlns:p="http://schemas.openxmlformats.org/presentationml/2006/main">
   <p:cSld>
     <p:spTree>
@@ -11188,13 +13599,13 @@
           <p:nvPr/>
         </p:nvPicPr>
         <p:blipFill>
-          <a:blip r:embed="rId2">
+          <a:blip>
             <a:extLst>
               <a:ext uri="{28A0092B-C50C-407E-A947-70E740481C1C}">
                 <a14:useLocalDpi xmlns:a14="http://schemas.microsoft.com/office/drawing/2010/main" val="0"/>
               </a:ext>
               <a:ext uri="{96DAC541-7B7A-43D3-8B79-37D633B846F1}">
-                <asvg:svgBlip xmlns:asvg="http://schemas.microsoft.com/office/drawing/2016/SVG/main" r:embed="rId3"/>
+                <asvg:svgBlip xmlns:asvg="http://schemas.microsoft.com/office/drawing/2016/SVG/main" r:embed="rId2"/>
               </a:ext>
             </a:extLst>
           </a:blip>
@@ -11227,13 +13638,13 @@
           <p:nvPr/>
         </p:nvPicPr>
         <p:blipFill>
-          <a:blip r:embed="rId4">
+          <a:blip>
             <a:extLst>
               <a:ext uri="{28A0092B-C50C-407E-A947-70E740481C1C}">
                 <a14:useLocalDpi xmlns:a14="http://schemas.microsoft.com/office/drawing/2010/main" val="0"/>
               </a:ext>
               <a:ext uri="{96DAC541-7B7A-43D3-8B79-37D633B846F1}">
-                <asvg:svgBlip xmlns:asvg="http://schemas.microsoft.com/office/drawing/2016/SVG/main" r:embed="rId5"/>
+                <asvg:svgBlip xmlns:asvg="http://schemas.microsoft.com/office/drawing/2016/SVG/main" r:embed="rId3"/>
               </a:ext>
             </a:extLst>
           </a:blip>
@@ -11266,13 +13677,13 @@
           <p:nvPr/>
         </p:nvPicPr>
         <p:blipFill>
-          <a:blip r:embed="rId6">
+          <a:blip>
             <a:extLst>
               <a:ext uri="{28A0092B-C50C-407E-A947-70E740481C1C}">
                 <a14:useLocalDpi xmlns:a14="http://schemas.microsoft.com/office/drawing/2010/main" val="0"/>
               </a:ext>
               <a:ext uri="{96DAC541-7B7A-43D3-8B79-37D633B846F1}">
-                <asvg:svgBlip xmlns:asvg="http://schemas.microsoft.com/office/drawing/2016/SVG/main" r:embed="rId7"/>
+                <asvg:svgBlip xmlns:asvg="http://schemas.microsoft.com/office/drawing/2016/SVG/main" r:embed="rId4"/>
               </a:ext>
             </a:extLst>
           </a:blip>
@@ -11445,13 +13856,13 @@
           <p:nvPr/>
         </p:nvPicPr>
         <p:blipFill>
-          <a:blip r:embed="rId8">
+          <a:blip r:embed="rId5">
             <a:extLst>
               <a:ext uri="{28A0092B-C50C-407E-A947-70E740481C1C}">
                 <a14:useLocalDpi xmlns:a14="http://schemas.microsoft.com/office/drawing/2010/main" val="0"/>
               </a:ext>
               <a:ext uri="{837473B0-CC2E-450A-ABE3-18F120FF3D39}">
-                <a1611:picAttrSrcUrl xmlns:a1611="http://schemas.microsoft.com/office/drawing/2016/11/main" r:id="rId9"/>
+                <a1611:picAttrSrcUrl xmlns:a1611="http://schemas.microsoft.com/office/drawing/2016/11/main" r:id="rId6"/>
               </a:ext>
             </a:extLst>
           </a:blip>
@@ -11616,7 +14027,7 @@
           <p:nvPr/>
         </p:nvPicPr>
         <p:blipFill rotWithShape="1">
-          <a:blip r:embed="rId10">
+          <a:blip>
             <a:duotone>
               <a:schemeClr val="accent1">
                 <a:shade val="45000"/>
@@ -11629,7 +14040,7 @@
                 <a14:useLocalDpi xmlns:a14="http://schemas.microsoft.com/office/drawing/2010/main" val="0"/>
               </a:ext>
               <a:ext uri="{96DAC541-7B7A-43D3-8B79-37D633B846F1}">
-                <asvg:svgBlip xmlns:asvg="http://schemas.microsoft.com/office/drawing/2016/SVG/main" r:embed="rId11"/>
+                <asvg:svgBlip xmlns:asvg="http://schemas.microsoft.com/office/drawing/2016/SVG/main" r:embed="rId7"/>
               </a:ext>
             </a:extLst>
           </a:blip>
@@ -11659,7 +14070,7 @@
 </p:sld>
 </file>
 
-<file path=ppt/slides/slide12.xml><?xml version="1.0" encoding="utf-8"?>
+<file path=ppt/slides/slide14.xml><?xml version="1.0" encoding="utf-8"?>
 <p:sld xmlns:a="http://schemas.openxmlformats.org/drawingml/2006/main" xmlns:r="http://schemas.openxmlformats.org/officeDocument/2006/relationships" xmlns:p="http://schemas.openxmlformats.org/presentationml/2006/main">
   <p:cSld>
     <p:spTree>
@@ -11828,13 +14239,13 @@
           <p:nvPr/>
         </p:nvPicPr>
         <p:blipFill>
-          <a:blip r:embed="rId2">
+          <a:blip>
             <a:extLst>
               <a:ext uri="{28A0092B-C50C-407E-A947-70E740481C1C}">
                 <a14:useLocalDpi xmlns:a14="http://schemas.microsoft.com/office/drawing/2010/main" val="0"/>
               </a:ext>
               <a:ext uri="{96DAC541-7B7A-43D3-8B79-37D633B846F1}">
-                <asvg:svgBlip xmlns:asvg="http://schemas.microsoft.com/office/drawing/2016/SVG/main" r:embed="rId3"/>
+                <asvg:svgBlip xmlns:asvg="http://schemas.microsoft.com/office/drawing/2016/SVG/main" r:embed="rId2"/>
               </a:ext>
             </a:extLst>
           </a:blip>
@@ -11867,13 +14278,13 @@
           <p:nvPr/>
         </p:nvPicPr>
         <p:blipFill>
-          <a:blip r:embed="rId2">
+          <a:blip>
             <a:extLst>
               <a:ext uri="{28A0092B-C50C-407E-A947-70E740481C1C}">
                 <a14:useLocalDpi xmlns:a14="http://schemas.microsoft.com/office/drawing/2010/main" val="0"/>
               </a:ext>
               <a:ext uri="{96DAC541-7B7A-43D3-8B79-37D633B846F1}">
-                <asvg:svgBlip xmlns:asvg="http://schemas.microsoft.com/office/drawing/2016/SVG/main" r:embed="rId3"/>
+                <asvg:svgBlip xmlns:asvg="http://schemas.microsoft.com/office/drawing/2016/SVG/main" r:embed="rId2"/>
               </a:ext>
             </a:extLst>
           </a:blip>
@@ -11906,13 +14317,13 @@
           <p:nvPr/>
         </p:nvPicPr>
         <p:blipFill>
-          <a:blip r:embed="rId2">
+          <a:blip>
             <a:extLst>
               <a:ext uri="{28A0092B-C50C-407E-A947-70E740481C1C}">
                 <a14:useLocalDpi xmlns:a14="http://schemas.microsoft.com/office/drawing/2010/main" val="0"/>
               </a:ext>
               <a:ext uri="{96DAC541-7B7A-43D3-8B79-37D633B846F1}">
-                <asvg:svgBlip xmlns:asvg="http://schemas.microsoft.com/office/drawing/2016/SVG/main" r:embed="rId3"/>
+                <asvg:svgBlip xmlns:asvg="http://schemas.microsoft.com/office/drawing/2016/SVG/main" r:embed="rId2"/>
               </a:ext>
             </a:extLst>
           </a:blip>
@@ -11945,13 +14356,13 @@
           <p:nvPr/>
         </p:nvPicPr>
         <p:blipFill>
-          <a:blip r:embed="rId4">
+          <a:blip r:embed="rId3">
             <a:extLst>
               <a:ext uri="{28A0092B-C50C-407E-A947-70E740481C1C}">
                 <a14:useLocalDpi xmlns:a14="http://schemas.microsoft.com/office/drawing/2010/main" val="0"/>
               </a:ext>
               <a:ext uri="{837473B0-CC2E-450A-ABE3-18F120FF3D39}">
-                <a1611:picAttrSrcUrl xmlns:a1611="http://schemas.microsoft.com/office/drawing/2016/11/main" r:id="rId5"/>
+                <a1611:picAttrSrcUrl xmlns:a1611="http://schemas.microsoft.com/office/drawing/2016/11/main" r:id="rId4"/>
               </a:ext>
             </a:extLst>
           </a:blip>
@@ -12031,13 +14442,13 @@
           <p:nvPr/>
         </p:nvPicPr>
         <p:blipFill>
-          <a:blip r:embed="rId2">
+          <a:blip>
             <a:extLst>
               <a:ext uri="{28A0092B-C50C-407E-A947-70E740481C1C}">
                 <a14:useLocalDpi xmlns:a14="http://schemas.microsoft.com/office/drawing/2010/main" val="0"/>
               </a:ext>
               <a:ext uri="{96DAC541-7B7A-43D3-8B79-37D633B846F1}">
-                <asvg:svgBlip xmlns:asvg="http://schemas.microsoft.com/office/drawing/2016/SVG/main" r:embed="rId3"/>
+                <asvg:svgBlip xmlns:asvg="http://schemas.microsoft.com/office/drawing/2016/SVG/main" r:embed="rId2"/>
               </a:ext>
             </a:extLst>
           </a:blip>
@@ -12070,13 +14481,13 @@
           <p:nvPr/>
         </p:nvPicPr>
         <p:blipFill>
-          <a:blip r:embed="rId6">
+          <a:blip>
             <a:extLst>
               <a:ext uri="{28A0092B-C50C-407E-A947-70E740481C1C}">
                 <a14:useLocalDpi xmlns:a14="http://schemas.microsoft.com/office/drawing/2010/main" val="0"/>
               </a:ext>
               <a:ext uri="{96DAC541-7B7A-43D3-8B79-37D633B846F1}">
-                <asvg:svgBlip xmlns:asvg="http://schemas.microsoft.com/office/drawing/2016/SVG/main" r:embed="rId7"/>
+                <asvg:svgBlip xmlns:asvg="http://schemas.microsoft.com/office/drawing/2016/SVG/main" r:embed="rId5"/>
               </a:ext>
             </a:extLst>
           </a:blip>
@@ -12109,13 +14520,13 @@
           <p:nvPr/>
         </p:nvPicPr>
         <p:blipFill>
-          <a:blip r:embed="rId8">
+          <a:blip>
             <a:extLst>
               <a:ext uri="{28A0092B-C50C-407E-A947-70E740481C1C}">
                 <a14:useLocalDpi xmlns:a14="http://schemas.microsoft.com/office/drawing/2010/main" val="0"/>
               </a:ext>
               <a:ext uri="{96DAC541-7B7A-43D3-8B79-37D633B846F1}">
-                <asvg:svgBlip xmlns:asvg="http://schemas.microsoft.com/office/drawing/2016/SVG/main" r:embed="rId9"/>
+                <asvg:svgBlip xmlns:asvg="http://schemas.microsoft.com/office/drawing/2016/SVG/main" r:embed="rId6"/>
               </a:ext>
             </a:extLst>
           </a:blip>
@@ -12288,13 +14699,13 @@
           <p:nvPr/>
         </p:nvPicPr>
         <p:blipFill>
-          <a:blip r:embed="rId4">
+          <a:blip r:embed="rId3">
             <a:extLst>
               <a:ext uri="{28A0092B-C50C-407E-A947-70E740481C1C}">
                 <a14:useLocalDpi xmlns:a14="http://schemas.microsoft.com/office/drawing/2010/main" val="0"/>
               </a:ext>
               <a:ext uri="{837473B0-CC2E-450A-ABE3-18F120FF3D39}">
-                <a1611:picAttrSrcUrl xmlns:a1611="http://schemas.microsoft.com/office/drawing/2016/11/main" r:id="rId5"/>
+                <a1611:picAttrSrcUrl xmlns:a1611="http://schemas.microsoft.com/office/drawing/2016/11/main" r:id="rId4"/>
               </a:ext>
             </a:extLst>
           </a:blip>
@@ -12419,7 +14830,7 @@
           <p:nvPr/>
         </p:nvPicPr>
         <p:blipFill rotWithShape="1">
-          <a:blip r:embed="rId10">
+          <a:blip>
             <a:duotone>
               <a:schemeClr val="accent1">
                 <a:shade val="45000"/>
@@ -12432,7 +14843,7 @@
                 <a14:useLocalDpi xmlns:a14="http://schemas.microsoft.com/office/drawing/2010/main" val="0"/>
               </a:ext>
               <a:ext uri="{96DAC541-7B7A-43D3-8B79-37D633B846F1}">
-                <asvg:svgBlip xmlns:asvg="http://schemas.microsoft.com/office/drawing/2016/SVG/main" r:embed="rId11"/>
+                <asvg:svgBlip xmlns:asvg="http://schemas.microsoft.com/office/drawing/2016/SVG/main" r:embed="rId7"/>
               </a:ext>
             </a:extLst>
           </a:blip>
@@ -12549,7 +14960,7 @@
 </p:sld>
 </file>
 
-<file path=ppt/slides/slide13.xml><?xml version="1.0" encoding="utf-8"?>
+<file path=ppt/slides/slide15.xml><?xml version="1.0" encoding="utf-8"?>
 <p:sld xmlns:a="http://schemas.openxmlformats.org/drawingml/2006/main" xmlns:r="http://schemas.openxmlformats.org/officeDocument/2006/relationships" xmlns:p="http://schemas.openxmlformats.org/presentationml/2006/main">
   <p:cSld>
     <p:spTree>
@@ -12718,13 +15129,13 @@
           <p:nvPr/>
         </p:nvPicPr>
         <p:blipFill>
-          <a:blip r:embed="rId2">
+          <a:blip>
             <a:extLst>
               <a:ext uri="{28A0092B-C50C-407E-A947-70E740481C1C}">
                 <a14:useLocalDpi xmlns:a14="http://schemas.microsoft.com/office/drawing/2010/main" val="0"/>
               </a:ext>
               <a:ext uri="{96DAC541-7B7A-43D3-8B79-37D633B846F1}">
-                <asvg:svgBlip xmlns:asvg="http://schemas.microsoft.com/office/drawing/2016/SVG/main" r:embed="rId3"/>
+                <asvg:svgBlip xmlns:asvg="http://schemas.microsoft.com/office/drawing/2016/SVG/main" r:embed="rId2"/>
               </a:ext>
             </a:extLst>
           </a:blip>
@@ -12757,13 +15168,13 @@
           <p:nvPr/>
         </p:nvPicPr>
         <p:blipFill>
-          <a:blip r:embed="rId2">
+          <a:blip>
             <a:extLst>
               <a:ext uri="{28A0092B-C50C-407E-A947-70E740481C1C}">
                 <a14:useLocalDpi xmlns:a14="http://schemas.microsoft.com/office/drawing/2010/main" val="0"/>
               </a:ext>
               <a:ext uri="{96DAC541-7B7A-43D3-8B79-37D633B846F1}">
-                <asvg:svgBlip xmlns:asvg="http://schemas.microsoft.com/office/drawing/2016/SVG/main" r:embed="rId3"/>
+                <asvg:svgBlip xmlns:asvg="http://schemas.microsoft.com/office/drawing/2016/SVG/main" r:embed="rId2"/>
               </a:ext>
             </a:extLst>
           </a:blip>
@@ -12796,13 +15207,13 @@
           <p:nvPr/>
         </p:nvPicPr>
         <p:blipFill>
-          <a:blip r:embed="rId2">
+          <a:blip>
             <a:extLst>
               <a:ext uri="{28A0092B-C50C-407E-A947-70E740481C1C}">
                 <a14:useLocalDpi xmlns:a14="http://schemas.microsoft.com/office/drawing/2010/main" val="0"/>
               </a:ext>
               <a:ext uri="{96DAC541-7B7A-43D3-8B79-37D633B846F1}">
-                <asvg:svgBlip xmlns:asvg="http://schemas.microsoft.com/office/drawing/2016/SVG/main" r:embed="rId3"/>
+                <asvg:svgBlip xmlns:asvg="http://schemas.microsoft.com/office/drawing/2016/SVG/main" r:embed="rId2"/>
               </a:ext>
             </a:extLst>
           </a:blip>
@@ -12835,13 +15246,13 @@
           <p:nvPr/>
         </p:nvPicPr>
         <p:blipFill>
-          <a:blip r:embed="rId4">
+          <a:blip r:embed="rId3">
             <a:extLst>
               <a:ext uri="{28A0092B-C50C-407E-A947-70E740481C1C}">
                 <a14:useLocalDpi xmlns:a14="http://schemas.microsoft.com/office/drawing/2010/main" val="0"/>
               </a:ext>
               <a:ext uri="{837473B0-CC2E-450A-ABE3-18F120FF3D39}">
-                <a1611:picAttrSrcUrl xmlns:a1611="http://schemas.microsoft.com/office/drawing/2016/11/main" r:id="rId5"/>
+                <a1611:picAttrSrcUrl xmlns:a1611="http://schemas.microsoft.com/office/drawing/2016/11/main" r:id="rId4"/>
               </a:ext>
             </a:extLst>
           </a:blip>
@@ -12921,13 +15332,13 @@
           <p:nvPr/>
         </p:nvPicPr>
         <p:blipFill>
-          <a:blip r:embed="rId2">
+          <a:blip>
             <a:extLst>
               <a:ext uri="{28A0092B-C50C-407E-A947-70E740481C1C}">
                 <a14:useLocalDpi xmlns:a14="http://schemas.microsoft.com/office/drawing/2010/main" val="0"/>
               </a:ext>
               <a:ext uri="{96DAC541-7B7A-43D3-8B79-37D633B846F1}">
-                <asvg:svgBlip xmlns:asvg="http://schemas.microsoft.com/office/drawing/2016/SVG/main" r:embed="rId3"/>
+                <asvg:svgBlip xmlns:asvg="http://schemas.microsoft.com/office/drawing/2016/SVG/main" r:embed="rId2"/>
               </a:ext>
             </a:extLst>
           </a:blip>
@@ -12960,13 +15371,13 @@
           <p:nvPr/>
         </p:nvPicPr>
         <p:blipFill>
-          <a:blip r:embed="rId6">
+          <a:blip>
             <a:extLst>
               <a:ext uri="{28A0092B-C50C-407E-A947-70E740481C1C}">
                 <a14:useLocalDpi xmlns:a14="http://schemas.microsoft.com/office/drawing/2010/main" val="0"/>
               </a:ext>
               <a:ext uri="{96DAC541-7B7A-43D3-8B79-37D633B846F1}">
-                <asvg:svgBlip xmlns:asvg="http://schemas.microsoft.com/office/drawing/2016/SVG/main" r:embed="rId7"/>
+                <asvg:svgBlip xmlns:asvg="http://schemas.microsoft.com/office/drawing/2016/SVG/main" r:embed="rId5"/>
               </a:ext>
             </a:extLst>
           </a:blip>
@@ -12999,13 +15410,13 @@
           <p:nvPr/>
         </p:nvPicPr>
         <p:blipFill>
-          <a:blip r:embed="rId8">
+          <a:blip>
             <a:extLst>
               <a:ext uri="{28A0092B-C50C-407E-A947-70E740481C1C}">
                 <a14:useLocalDpi xmlns:a14="http://schemas.microsoft.com/office/drawing/2010/main" val="0"/>
               </a:ext>
               <a:ext uri="{96DAC541-7B7A-43D3-8B79-37D633B846F1}">
-                <asvg:svgBlip xmlns:asvg="http://schemas.microsoft.com/office/drawing/2016/SVG/main" r:embed="rId9"/>
+                <asvg:svgBlip xmlns:asvg="http://schemas.microsoft.com/office/drawing/2016/SVG/main" r:embed="rId6"/>
               </a:ext>
             </a:extLst>
           </a:blip>
@@ -13178,13 +15589,13 @@
           <p:nvPr/>
         </p:nvPicPr>
         <p:blipFill>
-          <a:blip r:embed="rId4">
+          <a:blip r:embed="rId3">
             <a:extLst>
               <a:ext uri="{28A0092B-C50C-407E-A947-70E740481C1C}">
                 <a14:useLocalDpi xmlns:a14="http://schemas.microsoft.com/office/drawing/2010/main" val="0"/>
               </a:ext>
               <a:ext uri="{837473B0-CC2E-450A-ABE3-18F120FF3D39}">
-                <a1611:picAttrSrcUrl xmlns:a1611="http://schemas.microsoft.com/office/drawing/2016/11/main" r:id="rId5"/>
+                <a1611:picAttrSrcUrl xmlns:a1611="http://schemas.microsoft.com/office/drawing/2016/11/main" r:id="rId4"/>
               </a:ext>
             </a:extLst>
           </a:blip>
@@ -13853,13 +16264,13 @@
           <p:nvPr/>
         </p:nvPicPr>
         <p:blipFill>
-          <a:blip r:embed="rId3">
+          <a:blip>
             <a:extLst>
               <a:ext uri="{28A0092B-C50C-407E-A947-70E740481C1C}">
                 <a14:useLocalDpi xmlns:a14="http://schemas.microsoft.com/office/drawing/2010/main" val="0"/>
               </a:ext>
               <a:ext uri="{96DAC541-7B7A-43D3-8B79-37D633B846F1}">
-                <asvg:svgBlip xmlns:asvg="http://schemas.microsoft.com/office/drawing/2016/SVG/main" r:embed="rId4"/>
+                <asvg:svgBlip xmlns:asvg="http://schemas.microsoft.com/office/drawing/2016/SVG/main" r:embed="rId3"/>
               </a:ext>
             </a:extLst>
           </a:blip>
@@ -13984,13 +16395,13 @@
           <p:nvPr/>
         </p:nvPicPr>
         <p:blipFill>
-          <a:blip r:embed="rId5">
+          <a:blip>
             <a:extLst>
               <a:ext uri="{28A0092B-C50C-407E-A947-70E740481C1C}">
                 <a14:useLocalDpi xmlns:a14="http://schemas.microsoft.com/office/drawing/2010/main" val="0"/>
               </a:ext>
               <a:ext uri="{96DAC541-7B7A-43D3-8B79-37D633B846F1}">
-                <asvg:svgBlip xmlns:asvg="http://schemas.microsoft.com/office/drawing/2016/SVG/main" r:embed="rId6"/>
+                <asvg:svgBlip xmlns:asvg="http://schemas.microsoft.com/office/drawing/2016/SVG/main" r:embed="rId4"/>
               </a:ext>
             </a:extLst>
           </a:blip>
@@ -14023,7 +16434,7 @@
           <p:nvPr/>
         </p:nvPicPr>
         <p:blipFill rotWithShape="1">
-          <a:blip r:embed="rId7">
+          <a:blip>
             <a:duotone>
               <a:schemeClr val="accent1">
                 <a:shade val="45000"/>
@@ -14036,7 +16447,7 @@
                 <a14:useLocalDpi xmlns:a14="http://schemas.microsoft.com/office/drawing/2010/main" val="0"/>
               </a:ext>
               <a:ext uri="{96DAC541-7B7A-43D3-8B79-37D633B846F1}">
-                <asvg:svgBlip xmlns:asvg="http://schemas.microsoft.com/office/drawing/2016/SVG/main" r:embed="rId8"/>
+                <asvg:svgBlip xmlns:asvg="http://schemas.microsoft.com/office/drawing/2016/SVG/main" r:embed="rId5"/>
               </a:ext>
             </a:extLst>
           </a:blip>
@@ -14218,13 +16629,13 @@
             <p:nvPr/>
           </p:nvPicPr>
           <p:blipFill>
-            <a:blip r:embed="rId9">
+            <a:blip>
               <a:extLst>
                 <a:ext uri="{28A0092B-C50C-407E-A947-70E740481C1C}">
                   <a14:useLocalDpi xmlns:a14="http://schemas.microsoft.com/office/drawing/2010/main" val="0"/>
                 </a:ext>
                 <a:ext uri="{96DAC541-7B7A-43D3-8B79-37D633B846F1}">
-                  <asvg:svgBlip xmlns:asvg="http://schemas.microsoft.com/office/drawing/2016/SVG/main" r:embed="rId10"/>
+                  <asvg:svgBlip xmlns:asvg="http://schemas.microsoft.com/office/drawing/2016/SVG/main" r:embed="rId6"/>
                 </a:ext>
               </a:extLst>
             </a:blip>
@@ -14314,13 +16725,13 @@
             <p:nvPr/>
           </p:nvPicPr>
           <p:blipFill>
-            <a:blip r:embed="rId9">
+            <a:blip>
               <a:extLst>
                 <a:ext uri="{28A0092B-C50C-407E-A947-70E740481C1C}">
                   <a14:useLocalDpi xmlns:a14="http://schemas.microsoft.com/office/drawing/2010/main" val="0"/>
                 </a:ext>
                 <a:ext uri="{96DAC541-7B7A-43D3-8B79-37D633B846F1}">
-                  <asvg:svgBlip xmlns:asvg="http://schemas.microsoft.com/office/drawing/2016/SVG/main" r:embed="rId10"/>
+                  <asvg:svgBlip xmlns:asvg="http://schemas.microsoft.com/office/drawing/2016/SVG/main" r:embed="rId6"/>
                 </a:ext>
               </a:extLst>
             </a:blip>
@@ -14419,13 +16830,13 @@
             <p:nvPr/>
           </p:nvPicPr>
           <p:blipFill>
-            <a:blip r:embed="rId9">
+            <a:blip>
               <a:extLst>
                 <a:ext uri="{28A0092B-C50C-407E-A947-70E740481C1C}">
                   <a14:useLocalDpi xmlns:a14="http://schemas.microsoft.com/office/drawing/2010/main" val="0"/>
                 </a:ext>
                 <a:ext uri="{96DAC541-7B7A-43D3-8B79-37D633B846F1}">
-                  <asvg:svgBlip xmlns:asvg="http://schemas.microsoft.com/office/drawing/2016/SVG/main" r:embed="rId10"/>
+                  <asvg:svgBlip xmlns:asvg="http://schemas.microsoft.com/office/drawing/2016/SVG/main" r:embed="rId6"/>
                 </a:ext>
               </a:extLst>
             </a:blip>
@@ -14561,13 +16972,13 @@
             <p:nvPr/>
           </p:nvPicPr>
           <p:blipFill>
-            <a:blip r:embed="rId11">
+            <a:blip>
               <a:extLst>
                 <a:ext uri="{28A0092B-C50C-407E-A947-70E740481C1C}">
                   <a14:useLocalDpi xmlns:a14="http://schemas.microsoft.com/office/drawing/2010/main" val="0"/>
                 </a:ext>
                 <a:ext uri="{96DAC541-7B7A-43D3-8B79-37D633B846F1}">
-                  <asvg:svgBlip xmlns:asvg="http://schemas.microsoft.com/office/drawing/2016/SVG/main" r:embed="rId12"/>
+                  <asvg:svgBlip xmlns:asvg="http://schemas.microsoft.com/office/drawing/2016/SVG/main" r:embed="rId7"/>
                 </a:ext>
               </a:extLst>
             </a:blip>
@@ -14600,13 +17011,13 @@
             <p:nvPr/>
           </p:nvPicPr>
           <p:blipFill>
-            <a:blip r:embed="rId13">
+            <a:blip>
               <a:extLst>
                 <a:ext uri="{28A0092B-C50C-407E-A947-70E740481C1C}">
                   <a14:useLocalDpi xmlns:a14="http://schemas.microsoft.com/office/drawing/2010/main" val="0"/>
                 </a:ext>
                 <a:ext uri="{96DAC541-7B7A-43D3-8B79-37D633B846F1}">
-                  <asvg:svgBlip xmlns:asvg="http://schemas.microsoft.com/office/drawing/2016/SVG/main" r:embed="rId14"/>
+                  <asvg:svgBlip xmlns:asvg="http://schemas.microsoft.com/office/drawing/2016/SVG/main" r:embed="rId8"/>
                 </a:ext>
               </a:extLst>
             </a:blip>
@@ -14706,13 +17117,13 @@
             <p:nvPr/>
           </p:nvPicPr>
           <p:blipFill>
-            <a:blip r:embed="rId11">
+            <a:blip>
               <a:extLst>
                 <a:ext uri="{28A0092B-C50C-407E-A947-70E740481C1C}">
                   <a14:useLocalDpi xmlns:a14="http://schemas.microsoft.com/office/drawing/2010/main" val="0"/>
                 </a:ext>
                 <a:ext uri="{96DAC541-7B7A-43D3-8B79-37D633B846F1}">
-                  <asvg:svgBlip xmlns:asvg="http://schemas.microsoft.com/office/drawing/2016/SVG/main" r:embed="rId12"/>
+                  <asvg:svgBlip xmlns:asvg="http://schemas.microsoft.com/office/drawing/2016/SVG/main" r:embed="rId7"/>
                 </a:ext>
               </a:extLst>
             </a:blip>
@@ -14745,13 +17156,13 @@
             <p:nvPr/>
           </p:nvPicPr>
           <p:blipFill>
-            <a:blip r:embed="rId13">
+            <a:blip>
               <a:extLst>
                 <a:ext uri="{28A0092B-C50C-407E-A947-70E740481C1C}">
                   <a14:useLocalDpi xmlns:a14="http://schemas.microsoft.com/office/drawing/2010/main" val="0"/>
                 </a:ext>
                 <a:ext uri="{96DAC541-7B7A-43D3-8B79-37D633B846F1}">
-                  <asvg:svgBlip xmlns:asvg="http://schemas.microsoft.com/office/drawing/2016/SVG/main" r:embed="rId14"/>
+                  <asvg:svgBlip xmlns:asvg="http://schemas.microsoft.com/office/drawing/2016/SVG/main" r:embed="rId8"/>
                 </a:ext>
               </a:extLst>
             </a:blip>
@@ -14851,13 +17262,13 @@
             <p:nvPr/>
           </p:nvPicPr>
           <p:blipFill>
-            <a:blip r:embed="rId11">
+            <a:blip>
               <a:extLst>
                 <a:ext uri="{28A0092B-C50C-407E-A947-70E740481C1C}">
                   <a14:useLocalDpi xmlns:a14="http://schemas.microsoft.com/office/drawing/2010/main" val="0"/>
                 </a:ext>
                 <a:ext uri="{96DAC541-7B7A-43D3-8B79-37D633B846F1}">
-                  <asvg:svgBlip xmlns:asvg="http://schemas.microsoft.com/office/drawing/2016/SVG/main" r:embed="rId12"/>
+                  <asvg:svgBlip xmlns:asvg="http://schemas.microsoft.com/office/drawing/2016/SVG/main" r:embed="rId7"/>
                 </a:ext>
               </a:extLst>
             </a:blip>
@@ -14890,13 +17301,13 @@
             <p:nvPr/>
           </p:nvPicPr>
           <p:blipFill>
-            <a:blip r:embed="rId13">
+            <a:blip>
               <a:extLst>
                 <a:ext uri="{28A0092B-C50C-407E-A947-70E740481C1C}">
                   <a14:useLocalDpi xmlns:a14="http://schemas.microsoft.com/office/drawing/2010/main" val="0"/>
                 </a:ext>
                 <a:ext uri="{96DAC541-7B7A-43D3-8B79-37D633B846F1}">
-                  <asvg:svgBlip xmlns:asvg="http://schemas.microsoft.com/office/drawing/2016/SVG/main" r:embed="rId14"/>
+                  <asvg:svgBlip xmlns:asvg="http://schemas.microsoft.com/office/drawing/2016/SVG/main" r:embed="rId8"/>
                 </a:ext>
               </a:extLst>
             </a:blip>
@@ -15088,13 +17499,13 @@
             <p:nvPr/>
           </p:nvPicPr>
           <p:blipFill>
-            <a:blip r:embed="rId11">
+            <a:blip>
               <a:extLst>
                 <a:ext uri="{28A0092B-C50C-407E-A947-70E740481C1C}">
                   <a14:useLocalDpi xmlns:a14="http://schemas.microsoft.com/office/drawing/2010/main" val="0"/>
                 </a:ext>
                 <a:ext uri="{96DAC541-7B7A-43D3-8B79-37D633B846F1}">
-                  <asvg:svgBlip xmlns:asvg="http://schemas.microsoft.com/office/drawing/2016/SVG/main" r:embed="rId12"/>
+                  <asvg:svgBlip xmlns:asvg="http://schemas.microsoft.com/office/drawing/2016/SVG/main" r:embed="rId7"/>
                 </a:ext>
               </a:extLst>
             </a:blip>
@@ -15127,13 +17538,13 @@
             <p:nvPr/>
           </p:nvPicPr>
           <p:blipFill>
-            <a:blip r:embed="rId13">
+            <a:blip>
               <a:extLst>
                 <a:ext uri="{28A0092B-C50C-407E-A947-70E740481C1C}">
                   <a14:useLocalDpi xmlns:a14="http://schemas.microsoft.com/office/drawing/2010/main" val="0"/>
                 </a:ext>
                 <a:ext uri="{96DAC541-7B7A-43D3-8B79-37D633B846F1}">
-                  <asvg:svgBlip xmlns:asvg="http://schemas.microsoft.com/office/drawing/2016/SVG/main" r:embed="rId14"/>
+                  <asvg:svgBlip xmlns:asvg="http://schemas.microsoft.com/office/drawing/2016/SVG/main" r:embed="rId8"/>
                 </a:ext>
               </a:extLst>
             </a:blip>
@@ -15233,13 +17644,13 @@
             <p:nvPr/>
           </p:nvPicPr>
           <p:blipFill>
-            <a:blip r:embed="rId11">
+            <a:blip>
               <a:extLst>
                 <a:ext uri="{28A0092B-C50C-407E-A947-70E740481C1C}">
                   <a14:useLocalDpi xmlns:a14="http://schemas.microsoft.com/office/drawing/2010/main" val="0"/>
                 </a:ext>
                 <a:ext uri="{96DAC541-7B7A-43D3-8B79-37D633B846F1}">
-                  <asvg:svgBlip xmlns:asvg="http://schemas.microsoft.com/office/drawing/2016/SVG/main" r:embed="rId12"/>
+                  <asvg:svgBlip xmlns:asvg="http://schemas.microsoft.com/office/drawing/2016/SVG/main" r:embed="rId7"/>
                 </a:ext>
               </a:extLst>
             </a:blip>
@@ -15272,13 +17683,13 @@
             <p:nvPr/>
           </p:nvPicPr>
           <p:blipFill>
-            <a:blip r:embed="rId13">
+            <a:blip>
               <a:extLst>
                 <a:ext uri="{28A0092B-C50C-407E-A947-70E740481C1C}">
                   <a14:useLocalDpi xmlns:a14="http://schemas.microsoft.com/office/drawing/2010/main" val="0"/>
                 </a:ext>
                 <a:ext uri="{96DAC541-7B7A-43D3-8B79-37D633B846F1}">
-                  <asvg:svgBlip xmlns:asvg="http://schemas.microsoft.com/office/drawing/2016/SVG/main" r:embed="rId14"/>
+                  <asvg:svgBlip xmlns:asvg="http://schemas.microsoft.com/office/drawing/2016/SVG/main" r:embed="rId8"/>
                 </a:ext>
               </a:extLst>
             </a:blip>
@@ -15378,13 +17789,13 @@
             <p:nvPr/>
           </p:nvPicPr>
           <p:blipFill>
-            <a:blip r:embed="rId11">
+            <a:blip>
               <a:extLst>
                 <a:ext uri="{28A0092B-C50C-407E-A947-70E740481C1C}">
                   <a14:useLocalDpi xmlns:a14="http://schemas.microsoft.com/office/drawing/2010/main" val="0"/>
                 </a:ext>
                 <a:ext uri="{96DAC541-7B7A-43D3-8B79-37D633B846F1}">
-                  <asvg:svgBlip xmlns:asvg="http://schemas.microsoft.com/office/drawing/2016/SVG/main" r:embed="rId12"/>
+                  <asvg:svgBlip xmlns:asvg="http://schemas.microsoft.com/office/drawing/2016/SVG/main" r:embed="rId7"/>
                 </a:ext>
               </a:extLst>
             </a:blip>
@@ -15417,13 +17828,13 @@
             <p:nvPr/>
           </p:nvPicPr>
           <p:blipFill>
-            <a:blip r:embed="rId13">
+            <a:blip>
               <a:extLst>
                 <a:ext uri="{28A0092B-C50C-407E-A947-70E740481C1C}">
                   <a14:useLocalDpi xmlns:a14="http://schemas.microsoft.com/office/drawing/2010/main" val="0"/>
                 </a:ext>
                 <a:ext uri="{96DAC541-7B7A-43D3-8B79-37D633B846F1}">
-                  <asvg:svgBlip xmlns:asvg="http://schemas.microsoft.com/office/drawing/2016/SVG/main" r:embed="rId14"/>
+                  <asvg:svgBlip xmlns:asvg="http://schemas.microsoft.com/office/drawing/2016/SVG/main" r:embed="rId8"/>
                 </a:ext>
               </a:extLst>
             </a:blip>
@@ -15927,13 +18338,13 @@
           <p:nvPr/>
         </p:nvPicPr>
         <p:blipFill>
-          <a:blip r:embed="rId15">
+          <a:blip>
             <a:extLst>
               <a:ext uri="{28A0092B-C50C-407E-A947-70E740481C1C}">
                 <a14:useLocalDpi xmlns:a14="http://schemas.microsoft.com/office/drawing/2010/main" val="0"/>
               </a:ext>
               <a:ext uri="{96DAC541-7B7A-43D3-8B79-37D633B846F1}">
-                <asvg:svgBlip xmlns:asvg="http://schemas.microsoft.com/office/drawing/2016/SVG/main" r:embed="rId16"/>
+                <asvg:svgBlip xmlns:asvg="http://schemas.microsoft.com/office/drawing/2016/SVG/main" r:embed="rId9"/>
               </a:ext>
             </a:extLst>
           </a:blip>
@@ -16020,13 +18431,13 @@
           <p:nvPr/>
         </p:nvPicPr>
         <p:blipFill>
-          <a:blip r:embed="rId15">
+          <a:blip>
             <a:extLst>
               <a:ext uri="{28A0092B-C50C-407E-A947-70E740481C1C}">
                 <a14:useLocalDpi xmlns:a14="http://schemas.microsoft.com/office/drawing/2010/main" val="0"/>
               </a:ext>
               <a:ext uri="{96DAC541-7B7A-43D3-8B79-37D633B846F1}">
-                <asvg:svgBlip xmlns:asvg="http://schemas.microsoft.com/office/drawing/2016/SVG/main" r:embed="rId16"/>
+                <asvg:svgBlip xmlns:asvg="http://schemas.microsoft.com/office/drawing/2016/SVG/main" r:embed="rId9"/>
               </a:ext>
             </a:extLst>
           </a:blip>
@@ -16059,7 +18470,7 @@
           <p:nvPr/>
         </p:nvPicPr>
         <p:blipFill>
-          <a:blip r:embed="rId17">
+          <a:blip r:embed="rId10">
             <a:extLst>
               <a:ext uri="{28A0092B-C50C-407E-A947-70E740481C1C}">
                 <a14:useLocalDpi xmlns:a14="http://schemas.microsoft.com/office/drawing/2010/main" val="0"/>
@@ -16448,13 +18859,13 @@
           <p:nvPr/>
         </p:nvPicPr>
         <p:blipFill>
-          <a:blip r:embed="rId18">
+          <a:blip>
             <a:extLst>
               <a:ext uri="{28A0092B-C50C-407E-A947-70E740481C1C}">
                 <a14:useLocalDpi xmlns:a14="http://schemas.microsoft.com/office/drawing/2010/main" val="0"/>
               </a:ext>
               <a:ext uri="{96DAC541-7B7A-43D3-8B79-37D633B846F1}">
-                <asvg:svgBlip xmlns:asvg="http://schemas.microsoft.com/office/drawing/2016/SVG/main" r:embed="rId19"/>
+                <asvg:svgBlip xmlns:asvg="http://schemas.microsoft.com/office/drawing/2016/SVG/main" r:embed="rId11"/>
               </a:ext>
             </a:extLst>
           </a:blip>
@@ -16546,13 +18957,13 @@
           <p:nvPr/>
         </p:nvPicPr>
         <p:blipFill>
-          <a:blip r:embed="rId18">
+          <a:blip>
             <a:extLst>
               <a:ext uri="{28A0092B-C50C-407E-A947-70E740481C1C}">
                 <a14:useLocalDpi xmlns:a14="http://schemas.microsoft.com/office/drawing/2010/main" val="0"/>
               </a:ext>
               <a:ext uri="{96DAC541-7B7A-43D3-8B79-37D633B846F1}">
-                <asvg:svgBlip xmlns:asvg="http://schemas.microsoft.com/office/drawing/2016/SVG/main" r:embed="rId19"/>
+                <asvg:svgBlip xmlns:asvg="http://schemas.microsoft.com/office/drawing/2016/SVG/main" r:embed="rId11"/>
               </a:ext>
             </a:extLst>
           </a:blip>
@@ -18451,13 +20862,13 @@
           <p:nvPr/>
         </p:nvPicPr>
         <p:blipFill>
-          <a:blip r:embed="rId20">
+          <a:blip r:embed="rId12">
             <a:extLst>
               <a:ext uri="{28A0092B-C50C-407E-A947-70E740481C1C}">
                 <a14:useLocalDpi xmlns:a14="http://schemas.microsoft.com/office/drawing/2010/main" val="0"/>
               </a:ext>
               <a:ext uri="{837473B0-CC2E-450A-ABE3-18F120FF3D39}">
-                <a1611:picAttrSrcUrl xmlns:a1611="http://schemas.microsoft.com/office/drawing/2016/11/main" r:id="rId21"/>
+                <a1611:picAttrSrcUrl xmlns:a1611="http://schemas.microsoft.com/office/drawing/2016/11/main" r:id="rId13"/>
               </a:ext>
             </a:extLst>
           </a:blip>
@@ -18490,13 +20901,13 @@
           <p:nvPr/>
         </p:nvPicPr>
         <p:blipFill>
-          <a:blip r:embed="rId20">
+          <a:blip r:embed="rId12">
             <a:extLst>
               <a:ext uri="{28A0092B-C50C-407E-A947-70E740481C1C}">
                 <a14:useLocalDpi xmlns:a14="http://schemas.microsoft.com/office/drawing/2010/main" val="0"/>
               </a:ext>
               <a:ext uri="{837473B0-CC2E-450A-ABE3-18F120FF3D39}">
-                <a1611:picAttrSrcUrl xmlns:a1611="http://schemas.microsoft.com/office/drawing/2016/11/main" r:id="rId21"/>
+                <a1611:picAttrSrcUrl xmlns:a1611="http://schemas.microsoft.com/office/drawing/2016/11/main" r:id="rId13"/>
               </a:ext>
             </a:extLst>
           </a:blip>
@@ -18605,13 +21016,13 @@
               <p:nvPr/>
             </p:nvPicPr>
             <p:blipFill>
-              <a:blip r:embed="rId9">
+              <a:blip>
                 <a:extLst>
                   <a:ext uri="{28A0092B-C50C-407E-A947-70E740481C1C}">
                     <a14:useLocalDpi xmlns:a14="http://schemas.microsoft.com/office/drawing/2010/main" val="0"/>
                   </a:ext>
                   <a:ext uri="{96DAC541-7B7A-43D3-8B79-37D633B846F1}">
-                    <asvg:svgBlip xmlns:asvg="http://schemas.microsoft.com/office/drawing/2016/SVG/main" r:embed="rId10"/>
+                    <asvg:svgBlip xmlns:asvg="http://schemas.microsoft.com/office/drawing/2016/SVG/main" r:embed="rId6"/>
                   </a:ext>
                 </a:extLst>
               </a:blip>
@@ -18705,13 +21116,13 @@
               <p:nvPr/>
             </p:nvPicPr>
             <p:blipFill>
-              <a:blip r:embed="rId15">
+              <a:blip>
                 <a:extLst>
                   <a:ext uri="{28A0092B-C50C-407E-A947-70E740481C1C}">
                     <a14:useLocalDpi xmlns:a14="http://schemas.microsoft.com/office/drawing/2010/main" val="0"/>
                   </a:ext>
                   <a:ext uri="{96DAC541-7B7A-43D3-8B79-37D633B846F1}">
-                    <asvg:svgBlip xmlns:asvg="http://schemas.microsoft.com/office/drawing/2016/SVG/main" r:embed="rId16"/>
+                    <asvg:svgBlip xmlns:asvg="http://schemas.microsoft.com/office/drawing/2016/SVG/main" r:embed="rId9"/>
                   </a:ext>
                 </a:extLst>
               </a:blip>
@@ -18764,13 +21175,13 @@
                 <p:nvPr/>
               </p:nvPicPr>
               <p:blipFill>
-                <a:blip r:embed="rId15">
+                <a:blip>
                   <a:extLst>
                     <a:ext uri="{28A0092B-C50C-407E-A947-70E740481C1C}">
                       <a14:useLocalDpi xmlns:a14="http://schemas.microsoft.com/office/drawing/2010/main" val="0"/>
                     </a:ext>
                     <a:ext uri="{96DAC541-7B7A-43D3-8B79-37D633B846F1}">
-                      <asvg:svgBlip xmlns:asvg="http://schemas.microsoft.com/office/drawing/2016/SVG/main" r:embed="rId16"/>
+                      <asvg:svgBlip xmlns:asvg="http://schemas.microsoft.com/office/drawing/2016/SVG/main" r:embed="rId9"/>
                     </a:ext>
                   </a:extLst>
                 </a:blip>
@@ -18843,13 +21254,13 @@
                 <p:nvPr/>
               </p:nvPicPr>
               <p:blipFill>
-                <a:blip r:embed="rId15">
+                <a:blip>
                   <a:extLst>
                     <a:ext uri="{28A0092B-C50C-407E-A947-70E740481C1C}">
                       <a14:useLocalDpi xmlns:a14="http://schemas.microsoft.com/office/drawing/2010/main" val="0"/>
                     </a:ext>
                     <a:ext uri="{96DAC541-7B7A-43D3-8B79-37D633B846F1}">
-                      <asvg:svgBlip xmlns:asvg="http://schemas.microsoft.com/office/drawing/2016/SVG/main" r:embed="rId16"/>
+                      <asvg:svgBlip xmlns:asvg="http://schemas.microsoft.com/office/drawing/2016/SVG/main" r:embed="rId9"/>
                     </a:ext>
                   </a:extLst>
                 </a:blip>
@@ -18882,7 +21293,7 @@
                 <p:nvPr/>
               </p:nvPicPr>
               <p:blipFill>
-                <a:blip r:embed="rId17">
+                <a:blip r:embed="rId10">
                   <a:extLst>
                     <a:ext uri="{28A0092B-C50C-407E-A947-70E740481C1C}">
                       <a14:useLocalDpi xmlns:a14="http://schemas.microsoft.com/office/drawing/2010/main" val="0"/>
@@ -19273,13 +21684,13 @@
                 <p:nvPr/>
               </p:nvPicPr>
               <p:blipFill>
-                <a:blip r:embed="rId20">
+                <a:blip r:embed="rId12">
                   <a:extLst>
                     <a:ext uri="{28A0092B-C50C-407E-A947-70E740481C1C}">
                       <a14:useLocalDpi xmlns:a14="http://schemas.microsoft.com/office/drawing/2010/main" val="0"/>
                     </a:ext>
                     <a:ext uri="{837473B0-CC2E-450A-ABE3-18F120FF3D39}">
-                      <a1611:picAttrSrcUrl xmlns:a1611="http://schemas.microsoft.com/office/drawing/2016/11/main" r:id="rId21"/>
+                      <a1611:picAttrSrcUrl xmlns:a1611="http://schemas.microsoft.com/office/drawing/2016/11/main" r:id="rId13"/>
                     </a:ext>
                   </a:extLst>
                 </a:blip>
@@ -19312,13 +21723,13 @@
                 <p:nvPr/>
               </p:nvPicPr>
               <p:blipFill>
-                <a:blip r:embed="rId20">
+                <a:blip r:embed="rId12">
                   <a:extLst>
                     <a:ext uri="{28A0092B-C50C-407E-A947-70E740481C1C}">
                       <a14:useLocalDpi xmlns:a14="http://schemas.microsoft.com/office/drawing/2010/main" val="0"/>
                     </a:ext>
                     <a:ext uri="{837473B0-CC2E-450A-ABE3-18F120FF3D39}">
-                      <a1611:picAttrSrcUrl xmlns:a1611="http://schemas.microsoft.com/office/drawing/2016/11/main" r:id="rId21"/>
+                      <a1611:picAttrSrcUrl xmlns:a1611="http://schemas.microsoft.com/office/drawing/2016/11/main" r:id="rId13"/>
                     </a:ext>
                   </a:extLst>
                 </a:blip>
@@ -19354,13 +21765,13 @@
           <p:nvPr/>
         </p:nvPicPr>
         <p:blipFill>
-          <a:blip r:embed="rId20">
+          <a:blip r:embed="rId12">
             <a:extLst>
               <a:ext uri="{28A0092B-C50C-407E-A947-70E740481C1C}">
                 <a14:useLocalDpi xmlns:a14="http://schemas.microsoft.com/office/drawing/2010/main" val="0"/>
               </a:ext>
               <a:ext uri="{837473B0-CC2E-450A-ABE3-18F120FF3D39}">
-                <a1611:picAttrSrcUrl xmlns:a1611="http://schemas.microsoft.com/office/drawing/2016/11/main" r:id="rId21"/>
+                <a1611:picAttrSrcUrl xmlns:a1611="http://schemas.microsoft.com/office/drawing/2016/11/main" r:id="rId13"/>
               </a:ext>
             </a:extLst>
           </a:blip>
@@ -19393,13 +21804,13 @@
           <p:nvPr/>
         </p:nvPicPr>
         <p:blipFill>
-          <a:blip r:embed="rId20">
+          <a:blip r:embed="rId12">
             <a:extLst>
               <a:ext uri="{28A0092B-C50C-407E-A947-70E740481C1C}">
                 <a14:useLocalDpi xmlns:a14="http://schemas.microsoft.com/office/drawing/2010/main" val="0"/>
               </a:ext>
               <a:ext uri="{837473B0-CC2E-450A-ABE3-18F120FF3D39}">
-                <a1611:picAttrSrcUrl xmlns:a1611="http://schemas.microsoft.com/office/drawing/2016/11/main" r:id="rId21"/>
+                <a1611:picAttrSrcUrl xmlns:a1611="http://schemas.microsoft.com/office/drawing/2016/11/main" r:id="rId13"/>
               </a:ext>
             </a:extLst>
           </a:blip>
@@ -19432,13 +21843,13 @@
           <p:nvPr/>
         </p:nvPicPr>
         <p:blipFill>
-          <a:blip r:embed="rId20">
+          <a:blip r:embed="rId12">
             <a:extLst>
               <a:ext uri="{28A0092B-C50C-407E-A947-70E740481C1C}">
                 <a14:useLocalDpi xmlns:a14="http://schemas.microsoft.com/office/drawing/2010/main" val="0"/>
               </a:ext>
               <a:ext uri="{837473B0-CC2E-450A-ABE3-18F120FF3D39}">
-                <a1611:picAttrSrcUrl xmlns:a1611="http://schemas.microsoft.com/office/drawing/2016/11/main" r:id="rId21"/>
+                <a1611:picAttrSrcUrl xmlns:a1611="http://schemas.microsoft.com/office/drawing/2016/11/main" r:id="rId13"/>
               </a:ext>
             </a:extLst>
           </a:blip>
@@ -19482,13 +21893,13 @@
           <p:nvPr/>
         </p:nvPicPr>
         <p:blipFill>
-          <a:blip r:embed="rId20">
+          <a:blip r:embed="rId12">
             <a:extLst>
               <a:ext uri="{28A0092B-C50C-407E-A947-70E740481C1C}">
                 <a14:useLocalDpi xmlns:a14="http://schemas.microsoft.com/office/drawing/2010/main" val="0"/>
               </a:ext>
               <a:ext uri="{837473B0-CC2E-450A-ABE3-18F120FF3D39}">
-                <a1611:picAttrSrcUrl xmlns:a1611="http://schemas.microsoft.com/office/drawing/2016/11/main" r:id="rId21"/>
+                <a1611:picAttrSrcUrl xmlns:a1611="http://schemas.microsoft.com/office/drawing/2016/11/main" r:id="rId13"/>
               </a:ext>
             </a:extLst>
           </a:blip>
@@ -19702,7 +22113,7 @@
           <p:nvPr/>
         </p:nvPicPr>
         <p:blipFill rotWithShape="1">
-          <a:blip r:embed="rId3">
+          <a:blip>
             <a:duotone>
               <a:schemeClr val="accent1">
                 <a:shade val="45000"/>
@@ -19715,7 +22126,7 @@
                 <a14:useLocalDpi xmlns:a14="http://schemas.microsoft.com/office/drawing/2010/main" val="0"/>
               </a:ext>
               <a:ext uri="{96DAC541-7B7A-43D3-8B79-37D633B846F1}">
-                <asvg:svgBlip xmlns:asvg="http://schemas.microsoft.com/office/drawing/2016/SVG/main" r:embed="rId4"/>
+                <asvg:svgBlip xmlns:asvg="http://schemas.microsoft.com/office/drawing/2016/SVG/main" r:embed="rId3"/>
               </a:ext>
             </a:extLst>
           </a:blip>
@@ -19838,13 +22249,13 @@
           <p:nvPr/>
         </p:nvPicPr>
         <p:blipFill>
-          <a:blip r:embed="rId5">
+          <a:blip>
             <a:extLst>
               <a:ext uri="{28A0092B-C50C-407E-A947-70E740481C1C}">
                 <a14:useLocalDpi xmlns:a14="http://schemas.microsoft.com/office/drawing/2010/main" val="0"/>
               </a:ext>
               <a:ext uri="{96DAC541-7B7A-43D3-8B79-37D633B846F1}">
-                <asvg:svgBlip xmlns:asvg="http://schemas.microsoft.com/office/drawing/2016/SVG/main" r:embed="rId6"/>
+                <asvg:svgBlip xmlns:asvg="http://schemas.microsoft.com/office/drawing/2016/SVG/main" r:embed="rId4"/>
               </a:ext>
             </a:extLst>
           </a:blip>
@@ -19936,13 +22347,13 @@
           <p:nvPr/>
         </p:nvPicPr>
         <p:blipFill>
-          <a:blip r:embed="rId5">
+          <a:blip>
             <a:extLst>
               <a:ext uri="{28A0092B-C50C-407E-A947-70E740481C1C}">
                 <a14:useLocalDpi xmlns:a14="http://schemas.microsoft.com/office/drawing/2010/main" val="0"/>
               </a:ext>
               <a:ext uri="{96DAC541-7B7A-43D3-8B79-37D633B846F1}">
-                <asvg:svgBlip xmlns:asvg="http://schemas.microsoft.com/office/drawing/2016/SVG/main" r:embed="rId6"/>
+                <asvg:svgBlip xmlns:asvg="http://schemas.microsoft.com/office/drawing/2016/SVG/main" r:embed="rId4"/>
               </a:ext>
             </a:extLst>
           </a:blip>
@@ -21548,13 +23959,13 @@
           <p:nvPr/>
         </p:nvPicPr>
         <p:blipFill>
-          <a:blip r:embed="rId7">
+          <a:blip>
             <a:extLst>
               <a:ext uri="{28A0092B-C50C-407E-A947-70E740481C1C}">
                 <a14:useLocalDpi xmlns:a14="http://schemas.microsoft.com/office/drawing/2010/main" val="0"/>
               </a:ext>
               <a:ext uri="{96DAC541-7B7A-43D3-8B79-37D633B846F1}">
-                <asvg:svgBlip xmlns:asvg="http://schemas.microsoft.com/office/drawing/2016/SVG/main" r:embed="rId8"/>
+                <asvg:svgBlip xmlns:asvg="http://schemas.microsoft.com/office/drawing/2016/SVG/main" r:embed="rId5"/>
               </a:ext>
             </a:extLst>
           </a:blip>
@@ -21679,13 +24090,13 @@
           <p:nvPr/>
         </p:nvPicPr>
         <p:blipFill>
-          <a:blip r:embed="rId9">
+          <a:blip>
             <a:extLst>
               <a:ext uri="{28A0092B-C50C-407E-A947-70E740481C1C}">
                 <a14:useLocalDpi xmlns:a14="http://schemas.microsoft.com/office/drawing/2010/main" val="0"/>
               </a:ext>
               <a:ext uri="{96DAC541-7B7A-43D3-8B79-37D633B846F1}">
-                <asvg:svgBlip xmlns:asvg="http://schemas.microsoft.com/office/drawing/2016/SVG/main" r:embed="rId10"/>
+                <asvg:svgBlip xmlns:asvg="http://schemas.microsoft.com/office/drawing/2016/SVG/main" r:embed="rId6"/>
               </a:ext>
             </a:extLst>
           </a:blip>
@@ -22304,13 +24715,13 @@
           <p:nvPr/>
         </p:nvPicPr>
         <p:blipFill>
-          <a:blip r:embed="rId3">
+          <a:blip>
             <a:extLst>
               <a:ext uri="{28A0092B-C50C-407E-A947-70E740481C1C}">
                 <a14:useLocalDpi xmlns:a14="http://schemas.microsoft.com/office/drawing/2010/main" val="0"/>
               </a:ext>
               <a:ext uri="{96DAC541-7B7A-43D3-8B79-37D633B846F1}">
-                <asvg:svgBlip xmlns:asvg="http://schemas.microsoft.com/office/drawing/2016/SVG/main" r:embed="rId4"/>
+                <asvg:svgBlip xmlns:asvg="http://schemas.microsoft.com/office/drawing/2016/SVG/main" r:embed="rId3"/>
               </a:ext>
             </a:extLst>
           </a:blip>
@@ -22435,13 +24846,13 @@
           <p:nvPr/>
         </p:nvPicPr>
         <p:blipFill>
-          <a:blip r:embed="rId5">
+          <a:blip>
             <a:extLst>
               <a:ext uri="{28A0092B-C50C-407E-A947-70E740481C1C}">
                 <a14:useLocalDpi xmlns:a14="http://schemas.microsoft.com/office/drawing/2010/main" val="0"/>
               </a:ext>
               <a:ext uri="{96DAC541-7B7A-43D3-8B79-37D633B846F1}">
-                <asvg:svgBlip xmlns:asvg="http://schemas.microsoft.com/office/drawing/2016/SVG/main" r:embed="rId6"/>
+                <asvg:svgBlip xmlns:asvg="http://schemas.microsoft.com/office/drawing/2016/SVG/main" r:embed="rId4"/>
               </a:ext>
             </a:extLst>
           </a:blip>
@@ -22474,7 +24885,7 @@
           <p:nvPr/>
         </p:nvPicPr>
         <p:blipFill rotWithShape="1">
-          <a:blip r:embed="rId7">
+          <a:blip>
             <a:duotone>
               <a:schemeClr val="accent1">
                 <a:shade val="45000"/>
@@ -22487,7 +24898,7 @@
                 <a14:useLocalDpi xmlns:a14="http://schemas.microsoft.com/office/drawing/2010/main" val="0"/>
               </a:ext>
               <a:ext uri="{96DAC541-7B7A-43D3-8B79-37D633B846F1}">
-                <asvg:svgBlip xmlns:asvg="http://schemas.microsoft.com/office/drawing/2016/SVG/main" r:embed="rId8"/>
+                <asvg:svgBlip xmlns:asvg="http://schemas.microsoft.com/office/drawing/2016/SVG/main" r:embed="rId5"/>
               </a:ext>
             </a:extLst>
           </a:blip>
@@ -22693,13 +25104,13 @@
           <p:nvPr/>
         </p:nvPicPr>
         <p:blipFill>
-          <a:blip r:embed="rId9">
+          <a:blip>
             <a:extLst>
               <a:ext uri="{28A0092B-C50C-407E-A947-70E740481C1C}">
                 <a14:useLocalDpi xmlns:a14="http://schemas.microsoft.com/office/drawing/2010/main" val="0"/>
               </a:ext>
               <a:ext uri="{96DAC541-7B7A-43D3-8B79-37D633B846F1}">
-                <asvg:svgBlip xmlns:asvg="http://schemas.microsoft.com/office/drawing/2016/SVG/main" r:embed="rId10"/>
+                <asvg:svgBlip xmlns:asvg="http://schemas.microsoft.com/office/drawing/2016/SVG/main" r:embed="rId6"/>
               </a:ext>
             </a:extLst>
           </a:blip>
@@ -22791,13 +25202,13 @@
           <p:nvPr/>
         </p:nvPicPr>
         <p:blipFill>
-          <a:blip r:embed="rId9">
+          <a:blip>
             <a:extLst>
               <a:ext uri="{28A0092B-C50C-407E-A947-70E740481C1C}">
                 <a14:useLocalDpi xmlns:a14="http://schemas.microsoft.com/office/drawing/2010/main" val="0"/>
               </a:ext>
               <a:ext uri="{96DAC541-7B7A-43D3-8B79-37D633B846F1}">
-                <asvg:svgBlip xmlns:asvg="http://schemas.microsoft.com/office/drawing/2016/SVG/main" r:embed="rId10"/>
+                <asvg:svgBlip xmlns:asvg="http://schemas.microsoft.com/office/drawing/2016/SVG/main" r:embed="rId6"/>
               </a:ext>
             </a:extLst>
           </a:blip>
@@ -24696,13 +27107,13 @@
           <p:nvPr/>
         </p:nvPicPr>
         <p:blipFill>
-          <a:blip r:embed="rId11">
+          <a:blip r:embed="rId7">
             <a:extLst>
               <a:ext uri="{28A0092B-C50C-407E-A947-70E740481C1C}">
                 <a14:useLocalDpi xmlns:a14="http://schemas.microsoft.com/office/drawing/2010/main" val="0"/>
               </a:ext>
               <a:ext uri="{837473B0-CC2E-450A-ABE3-18F120FF3D39}">
-                <a1611:picAttrSrcUrl xmlns:a1611="http://schemas.microsoft.com/office/drawing/2016/11/main" r:id="rId12"/>
+                <a1611:picAttrSrcUrl xmlns:a1611="http://schemas.microsoft.com/office/drawing/2016/11/main" r:id="rId8"/>
               </a:ext>
             </a:extLst>
           </a:blip>
@@ -24746,13 +27157,13 @@
           <p:nvPr/>
         </p:nvPicPr>
         <p:blipFill>
-          <a:blip r:embed="rId11">
+          <a:blip r:embed="rId7">
             <a:extLst>
               <a:ext uri="{28A0092B-C50C-407E-A947-70E740481C1C}">
                 <a14:useLocalDpi xmlns:a14="http://schemas.microsoft.com/office/drawing/2010/main" val="0"/>
               </a:ext>
               <a:ext uri="{837473B0-CC2E-450A-ABE3-18F120FF3D39}">
-                <a1611:picAttrSrcUrl xmlns:a1611="http://schemas.microsoft.com/office/drawing/2016/11/main" r:id="rId12"/>
+                <a1611:picAttrSrcUrl xmlns:a1611="http://schemas.microsoft.com/office/drawing/2016/11/main" r:id="rId8"/>
               </a:ext>
             </a:extLst>
           </a:blip>
@@ -24960,13 +27371,13 @@
           <p:nvPr/>
         </p:nvPicPr>
         <p:blipFill>
-          <a:blip r:embed="rId3">
+          <a:blip>
             <a:extLst>
               <a:ext uri="{28A0092B-C50C-407E-A947-70E740481C1C}">
                 <a14:useLocalDpi xmlns:a14="http://schemas.microsoft.com/office/drawing/2010/main" val="0"/>
               </a:ext>
               <a:ext uri="{96DAC541-7B7A-43D3-8B79-37D633B846F1}">
-                <asvg:svgBlip xmlns:asvg="http://schemas.microsoft.com/office/drawing/2016/SVG/main" r:embed="rId4"/>
+                <asvg:svgBlip xmlns:asvg="http://schemas.microsoft.com/office/drawing/2016/SVG/main" r:embed="rId3"/>
               </a:ext>
             </a:extLst>
           </a:blip>
@@ -24999,13 +27410,13 @@
           <p:nvPr/>
         </p:nvPicPr>
         <p:blipFill>
-          <a:blip r:embed="rId5">
+          <a:blip>
             <a:extLst>
               <a:ext uri="{28A0092B-C50C-407E-A947-70E740481C1C}">
                 <a14:useLocalDpi xmlns:a14="http://schemas.microsoft.com/office/drawing/2010/main" val="0"/>
               </a:ext>
               <a:ext uri="{96DAC541-7B7A-43D3-8B79-37D633B846F1}">
-                <asvg:svgBlip xmlns:asvg="http://schemas.microsoft.com/office/drawing/2016/SVG/main" r:embed="rId6"/>
+                <asvg:svgBlip xmlns:asvg="http://schemas.microsoft.com/office/drawing/2016/SVG/main" r:embed="rId4"/>
               </a:ext>
             </a:extLst>
           </a:blip>
@@ -25495,13 +27906,13 @@
           <p:nvPr/>
         </p:nvPicPr>
         <p:blipFill>
-          <a:blip r:embed="rId7">
+          <a:blip>
             <a:extLst>
               <a:ext uri="{28A0092B-C50C-407E-A947-70E740481C1C}">
                 <a14:useLocalDpi xmlns:a14="http://schemas.microsoft.com/office/drawing/2010/main" val="0"/>
               </a:ext>
               <a:ext uri="{96DAC541-7B7A-43D3-8B79-37D633B846F1}">
-                <asvg:svgBlip xmlns:asvg="http://schemas.microsoft.com/office/drawing/2016/SVG/main" r:embed="rId8"/>
+                <asvg:svgBlip xmlns:asvg="http://schemas.microsoft.com/office/drawing/2016/SVG/main" r:embed="rId5"/>
               </a:ext>
             </a:extLst>
           </a:blip>
@@ -25554,13 +27965,13 @@
             <p:nvPr/>
           </p:nvPicPr>
           <p:blipFill>
-            <a:blip r:embed="rId9">
+            <a:blip>
               <a:extLst>
                 <a:ext uri="{28A0092B-C50C-407E-A947-70E740481C1C}">
                   <a14:useLocalDpi xmlns:a14="http://schemas.microsoft.com/office/drawing/2010/main" val="0"/>
                 </a:ext>
                 <a:ext uri="{96DAC541-7B7A-43D3-8B79-37D633B846F1}">
-                  <asvg:svgBlip xmlns:asvg="http://schemas.microsoft.com/office/drawing/2016/SVG/main" r:embed="rId10"/>
+                  <asvg:svgBlip xmlns:asvg="http://schemas.microsoft.com/office/drawing/2016/SVG/main" r:embed="rId6"/>
                 </a:ext>
               </a:extLst>
             </a:blip>
@@ -25687,13 +28098,13 @@
             <p:nvPr/>
           </p:nvPicPr>
           <p:blipFill>
-            <a:blip r:embed="rId9">
+            <a:blip>
               <a:extLst>
                 <a:ext uri="{28A0092B-C50C-407E-A947-70E740481C1C}">
                   <a14:useLocalDpi xmlns:a14="http://schemas.microsoft.com/office/drawing/2010/main" val="0"/>
                 </a:ext>
                 <a:ext uri="{96DAC541-7B7A-43D3-8B79-37D633B846F1}">
-                  <asvg:svgBlip xmlns:asvg="http://schemas.microsoft.com/office/drawing/2016/SVG/main" r:embed="rId10"/>
+                  <asvg:svgBlip xmlns:asvg="http://schemas.microsoft.com/office/drawing/2016/SVG/main" r:embed="rId6"/>
                 </a:ext>
               </a:extLst>
             </a:blip>
@@ -25747,13 +28158,13 @@
             <p:nvPr/>
           </p:nvPicPr>
           <p:blipFill>
-            <a:blip r:embed="rId9">
+            <a:blip>
               <a:extLst>
                 <a:ext uri="{28A0092B-C50C-407E-A947-70E740481C1C}">
                   <a14:useLocalDpi xmlns:a14="http://schemas.microsoft.com/office/drawing/2010/main" val="0"/>
                 </a:ext>
                 <a:ext uri="{96DAC541-7B7A-43D3-8B79-37D633B846F1}">
-                  <asvg:svgBlip xmlns:asvg="http://schemas.microsoft.com/office/drawing/2016/SVG/main" r:embed="rId10"/>
+                  <asvg:svgBlip xmlns:asvg="http://schemas.microsoft.com/office/drawing/2016/SVG/main" r:embed="rId6"/>
                 </a:ext>
               </a:extLst>
             </a:blip>
@@ -25852,13 +28263,13 @@
             <p:nvPr/>
           </p:nvPicPr>
           <p:blipFill>
-            <a:blip r:embed="rId9">
+            <a:blip>
               <a:extLst>
                 <a:ext uri="{28A0092B-C50C-407E-A947-70E740481C1C}">
                   <a14:useLocalDpi xmlns:a14="http://schemas.microsoft.com/office/drawing/2010/main" val="0"/>
                 </a:ext>
                 <a:ext uri="{96DAC541-7B7A-43D3-8B79-37D633B846F1}">
-                  <asvg:svgBlip xmlns:asvg="http://schemas.microsoft.com/office/drawing/2016/SVG/main" r:embed="rId10"/>
+                  <asvg:svgBlip xmlns:asvg="http://schemas.microsoft.com/office/drawing/2016/SVG/main" r:embed="rId6"/>
                 </a:ext>
               </a:extLst>
             </a:blip>
@@ -25994,13 +28405,13 @@
             <p:nvPr/>
           </p:nvPicPr>
           <p:blipFill>
-            <a:blip r:embed="rId11">
+            <a:blip>
               <a:extLst>
                 <a:ext uri="{28A0092B-C50C-407E-A947-70E740481C1C}">
                   <a14:useLocalDpi xmlns:a14="http://schemas.microsoft.com/office/drawing/2010/main" val="0"/>
                 </a:ext>
                 <a:ext uri="{96DAC541-7B7A-43D3-8B79-37D633B846F1}">
-                  <asvg:svgBlip xmlns:asvg="http://schemas.microsoft.com/office/drawing/2016/SVG/main" r:embed="rId12"/>
+                  <asvg:svgBlip xmlns:asvg="http://schemas.microsoft.com/office/drawing/2016/SVG/main" r:embed="rId7"/>
                 </a:ext>
               </a:extLst>
             </a:blip>
@@ -26033,13 +28444,13 @@
             <p:nvPr/>
           </p:nvPicPr>
           <p:blipFill>
-            <a:blip r:embed="rId13">
+            <a:blip>
               <a:extLst>
                 <a:ext uri="{28A0092B-C50C-407E-A947-70E740481C1C}">
                   <a14:useLocalDpi xmlns:a14="http://schemas.microsoft.com/office/drawing/2010/main" val="0"/>
                 </a:ext>
                 <a:ext uri="{96DAC541-7B7A-43D3-8B79-37D633B846F1}">
-                  <asvg:svgBlip xmlns:asvg="http://schemas.microsoft.com/office/drawing/2016/SVG/main" r:embed="rId14"/>
+                  <asvg:svgBlip xmlns:asvg="http://schemas.microsoft.com/office/drawing/2016/SVG/main" r:embed="rId8"/>
                 </a:ext>
               </a:extLst>
             </a:blip>
@@ -26139,13 +28550,13 @@
             <p:nvPr/>
           </p:nvPicPr>
           <p:blipFill>
-            <a:blip r:embed="rId11">
+            <a:blip>
               <a:extLst>
                 <a:ext uri="{28A0092B-C50C-407E-A947-70E740481C1C}">
                   <a14:useLocalDpi xmlns:a14="http://schemas.microsoft.com/office/drawing/2010/main" val="0"/>
                 </a:ext>
                 <a:ext uri="{96DAC541-7B7A-43D3-8B79-37D633B846F1}">
-                  <asvg:svgBlip xmlns:asvg="http://schemas.microsoft.com/office/drawing/2016/SVG/main" r:embed="rId12"/>
+                  <asvg:svgBlip xmlns:asvg="http://schemas.microsoft.com/office/drawing/2016/SVG/main" r:embed="rId7"/>
                 </a:ext>
               </a:extLst>
             </a:blip>
@@ -26178,13 +28589,13 @@
             <p:nvPr/>
           </p:nvPicPr>
           <p:blipFill>
-            <a:blip r:embed="rId13">
+            <a:blip>
               <a:extLst>
                 <a:ext uri="{28A0092B-C50C-407E-A947-70E740481C1C}">
                   <a14:useLocalDpi xmlns:a14="http://schemas.microsoft.com/office/drawing/2010/main" val="0"/>
                 </a:ext>
                 <a:ext uri="{96DAC541-7B7A-43D3-8B79-37D633B846F1}">
-                  <asvg:svgBlip xmlns:asvg="http://schemas.microsoft.com/office/drawing/2016/SVG/main" r:embed="rId14"/>
+                  <asvg:svgBlip xmlns:asvg="http://schemas.microsoft.com/office/drawing/2016/SVG/main" r:embed="rId8"/>
                 </a:ext>
               </a:extLst>
             </a:blip>
@@ -26284,13 +28695,13 @@
             <p:nvPr/>
           </p:nvPicPr>
           <p:blipFill>
-            <a:blip r:embed="rId11">
+            <a:blip>
               <a:extLst>
                 <a:ext uri="{28A0092B-C50C-407E-A947-70E740481C1C}">
                   <a14:useLocalDpi xmlns:a14="http://schemas.microsoft.com/office/drawing/2010/main" val="0"/>
                 </a:ext>
                 <a:ext uri="{96DAC541-7B7A-43D3-8B79-37D633B846F1}">
-                  <asvg:svgBlip xmlns:asvg="http://schemas.microsoft.com/office/drawing/2016/SVG/main" r:embed="rId12"/>
+                  <asvg:svgBlip xmlns:asvg="http://schemas.microsoft.com/office/drawing/2016/SVG/main" r:embed="rId7"/>
                 </a:ext>
               </a:extLst>
             </a:blip>
@@ -26323,13 +28734,13 @@
             <p:nvPr/>
           </p:nvPicPr>
           <p:blipFill>
-            <a:blip r:embed="rId13">
+            <a:blip>
               <a:extLst>
                 <a:ext uri="{28A0092B-C50C-407E-A947-70E740481C1C}">
                   <a14:useLocalDpi xmlns:a14="http://schemas.microsoft.com/office/drawing/2010/main" val="0"/>
                 </a:ext>
                 <a:ext uri="{96DAC541-7B7A-43D3-8B79-37D633B846F1}">
-                  <asvg:svgBlip xmlns:asvg="http://schemas.microsoft.com/office/drawing/2016/SVG/main" r:embed="rId14"/>
+                  <asvg:svgBlip xmlns:asvg="http://schemas.microsoft.com/office/drawing/2016/SVG/main" r:embed="rId8"/>
                 </a:ext>
               </a:extLst>
             </a:blip>
@@ -26521,13 +28932,13 @@
             <p:nvPr/>
           </p:nvPicPr>
           <p:blipFill>
-            <a:blip r:embed="rId11">
+            <a:blip>
               <a:extLst>
                 <a:ext uri="{28A0092B-C50C-407E-A947-70E740481C1C}">
                   <a14:useLocalDpi xmlns:a14="http://schemas.microsoft.com/office/drawing/2010/main" val="0"/>
                 </a:ext>
                 <a:ext uri="{96DAC541-7B7A-43D3-8B79-37D633B846F1}">
-                  <asvg:svgBlip xmlns:asvg="http://schemas.microsoft.com/office/drawing/2016/SVG/main" r:embed="rId12"/>
+                  <asvg:svgBlip xmlns:asvg="http://schemas.microsoft.com/office/drawing/2016/SVG/main" r:embed="rId7"/>
                 </a:ext>
               </a:extLst>
             </a:blip>
@@ -26560,13 +28971,13 @@
             <p:nvPr/>
           </p:nvPicPr>
           <p:blipFill>
-            <a:blip r:embed="rId13">
+            <a:blip>
               <a:extLst>
                 <a:ext uri="{28A0092B-C50C-407E-A947-70E740481C1C}">
                   <a14:useLocalDpi xmlns:a14="http://schemas.microsoft.com/office/drawing/2010/main" val="0"/>
                 </a:ext>
                 <a:ext uri="{96DAC541-7B7A-43D3-8B79-37D633B846F1}">
-                  <asvg:svgBlip xmlns:asvg="http://schemas.microsoft.com/office/drawing/2016/SVG/main" r:embed="rId14"/>
+                  <asvg:svgBlip xmlns:asvg="http://schemas.microsoft.com/office/drawing/2016/SVG/main" r:embed="rId8"/>
                 </a:ext>
               </a:extLst>
             </a:blip>
@@ -26666,13 +29077,13 @@
             <p:nvPr/>
           </p:nvPicPr>
           <p:blipFill>
-            <a:blip r:embed="rId11">
+            <a:blip>
               <a:extLst>
                 <a:ext uri="{28A0092B-C50C-407E-A947-70E740481C1C}">
                   <a14:useLocalDpi xmlns:a14="http://schemas.microsoft.com/office/drawing/2010/main" val="0"/>
                 </a:ext>
                 <a:ext uri="{96DAC541-7B7A-43D3-8B79-37D633B846F1}">
-                  <asvg:svgBlip xmlns:asvg="http://schemas.microsoft.com/office/drawing/2016/SVG/main" r:embed="rId12"/>
+                  <asvg:svgBlip xmlns:asvg="http://schemas.microsoft.com/office/drawing/2016/SVG/main" r:embed="rId7"/>
                 </a:ext>
               </a:extLst>
             </a:blip>
@@ -26705,13 +29116,13 @@
             <p:nvPr/>
           </p:nvPicPr>
           <p:blipFill>
-            <a:blip r:embed="rId13">
+            <a:blip>
               <a:extLst>
                 <a:ext uri="{28A0092B-C50C-407E-A947-70E740481C1C}">
                   <a14:useLocalDpi xmlns:a14="http://schemas.microsoft.com/office/drawing/2010/main" val="0"/>
                 </a:ext>
                 <a:ext uri="{96DAC541-7B7A-43D3-8B79-37D633B846F1}">
-                  <asvg:svgBlip xmlns:asvg="http://schemas.microsoft.com/office/drawing/2016/SVG/main" r:embed="rId14"/>
+                  <asvg:svgBlip xmlns:asvg="http://schemas.microsoft.com/office/drawing/2016/SVG/main" r:embed="rId8"/>
                 </a:ext>
               </a:extLst>
             </a:blip>
@@ -26811,13 +29222,13 @@
             <p:nvPr/>
           </p:nvPicPr>
           <p:blipFill>
-            <a:blip r:embed="rId11">
+            <a:blip>
               <a:extLst>
                 <a:ext uri="{28A0092B-C50C-407E-A947-70E740481C1C}">
                   <a14:useLocalDpi xmlns:a14="http://schemas.microsoft.com/office/drawing/2010/main" val="0"/>
                 </a:ext>
                 <a:ext uri="{96DAC541-7B7A-43D3-8B79-37D633B846F1}">
-                  <asvg:svgBlip xmlns:asvg="http://schemas.microsoft.com/office/drawing/2016/SVG/main" r:embed="rId12"/>
+                  <asvg:svgBlip xmlns:asvg="http://schemas.microsoft.com/office/drawing/2016/SVG/main" r:embed="rId7"/>
                 </a:ext>
               </a:extLst>
             </a:blip>
@@ -26850,13 +29261,13 @@
             <p:nvPr/>
           </p:nvPicPr>
           <p:blipFill>
-            <a:blip r:embed="rId13">
+            <a:blip>
               <a:extLst>
                 <a:ext uri="{28A0092B-C50C-407E-A947-70E740481C1C}">
                   <a14:useLocalDpi xmlns:a14="http://schemas.microsoft.com/office/drawing/2010/main" val="0"/>
                 </a:ext>
                 <a:ext uri="{96DAC541-7B7A-43D3-8B79-37D633B846F1}">
-                  <asvg:svgBlip xmlns:asvg="http://schemas.microsoft.com/office/drawing/2016/SVG/main" r:embed="rId14"/>
+                  <asvg:svgBlip xmlns:asvg="http://schemas.microsoft.com/office/drawing/2016/SVG/main" r:embed="rId8"/>
                 </a:ext>
               </a:extLst>
             </a:blip>
@@ -27229,7 +29640,7 @@
           <p:nvPr/>
         </p:nvPicPr>
         <p:blipFill rotWithShape="1">
-          <a:blip r:embed="rId15">
+          <a:blip>
             <a:duotone>
               <a:schemeClr val="accent1">
                 <a:shade val="45000"/>
@@ -27242,7 +29653,7 @@
                 <a14:useLocalDpi xmlns:a14="http://schemas.microsoft.com/office/drawing/2010/main" val="0"/>
               </a:ext>
               <a:ext uri="{96DAC541-7B7A-43D3-8B79-37D633B846F1}">
-                <asvg:svgBlip xmlns:asvg="http://schemas.microsoft.com/office/drawing/2016/SVG/main" r:embed="rId16"/>
+                <asvg:svgBlip xmlns:asvg="http://schemas.microsoft.com/office/drawing/2016/SVG/main" r:embed="rId9"/>
               </a:ext>
             </a:extLst>
           </a:blip>
@@ -27498,7 +29909,7 @@
           <p:nvPr/>
         </p:nvPicPr>
         <p:blipFill rotWithShape="1">
-          <a:blip r:embed="rId15">
+          <a:blip>
             <a:duotone>
               <a:schemeClr val="accent2">
                 <a:shade val="45000"/>
@@ -27511,7 +29922,7 @@
                 <a14:useLocalDpi xmlns:a14="http://schemas.microsoft.com/office/drawing/2010/main" val="0"/>
               </a:ext>
               <a:ext uri="{96DAC541-7B7A-43D3-8B79-37D633B846F1}">
-                <asvg:svgBlip xmlns:asvg="http://schemas.microsoft.com/office/drawing/2016/SVG/main" r:embed="rId16"/>
+                <asvg:svgBlip xmlns:asvg="http://schemas.microsoft.com/office/drawing/2016/SVG/main" r:embed="rId9"/>
               </a:ext>
             </a:extLst>
           </a:blip>
@@ -27635,7 +30046,7 @@
           <p:nvPr/>
         </p:nvPicPr>
         <p:blipFill rotWithShape="1">
-          <a:blip r:embed="rId15">
+          <a:blip>
             <a:duotone>
               <a:schemeClr val="bg2">
                 <a:shade val="45000"/>
@@ -27648,7 +30059,7 @@
                 <a14:useLocalDpi xmlns:a14="http://schemas.microsoft.com/office/drawing/2010/main" val="0"/>
               </a:ext>
               <a:ext uri="{96DAC541-7B7A-43D3-8B79-37D633B846F1}">
-                <asvg:svgBlip xmlns:asvg="http://schemas.microsoft.com/office/drawing/2016/SVG/main" r:embed="rId16"/>
+                <asvg:svgBlip xmlns:asvg="http://schemas.microsoft.com/office/drawing/2016/SVG/main" r:embed="rId9"/>
               </a:ext>
             </a:extLst>
           </a:blip>
@@ -28458,13 +30869,13 @@
           <p:nvPr/>
         </p:nvPicPr>
         <p:blipFill>
-          <a:blip r:embed="rId17">
+          <a:blip>
             <a:extLst>
               <a:ext uri="{28A0092B-C50C-407E-A947-70E740481C1C}">
                 <a14:useLocalDpi xmlns:a14="http://schemas.microsoft.com/office/drawing/2010/main" val="0"/>
               </a:ext>
               <a:ext uri="{96DAC541-7B7A-43D3-8B79-37D633B846F1}">
-                <asvg:svgBlip xmlns:asvg="http://schemas.microsoft.com/office/drawing/2016/SVG/main" r:embed="rId18"/>
+                <asvg:svgBlip xmlns:asvg="http://schemas.microsoft.com/office/drawing/2016/SVG/main" r:embed="rId10"/>
               </a:ext>
             </a:extLst>
           </a:blip>
@@ -28545,7 +30956,7 @@
           <p:nvPr/>
         </p:nvPicPr>
         <p:blipFill>
-          <a:blip r:embed="rId19">
+          <a:blip r:embed="rId11">
             <a:extLst>
               <a:ext uri="{28A0092B-C50C-407E-A947-70E740481C1C}">
                 <a14:useLocalDpi xmlns:a14="http://schemas.microsoft.com/office/drawing/2010/main" val="0"/>
@@ -28770,13 +31181,13 @@
           <p:nvPr/>
         </p:nvPicPr>
         <p:blipFill>
-          <a:blip r:embed="rId17">
+          <a:blip>
             <a:extLst>
               <a:ext uri="{28A0092B-C50C-407E-A947-70E740481C1C}">
                 <a14:useLocalDpi xmlns:a14="http://schemas.microsoft.com/office/drawing/2010/main" val="0"/>
               </a:ext>
               <a:ext uri="{96DAC541-7B7A-43D3-8B79-37D633B846F1}">
-                <asvg:svgBlip xmlns:asvg="http://schemas.microsoft.com/office/drawing/2016/SVG/main" r:embed="rId18"/>
+                <asvg:svgBlip xmlns:asvg="http://schemas.microsoft.com/office/drawing/2016/SVG/main" r:embed="rId10"/>
               </a:ext>
             </a:extLst>
           </a:blip>
@@ -28809,7 +31220,7 @@
           <p:nvPr/>
         </p:nvPicPr>
         <p:blipFill>
-          <a:blip r:embed="rId19">
+          <a:blip r:embed="rId11">
             <a:extLst>
               <a:ext uri="{28A0092B-C50C-407E-A947-70E740481C1C}">
                 <a14:useLocalDpi xmlns:a14="http://schemas.microsoft.com/office/drawing/2010/main" val="0"/>
@@ -29030,13 +31441,13 @@
           <p:nvPr/>
         </p:nvPicPr>
         <p:blipFill>
-          <a:blip r:embed="rId17">
+          <a:blip>
             <a:extLst>
               <a:ext uri="{28A0092B-C50C-407E-A947-70E740481C1C}">
                 <a14:useLocalDpi xmlns:a14="http://schemas.microsoft.com/office/drawing/2010/main" val="0"/>
               </a:ext>
               <a:ext uri="{96DAC541-7B7A-43D3-8B79-37D633B846F1}">
-                <asvg:svgBlip xmlns:asvg="http://schemas.microsoft.com/office/drawing/2016/SVG/main" r:embed="rId18"/>
+                <asvg:svgBlip xmlns:asvg="http://schemas.microsoft.com/office/drawing/2016/SVG/main" r:embed="rId10"/>
               </a:ext>
             </a:extLst>
           </a:blip>
@@ -29069,7 +31480,7 @@
           <p:nvPr/>
         </p:nvPicPr>
         <p:blipFill>
-          <a:blip r:embed="rId19">
+          <a:blip r:embed="rId11">
             <a:extLst>
               <a:ext uri="{28A0092B-C50C-407E-A947-70E740481C1C}">
                 <a14:useLocalDpi xmlns:a14="http://schemas.microsoft.com/office/drawing/2010/main" val="0"/>
@@ -29657,13 +32068,13 @@
           <p:nvPr/>
         </p:nvPicPr>
         <p:blipFill>
-          <a:blip r:embed="rId3">
+          <a:blip>
             <a:extLst>
               <a:ext uri="{28A0092B-C50C-407E-A947-70E740481C1C}">
                 <a14:useLocalDpi xmlns:a14="http://schemas.microsoft.com/office/drawing/2010/main" val="0"/>
               </a:ext>
               <a:ext uri="{96DAC541-7B7A-43D3-8B79-37D633B846F1}">
-                <asvg:svgBlip xmlns:asvg="http://schemas.microsoft.com/office/drawing/2016/SVG/main" r:embed="rId4"/>
+                <asvg:svgBlip xmlns:asvg="http://schemas.microsoft.com/office/drawing/2016/SVG/main" r:embed="rId3"/>
               </a:ext>
             </a:extLst>
           </a:blip>
@@ -29777,13 +32188,13 @@
           <p:nvPr/>
         </p:nvPicPr>
         <p:blipFill>
-          <a:blip r:embed="rId17">
+          <a:blip>
             <a:extLst>
               <a:ext uri="{28A0092B-C50C-407E-A947-70E740481C1C}">
                 <a14:useLocalDpi xmlns:a14="http://schemas.microsoft.com/office/drawing/2010/main" val="0"/>
               </a:ext>
               <a:ext uri="{96DAC541-7B7A-43D3-8B79-37D633B846F1}">
-                <asvg:svgBlip xmlns:asvg="http://schemas.microsoft.com/office/drawing/2016/SVG/main" r:embed="rId18"/>
+                <asvg:svgBlip xmlns:asvg="http://schemas.microsoft.com/office/drawing/2016/SVG/main" r:embed="rId10"/>
               </a:ext>
             </a:extLst>
           </a:blip>
@@ -29816,7 +32227,7 @@
           <p:nvPr/>
         </p:nvPicPr>
         <p:blipFill>
-          <a:blip r:embed="rId19">
+          <a:blip r:embed="rId11">
             <a:extLst>
               <a:ext uri="{28A0092B-C50C-407E-A947-70E740481C1C}">
                 <a14:useLocalDpi xmlns:a14="http://schemas.microsoft.com/office/drawing/2010/main" val="0"/>
@@ -30153,13 +32564,13 @@
           <p:nvPr/>
         </p:nvPicPr>
         <p:blipFill>
-          <a:blip r:embed="rId17">
+          <a:blip>
             <a:extLst>
               <a:ext uri="{28A0092B-C50C-407E-A947-70E740481C1C}">
                 <a14:useLocalDpi xmlns:a14="http://schemas.microsoft.com/office/drawing/2010/main" val="0"/>
               </a:ext>
               <a:ext uri="{96DAC541-7B7A-43D3-8B79-37D633B846F1}">
-                <asvg:svgBlip xmlns:asvg="http://schemas.microsoft.com/office/drawing/2016/SVG/main" r:embed="rId18"/>
+                <asvg:svgBlip xmlns:asvg="http://schemas.microsoft.com/office/drawing/2016/SVG/main" r:embed="rId10"/>
               </a:ext>
             </a:extLst>
           </a:blip>
@@ -30551,13 +32962,13 @@
           <p:nvPr/>
         </p:nvPicPr>
         <p:blipFill>
-          <a:blip r:embed="rId3">
+          <a:blip>
             <a:extLst>
               <a:ext uri="{28A0092B-C50C-407E-A947-70E740481C1C}">
                 <a14:useLocalDpi xmlns:a14="http://schemas.microsoft.com/office/drawing/2010/main" val="0"/>
               </a:ext>
               <a:ext uri="{96DAC541-7B7A-43D3-8B79-37D633B846F1}">
-                <asvg:svgBlip xmlns:asvg="http://schemas.microsoft.com/office/drawing/2016/SVG/main" r:embed="rId4"/>
+                <asvg:svgBlip xmlns:asvg="http://schemas.microsoft.com/office/drawing/2016/SVG/main" r:embed="rId3"/>
               </a:ext>
             </a:extLst>
           </a:blip>
@@ -30590,13 +33001,13 @@
           <p:nvPr/>
         </p:nvPicPr>
         <p:blipFill>
-          <a:blip r:embed="rId5">
+          <a:blip>
             <a:extLst>
               <a:ext uri="{28A0092B-C50C-407E-A947-70E740481C1C}">
                 <a14:useLocalDpi xmlns:a14="http://schemas.microsoft.com/office/drawing/2010/main" val="0"/>
               </a:ext>
               <a:ext uri="{96DAC541-7B7A-43D3-8B79-37D633B846F1}">
-                <asvg:svgBlip xmlns:asvg="http://schemas.microsoft.com/office/drawing/2016/SVG/main" r:embed="rId6"/>
+                <asvg:svgBlip xmlns:asvg="http://schemas.microsoft.com/office/drawing/2016/SVG/main" r:embed="rId4"/>
               </a:ext>
             </a:extLst>
           </a:blip>
@@ -31086,13 +33497,13 @@
           <p:nvPr/>
         </p:nvPicPr>
         <p:blipFill>
-          <a:blip r:embed="rId7">
+          <a:blip>
             <a:extLst>
               <a:ext uri="{28A0092B-C50C-407E-A947-70E740481C1C}">
                 <a14:useLocalDpi xmlns:a14="http://schemas.microsoft.com/office/drawing/2010/main" val="0"/>
               </a:ext>
               <a:ext uri="{96DAC541-7B7A-43D3-8B79-37D633B846F1}">
-                <asvg:svgBlip xmlns:asvg="http://schemas.microsoft.com/office/drawing/2016/SVG/main" r:embed="rId8"/>
+                <asvg:svgBlip xmlns:asvg="http://schemas.microsoft.com/office/drawing/2016/SVG/main" r:embed="rId5"/>
               </a:ext>
             </a:extLst>
           </a:blip>
@@ -31145,13 +33556,13 @@
             <p:nvPr/>
           </p:nvPicPr>
           <p:blipFill>
-            <a:blip r:embed="rId9">
+            <a:blip>
               <a:extLst>
                 <a:ext uri="{28A0092B-C50C-407E-A947-70E740481C1C}">
                   <a14:useLocalDpi xmlns:a14="http://schemas.microsoft.com/office/drawing/2010/main" val="0"/>
                 </a:ext>
                 <a:ext uri="{96DAC541-7B7A-43D3-8B79-37D633B846F1}">
-                  <asvg:svgBlip xmlns:asvg="http://schemas.microsoft.com/office/drawing/2016/SVG/main" r:embed="rId10"/>
+                  <asvg:svgBlip xmlns:asvg="http://schemas.microsoft.com/office/drawing/2016/SVG/main" r:embed="rId6"/>
                 </a:ext>
               </a:extLst>
             </a:blip>
@@ -31278,13 +33689,13 @@
             <p:nvPr/>
           </p:nvPicPr>
           <p:blipFill>
-            <a:blip r:embed="rId9">
+            <a:blip>
               <a:extLst>
                 <a:ext uri="{28A0092B-C50C-407E-A947-70E740481C1C}">
                   <a14:useLocalDpi xmlns:a14="http://schemas.microsoft.com/office/drawing/2010/main" val="0"/>
                 </a:ext>
                 <a:ext uri="{96DAC541-7B7A-43D3-8B79-37D633B846F1}">
-                  <asvg:svgBlip xmlns:asvg="http://schemas.microsoft.com/office/drawing/2016/SVG/main" r:embed="rId10"/>
+                  <asvg:svgBlip xmlns:asvg="http://schemas.microsoft.com/office/drawing/2016/SVG/main" r:embed="rId6"/>
                 </a:ext>
               </a:extLst>
             </a:blip>
@@ -31338,13 +33749,13 @@
             <p:nvPr/>
           </p:nvPicPr>
           <p:blipFill>
-            <a:blip r:embed="rId9">
+            <a:blip>
               <a:extLst>
                 <a:ext uri="{28A0092B-C50C-407E-A947-70E740481C1C}">
                   <a14:useLocalDpi xmlns:a14="http://schemas.microsoft.com/office/drawing/2010/main" val="0"/>
                 </a:ext>
                 <a:ext uri="{96DAC541-7B7A-43D3-8B79-37D633B846F1}">
-                  <asvg:svgBlip xmlns:asvg="http://schemas.microsoft.com/office/drawing/2016/SVG/main" r:embed="rId10"/>
+                  <asvg:svgBlip xmlns:asvg="http://schemas.microsoft.com/office/drawing/2016/SVG/main" r:embed="rId6"/>
                 </a:ext>
               </a:extLst>
             </a:blip>
@@ -31489,13 +33900,13 @@
             <p:nvPr/>
           </p:nvPicPr>
           <p:blipFill>
-            <a:blip r:embed="rId11">
+            <a:blip>
               <a:extLst>
                 <a:ext uri="{28A0092B-C50C-407E-A947-70E740481C1C}">
                   <a14:useLocalDpi xmlns:a14="http://schemas.microsoft.com/office/drawing/2010/main" val="0"/>
                 </a:ext>
                 <a:ext uri="{96DAC541-7B7A-43D3-8B79-37D633B846F1}">
-                  <asvg:svgBlip xmlns:asvg="http://schemas.microsoft.com/office/drawing/2016/SVG/main" r:embed="rId12"/>
+                  <asvg:svgBlip xmlns:asvg="http://schemas.microsoft.com/office/drawing/2016/SVG/main" r:embed="rId7"/>
                 </a:ext>
               </a:extLst>
             </a:blip>
@@ -31528,13 +33939,13 @@
             <p:nvPr/>
           </p:nvPicPr>
           <p:blipFill>
-            <a:blip r:embed="rId13">
+            <a:blip>
               <a:extLst>
                 <a:ext uri="{28A0092B-C50C-407E-A947-70E740481C1C}">
                   <a14:useLocalDpi xmlns:a14="http://schemas.microsoft.com/office/drawing/2010/main" val="0"/>
                 </a:ext>
                 <a:ext uri="{96DAC541-7B7A-43D3-8B79-37D633B846F1}">
-                  <asvg:svgBlip xmlns:asvg="http://schemas.microsoft.com/office/drawing/2016/SVG/main" r:embed="rId14"/>
+                  <asvg:svgBlip xmlns:asvg="http://schemas.microsoft.com/office/drawing/2016/SVG/main" r:embed="rId8"/>
                 </a:ext>
               </a:extLst>
             </a:blip>
@@ -31634,13 +34045,13 @@
             <p:nvPr/>
           </p:nvPicPr>
           <p:blipFill>
-            <a:blip r:embed="rId11">
+            <a:blip>
               <a:extLst>
                 <a:ext uri="{28A0092B-C50C-407E-A947-70E740481C1C}">
                   <a14:useLocalDpi xmlns:a14="http://schemas.microsoft.com/office/drawing/2010/main" val="0"/>
                 </a:ext>
                 <a:ext uri="{96DAC541-7B7A-43D3-8B79-37D633B846F1}">
-                  <asvg:svgBlip xmlns:asvg="http://schemas.microsoft.com/office/drawing/2016/SVG/main" r:embed="rId12"/>
+                  <asvg:svgBlip xmlns:asvg="http://schemas.microsoft.com/office/drawing/2016/SVG/main" r:embed="rId7"/>
                 </a:ext>
               </a:extLst>
             </a:blip>
@@ -31673,13 +34084,13 @@
             <p:nvPr/>
           </p:nvPicPr>
           <p:blipFill>
-            <a:blip r:embed="rId13">
+            <a:blip>
               <a:extLst>
                 <a:ext uri="{28A0092B-C50C-407E-A947-70E740481C1C}">
                   <a14:useLocalDpi xmlns:a14="http://schemas.microsoft.com/office/drawing/2010/main" val="0"/>
                 </a:ext>
                 <a:ext uri="{96DAC541-7B7A-43D3-8B79-37D633B846F1}">
-                  <asvg:svgBlip xmlns:asvg="http://schemas.microsoft.com/office/drawing/2016/SVG/main" r:embed="rId14"/>
+                  <asvg:svgBlip xmlns:asvg="http://schemas.microsoft.com/office/drawing/2016/SVG/main" r:embed="rId8"/>
                 </a:ext>
               </a:extLst>
             </a:blip>
@@ -31779,13 +34190,13 @@
             <p:nvPr/>
           </p:nvPicPr>
           <p:blipFill>
-            <a:blip r:embed="rId11">
+            <a:blip>
               <a:extLst>
                 <a:ext uri="{28A0092B-C50C-407E-A947-70E740481C1C}">
                   <a14:useLocalDpi xmlns:a14="http://schemas.microsoft.com/office/drawing/2010/main" val="0"/>
                 </a:ext>
                 <a:ext uri="{96DAC541-7B7A-43D3-8B79-37D633B846F1}">
-                  <asvg:svgBlip xmlns:asvg="http://schemas.microsoft.com/office/drawing/2016/SVG/main" r:embed="rId12"/>
+                  <asvg:svgBlip xmlns:asvg="http://schemas.microsoft.com/office/drawing/2016/SVG/main" r:embed="rId7"/>
                 </a:ext>
               </a:extLst>
             </a:blip>
@@ -31818,13 +34229,13 @@
             <p:nvPr/>
           </p:nvPicPr>
           <p:blipFill>
-            <a:blip r:embed="rId13">
+            <a:blip>
               <a:extLst>
                 <a:ext uri="{28A0092B-C50C-407E-A947-70E740481C1C}">
                   <a14:useLocalDpi xmlns:a14="http://schemas.microsoft.com/office/drawing/2010/main" val="0"/>
                 </a:ext>
                 <a:ext uri="{96DAC541-7B7A-43D3-8B79-37D633B846F1}">
-                  <asvg:svgBlip xmlns:asvg="http://schemas.microsoft.com/office/drawing/2016/SVG/main" r:embed="rId14"/>
+                  <asvg:svgBlip xmlns:asvg="http://schemas.microsoft.com/office/drawing/2016/SVG/main" r:embed="rId8"/>
                 </a:ext>
               </a:extLst>
             </a:blip>
@@ -32110,7 +34521,7 @@
           <p:nvPr/>
         </p:nvPicPr>
         <p:blipFill rotWithShape="1">
-          <a:blip r:embed="rId15">
+          <a:blip>
             <a:duotone>
               <a:schemeClr val="accent1">
                 <a:shade val="45000"/>
@@ -32123,7 +34534,7 @@
                 <a14:useLocalDpi xmlns:a14="http://schemas.microsoft.com/office/drawing/2010/main" val="0"/>
               </a:ext>
               <a:ext uri="{96DAC541-7B7A-43D3-8B79-37D633B846F1}">
-                <asvg:svgBlip xmlns:asvg="http://schemas.microsoft.com/office/drawing/2016/SVG/main" r:embed="rId16"/>
+                <asvg:svgBlip xmlns:asvg="http://schemas.microsoft.com/office/drawing/2016/SVG/main" r:embed="rId9"/>
               </a:ext>
             </a:extLst>
           </a:blip>
@@ -32333,7 +34744,7 @@
           <p:nvPr/>
         </p:nvPicPr>
         <p:blipFill rotWithShape="1">
-          <a:blip r:embed="rId15">
+          <a:blip>
             <a:duotone>
               <a:schemeClr val="accent2">
                 <a:shade val="45000"/>
@@ -32346,7 +34757,7 @@
                 <a14:useLocalDpi xmlns:a14="http://schemas.microsoft.com/office/drawing/2010/main" val="0"/>
               </a:ext>
               <a:ext uri="{96DAC541-7B7A-43D3-8B79-37D633B846F1}">
-                <asvg:svgBlip xmlns:asvg="http://schemas.microsoft.com/office/drawing/2016/SVG/main" r:embed="rId16"/>
+                <asvg:svgBlip xmlns:asvg="http://schemas.microsoft.com/office/drawing/2016/SVG/main" r:embed="rId9"/>
               </a:ext>
             </a:extLst>
           </a:blip>
@@ -32470,7 +34881,7 @@
           <p:nvPr/>
         </p:nvPicPr>
         <p:blipFill rotWithShape="1">
-          <a:blip r:embed="rId15">
+          <a:blip>
             <a:duotone>
               <a:schemeClr val="bg2">
                 <a:shade val="45000"/>
@@ -32483,7 +34894,7 @@
                 <a14:useLocalDpi xmlns:a14="http://schemas.microsoft.com/office/drawing/2010/main" val="0"/>
               </a:ext>
               <a:ext uri="{96DAC541-7B7A-43D3-8B79-37D633B846F1}">
-                <asvg:svgBlip xmlns:asvg="http://schemas.microsoft.com/office/drawing/2016/SVG/main" r:embed="rId16"/>
+                <asvg:svgBlip xmlns:asvg="http://schemas.microsoft.com/office/drawing/2016/SVG/main" r:embed="rId9"/>
               </a:ext>
             </a:extLst>
           </a:blip>
@@ -33293,13 +35704,13 @@
           <p:nvPr/>
         </p:nvPicPr>
         <p:blipFill>
-          <a:blip r:embed="rId17">
+          <a:blip>
             <a:extLst>
               <a:ext uri="{28A0092B-C50C-407E-A947-70E740481C1C}">
                 <a14:useLocalDpi xmlns:a14="http://schemas.microsoft.com/office/drawing/2010/main" val="0"/>
               </a:ext>
               <a:ext uri="{96DAC541-7B7A-43D3-8B79-37D633B846F1}">
-                <asvg:svgBlip xmlns:asvg="http://schemas.microsoft.com/office/drawing/2016/SVG/main" r:embed="rId18"/>
+                <asvg:svgBlip xmlns:asvg="http://schemas.microsoft.com/office/drawing/2016/SVG/main" r:embed="rId10"/>
               </a:ext>
             </a:extLst>
           </a:blip>
@@ -33428,13 +35839,13 @@
           <p:nvPr/>
         </p:nvPicPr>
         <p:blipFill>
-          <a:blip r:embed="rId17">
+          <a:blip>
             <a:extLst>
               <a:ext uri="{28A0092B-C50C-407E-A947-70E740481C1C}">
                 <a14:useLocalDpi xmlns:a14="http://schemas.microsoft.com/office/drawing/2010/main" val="0"/>
               </a:ext>
               <a:ext uri="{96DAC541-7B7A-43D3-8B79-37D633B846F1}">
-                <asvg:svgBlip xmlns:asvg="http://schemas.microsoft.com/office/drawing/2016/SVG/main" r:embed="rId18"/>
+                <asvg:svgBlip xmlns:asvg="http://schemas.microsoft.com/office/drawing/2016/SVG/main" r:embed="rId10"/>
               </a:ext>
             </a:extLst>
           </a:blip>
@@ -33467,7 +35878,7 @@
           <p:nvPr/>
         </p:nvPicPr>
         <p:blipFill>
-          <a:blip r:embed="rId19">
+          <a:blip r:embed="rId11">
             <a:extLst>
               <a:ext uri="{28A0092B-C50C-407E-A947-70E740481C1C}">
                 <a14:useLocalDpi xmlns:a14="http://schemas.microsoft.com/office/drawing/2010/main" val="0"/>
@@ -33644,7 +36055,7 @@
           <p:nvPr/>
         </p:nvPicPr>
         <p:blipFill>
-          <a:blip r:embed="rId19">
+          <a:blip r:embed="rId11">
             <a:extLst>
               <a:ext uri="{28A0092B-C50C-407E-A947-70E740481C1C}">
                 <a14:useLocalDpi xmlns:a14="http://schemas.microsoft.com/office/drawing/2010/main" val="0"/>
@@ -34288,13 +36699,13 @@
           <p:nvPr/>
         </p:nvPicPr>
         <p:blipFill>
-          <a:blip r:embed="rId17">
+          <a:blip>
             <a:extLst>
               <a:ext uri="{28A0092B-C50C-407E-A947-70E740481C1C}">
                 <a14:useLocalDpi xmlns:a14="http://schemas.microsoft.com/office/drawing/2010/main" val="0"/>
               </a:ext>
               <a:ext uri="{96DAC541-7B7A-43D3-8B79-37D633B846F1}">
-                <asvg:svgBlip xmlns:asvg="http://schemas.microsoft.com/office/drawing/2016/SVG/main" r:embed="rId18"/>
+                <asvg:svgBlip xmlns:asvg="http://schemas.microsoft.com/office/drawing/2016/SVG/main" r:embed="rId10"/>
               </a:ext>
             </a:extLst>
           </a:blip>
@@ -34630,7 +37041,7 @@
           <p:nvPr/>
         </p:nvPicPr>
         <p:blipFill rotWithShape="1">
-          <a:blip r:embed="rId15">
+          <a:blip>
             <a:duotone>
               <a:schemeClr val="accent2">
                 <a:shade val="45000"/>
@@ -34643,7 +37054,7 @@
                 <a14:useLocalDpi xmlns:a14="http://schemas.microsoft.com/office/drawing/2010/main" val="0"/>
               </a:ext>
               <a:ext uri="{96DAC541-7B7A-43D3-8B79-37D633B846F1}">
-                <asvg:svgBlip xmlns:asvg="http://schemas.microsoft.com/office/drawing/2016/SVG/main" r:embed="rId16"/>
+                <asvg:svgBlip xmlns:asvg="http://schemas.microsoft.com/office/drawing/2016/SVG/main" r:embed="rId9"/>
               </a:ext>
             </a:extLst>
           </a:blip>
@@ -35116,13 +37527,13 @@
           <p:nvPr/>
         </p:nvPicPr>
         <p:blipFill>
-          <a:blip r:embed="rId2">
+          <a:blip>
             <a:extLst>
               <a:ext uri="{28A0092B-C50C-407E-A947-70E740481C1C}">
                 <a14:useLocalDpi xmlns:a14="http://schemas.microsoft.com/office/drawing/2010/main" val="0"/>
               </a:ext>
               <a:ext uri="{96DAC541-7B7A-43D3-8B79-37D633B846F1}">
-                <asvg:svgBlip xmlns:asvg="http://schemas.microsoft.com/office/drawing/2016/SVG/main" r:embed="rId3"/>
+                <asvg:svgBlip xmlns:asvg="http://schemas.microsoft.com/office/drawing/2016/SVG/main" r:embed="rId2"/>
               </a:ext>
             </a:extLst>
           </a:blip>
@@ -35155,13 +37566,13 @@
           <p:nvPr/>
         </p:nvPicPr>
         <p:blipFill>
-          <a:blip r:embed="rId4">
+          <a:blip>
             <a:extLst>
               <a:ext uri="{28A0092B-C50C-407E-A947-70E740481C1C}">
                 <a14:useLocalDpi xmlns:a14="http://schemas.microsoft.com/office/drawing/2010/main" val="0"/>
               </a:ext>
               <a:ext uri="{96DAC541-7B7A-43D3-8B79-37D633B846F1}">
-                <asvg:svgBlip xmlns:asvg="http://schemas.microsoft.com/office/drawing/2016/SVG/main" r:embed="rId5"/>
+                <asvg:svgBlip xmlns:asvg="http://schemas.microsoft.com/office/drawing/2016/SVG/main" r:embed="rId3"/>
               </a:ext>
             </a:extLst>
           </a:blip>
@@ -35651,13 +38062,13 @@
           <p:nvPr/>
         </p:nvPicPr>
         <p:blipFill>
-          <a:blip r:embed="rId6">
+          <a:blip>
             <a:extLst>
               <a:ext uri="{28A0092B-C50C-407E-A947-70E740481C1C}">
                 <a14:useLocalDpi xmlns:a14="http://schemas.microsoft.com/office/drawing/2010/main" val="0"/>
               </a:ext>
               <a:ext uri="{96DAC541-7B7A-43D3-8B79-37D633B846F1}">
-                <asvg:svgBlip xmlns:asvg="http://schemas.microsoft.com/office/drawing/2016/SVG/main" r:embed="rId7"/>
+                <asvg:svgBlip xmlns:asvg="http://schemas.microsoft.com/office/drawing/2016/SVG/main" r:embed="rId4"/>
               </a:ext>
             </a:extLst>
           </a:blip>
@@ -35690,7 +38101,7 @@
           <p:nvPr/>
         </p:nvPicPr>
         <p:blipFill rotWithShape="1">
-          <a:blip r:embed="rId8">
+          <a:blip>
             <a:duotone>
               <a:schemeClr val="accent1">
                 <a:shade val="45000"/>
@@ -35703,7 +38114,7 @@
                 <a14:useLocalDpi xmlns:a14="http://schemas.microsoft.com/office/drawing/2010/main" val="0"/>
               </a:ext>
               <a:ext uri="{96DAC541-7B7A-43D3-8B79-37D633B846F1}">
-                <asvg:svgBlip xmlns:asvg="http://schemas.microsoft.com/office/drawing/2016/SVG/main" r:embed="rId9"/>
+                <asvg:svgBlip xmlns:asvg="http://schemas.microsoft.com/office/drawing/2016/SVG/main" r:embed="rId5"/>
               </a:ext>
             </a:extLst>
           </a:blip>
@@ -35735,7 +38146,7 @@
           <p:nvPr/>
         </p:nvPicPr>
         <p:blipFill rotWithShape="1">
-          <a:blip r:embed="rId8">
+          <a:blip>
             <a:duotone>
               <a:schemeClr val="accent2">
                 <a:shade val="45000"/>
@@ -35748,7 +38159,7 @@
                 <a14:useLocalDpi xmlns:a14="http://schemas.microsoft.com/office/drawing/2010/main" val="0"/>
               </a:ext>
               <a:ext uri="{96DAC541-7B7A-43D3-8B79-37D633B846F1}">
-                <asvg:svgBlip xmlns:asvg="http://schemas.microsoft.com/office/drawing/2016/SVG/main" r:embed="rId9"/>
+                <asvg:svgBlip xmlns:asvg="http://schemas.microsoft.com/office/drawing/2016/SVG/main" r:embed="rId5"/>
               </a:ext>
             </a:extLst>
           </a:blip>
@@ -35825,7 +38236,7 @@
           <p:nvPr/>
         </p:nvPicPr>
         <p:blipFill rotWithShape="1">
-          <a:blip r:embed="rId8">
+          <a:blip>
             <a:duotone>
               <a:schemeClr val="bg2">
                 <a:shade val="45000"/>
@@ -35838,7 +38249,7 @@
                 <a14:useLocalDpi xmlns:a14="http://schemas.microsoft.com/office/drawing/2010/main" val="0"/>
               </a:ext>
               <a:ext uri="{96DAC541-7B7A-43D3-8B79-37D633B846F1}">
-                <asvg:svgBlip xmlns:asvg="http://schemas.microsoft.com/office/drawing/2016/SVG/main" r:embed="rId9"/>
+                <asvg:svgBlip xmlns:asvg="http://schemas.microsoft.com/office/drawing/2016/SVG/main" r:embed="rId5"/>
               </a:ext>
             </a:extLst>
           </a:blip>
@@ -36681,7 +39092,7 @@
           <p:nvPr/>
         </p:nvPicPr>
         <p:blipFill rotWithShape="1">
-          <a:blip r:embed="rId8">
+          <a:blip>
             <a:duotone>
               <a:schemeClr val="accent2">
                 <a:shade val="45000"/>
@@ -36694,7 +39105,7 @@
                 <a14:useLocalDpi xmlns:a14="http://schemas.microsoft.com/office/drawing/2010/main" val="0"/>
               </a:ext>
               <a:ext uri="{96DAC541-7B7A-43D3-8B79-37D633B846F1}">
-                <asvg:svgBlip xmlns:asvg="http://schemas.microsoft.com/office/drawing/2016/SVG/main" r:embed="rId9"/>
+                <asvg:svgBlip xmlns:asvg="http://schemas.microsoft.com/office/drawing/2016/SVG/main" r:embed="rId5"/>
               </a:ext>
             </a:extLst>
           </a:blip>
@@ -37156,13 +39567,13 @@
             <p:nvPr/>
           </p:nvPicPr>
           <p:blipFill>
-            <a:blip r:embed="rId10">
+            <a:blip>
               <a:extLst>
                 <a:ext uri="{28A0092B-C50C-407E-A947-70E740481C1C}">
                   <a14:useLocalDpi xmlns:a14="http://schemas.microsoft.com/office/drawing/2010/main" val="0"/>
                 </a:ext>
                 <a:ext uri="{96DAC541-7B7A-43D3-8B79-37D633B846F1}">
-                  <asvg:svgBlip xmlns:asvg="http://schemas.microsoft.com/office/drawing/2016/SVG/main" r:embed="rId11"/>
+                  <asvg:svgBlip xmlns:asvg="http://schemas.microsoft.com/office/drawing/2016/SVG/main" r:embed="rId6"/>
                 </a:ext>
               </a:extLst>
             </a:blip>
@@ -37288,13 +39699,13 @@
             <p:nvPr/>
           </p:nvPicPr>
           <p:blipFill>
-            <a:blip r:embed="rId10">
+            <a:blip>
               <a:extLst>
                 <a:ext uri="{28A0092B-C50C-407E-A947-70E740481C1C}">
                   <a14:useLocalDpi xmlns:a14="http://schemas.microsoft.com/office/drawing/2010/main" val="0"/>
                 </a:ext>
                 <a:ext uri="{96DAC541-7B7A-43D3-8B79-37D633B846F1}">
-                  <asvg:svgBlip xmlns:asvg="http://schemas.microsoft.com/office/drawing/2016/SVG/main" r:embed="rId11"/>
+                  <asvg:svgBlip xmlns:asvg="http://schemas.microsoft.com/office/drawing/2016/SVG/main" r:embed="rId6"/>
                 </a:ext>
               </a:extLst>
             </a:blip>
@@ -37348,13 +39759,13 @@
             <p:nvPr/>
           </p:nvPicPr>
           <p:blipFill>
-            <a:blip r:embed="rId10">
+            <a:blip>
               <a:extLst>
                 <a:ext uri="{28A0092B-C50C-407E-A947-70E740481C1C}">
                   <a14:useLocalDpi xmlns:a14="http://schemas.microsoft.com/office/drawing/2010/main" val="0"/>
                 </a:ext>
                 <a:ext uri="{96DAC541-7B7A-43D3-8B79-37D633B846F1}">
-                  <asvg:svgBlip xmlns:asvg="http://schemas.microsoft.com/office/drawing/2016/SVG/main" r:embed="rId11"/>
+                  <asvg:svgBlip xmlns:asvg="http://schemas.microsoft.com/office/drawing/2016/SVG/main" r:embed="rId6"/>
                 </a:ext>
               </a:extLst>
             </a:blip>
@@ -37453,13 +39864,13 @@
             <p:nvPr/>
           </p:nvPicPr>
           <p:blipFill>
-            <a:blip r:embed="rId10">
+            <a:blip>
               <a:extLst>
                 <a:ext uri="{28A0092B-C50C-407E-A947-70E740481C1C}">
                   <a14:useLocalDpi xmlns:a14="http://schemas.microsoft.com/office/drawing/2010/main" val="0"/>
                 </a:ext>
                 <a:ext uri="{96DAC541-7B7A-43D3-8B79-37D633B846F1}">
-                  <asvg:svgBlip xmlns:asvg="http://schemas.microsoft.com/office/drawing/2016/SVG/main" r:embed="rId11"/>
+                  <asvg:svgBlip xmlns:asvg="http://schemas.microsoft.com/office/drawing/2016/SVG/main" r:embed="rId6"/>
                 </a:ext>
               </a:extLst>
             </a:blip>
@@ -37595,13 +40006,13 @@
             <p:nvPr/>
           </p:nvPicPr>
           <p:blipFill>
-            <a:blip r:embed="rId12">
+            <a:blip>
               <a:extLst>
                 <a:ext uri="{28A0092B-C50C-407E-A947-70E740481C1C}">
                   <a14:useLocalDpi xmlns:a14="http://schemas.microsoft.com/office/drawing/2010/main" val="0"/>
                 </a:ext>
                 <a:ext uri="{96DAC541-7B7A-43D3-8B79-37D633B846F1}">
-                  <asvg:svgBlip xmlns:asvg="http://schemas.microsoft.com/office/drawing/2016/SVG/main" r:embed="rId13"/>
+                  <asvg:svgBlip xmlns:asvg="http://schemas.microsoft.com/office/drawing/2016/SVG/main" r:embed="rId7"/>
                 </a:ext>
               </a:extLst>
             </a:blip>
@@ -37634,13 +40045,13 @@
             <p:nvPr/>
           </p:nvPicPr>
           <p:blipFill>
-            <a:blip r:embed="rId14">
+            <a:blip>
               <a:extLst>
                 <a:ext uri="{28A0092B-C50C-407E-A947-70E740481C1C}">
                   <a14:useLocalDpi xmlns:a14="http://schemas.microsoft.com/office/drawing/2010/main" val="0"/>
                 </a:ext>
                 <a:ext uri="{96DAC541-7B7A-43D3-8B79-37D633B846F1}">
-                  <asvg:svgBlip xmlns:asvg="http://schemas.microsoft.com/office/drawing/2016/SVG/main" r:embed="rId15"/>
+                  <asvg:svgBlip xmlns:asvg="http://schemas.microsoft.com/office/drawing/2016/SVG/main" r:embed="rId8"/>
                 </a:ext>
               </a:extLst>
             </a:blip>
@@ -37740,13 +40151,13 @@
             <p:nvPr/>
           </p:nvPicPr>
           <p:blipFill>
-            <a:blip r:embed="rId12">
+            <a:blip>
               <a:extLst>
                 <a:ext uri="{28A0092B-C50C-407E-A947-70E740481C1C}">
                   <a14:useLocalDpi xmlns:a14="http://schemas.microsoft.com/office/drawing/2010/main" val="0"/>
                 </a:ext>
                 <a:ext uri="{96DAC541-7B7A-43D3-8B79-37D633B846F1}">
-                  <asvg:svgBlip xmlns:asvg="http://schemas.microsoft.com/office/drawing/2016/SVG/main" r:embed="rId13"/>
+                  <asvg:svgBlip xmlns:asvg="http://schemas.microsoft.com/office/drawing/2016/SVG/main" r:embed="rId7"/>
                 </a:ext>
               </a:extLst>
             </a:blip>
@@ -37779,13 +40190,13 @@
             <p:nvPr/>
           </p:nvPicPr>
           <p:blipFill>
-            <a:blip r:embed="rId14">
+            <a:blip>
               <a:extLst>
                 <a:ext uri="{28A0092B-C50C-407E-A947-70E740481C1C}">
                   <a14:useLocalDpi xmlns:a14="http://schemas.microsoft.com/office/drawing/2010/main" val="0"/>
                 </a:ext>
                 <a:ext uri="{96DAC541-7B7A-43D3-8B79-37D633B846F1}">
-                  <asvg:svgBlip xmlns:asvg="http://schemas.microsoft.com/office/drawing/2016/SVG/main" r:embed="rId15"/>
+                  <asvg:svgBlip xmlns:asvg="http://schemas.microsoft.com/office/drawing/2016/SVG/main" r:embed="rId8"/>
                 </a:ext>
               </a:extLst>
             </a:blip>
@@ -37885,13 +40296,13 @@
             <p:nvPr/>
           </p:nvPicPr>
           <p:blipFill>
-            <a:blip r:embed="rId12">
+            <a:blip>
               <a:extLst>
                 <a:ext uri="{28A0092B-C50C-407E-A947-70E740481C1C}">
                   <a14:useLocalDpi xmlns:a14="http://schemas.microsoft.com/office/drawing/2010/main" val="0"/>
                 </a:ext>
                 <a:ext uri="{96DAC541-7B7A-43D3-8B79-37D633B846F1}">
-                  <asvg:svgBlip xmlns:asvg="http://schemas.microsoft.com/office/drawing/2016/SVG/main" r:embed="rId13"/>
+                  <asvg:svgBlip xmlns:asvg="http://schemas.microsoft.com/office/drawing/2016/SVG/main" r:embed="rId7"/>
                 </a:ext>
               </a:extLst>
             </a:blip>
@@ -37924,13 +40335,13 @@
             <p:nvPr/>
           </p:nvPicPr>
           <p:blipFill>
-            <a:blip r:embed="rId14">
+            <a:blip>
               <a:extLst>
                 <a:ext uri="{28A0092B-C50C-407E-A947-70E740481C1C}">
                   <a14:useLocalDpi xmlns:a14="http://schemas.microsoft.com/office/drawing/2010/main" val="0"/>
                 </a:ext>
                 <a:ext uri="{96DAC541-7B7A-43D3-8B79-37D633B846F1}">
-                  <asvg:svgBlip xmlns:asvg="http://schemas.microsoft.com/office/drawing/2016/SVG/main" r:embed="rId15"/>
+                  <asvg:svgBlip xmlns:asvg="http://schemas.microsoft.com/office/drawing/2016/SVG/main" r:embed="rId8"/>
                 </a:ext>
               </a:extLst>
             </a:blip>
@@ -38122,13 +40533,13 @@
             <p:nvPr/>
           </p:nvPicPr>
           <p:blipFill>
-            <a:blip r:embed="rId12">
+            <a:blip>
               <a:extLst>
                 <a:ext uri="{28A0092B-C50C-407E-A947-70E740481C1C}">
                   <a14:useLocalDpi xmlns:a14="http://schemas.microsoft.com/office/drawing/2010/main" val="0"/>
                 </a:ext>
                 <a:ext uri="{96DAC541-7B7A-43D3-8B79-37D633B846F1}">
-                  <asvg:svgBlip xmlns:asvg="http://schemas.microsoft.com/office/drawing/2016/SVG/main" r:embed="rId13"/>
+                  <asvg:svgBlip xmlns:asvg="http://schemas.microsoft.com/office/drawing/2016/SVG/main" r:embed="rId7"/>
                 </a:ext>
               </a:extLst>
             </a:blip>
@@ -38161,13 +40572,13 @@
             <p:nvPr/>
           </p:nvPicPr>
           <p:blipFill>
-            <a:blip r:embed="rId14">
+            <a:blip>
               <a:extLst>
                 <a:ext uri="{28A0092B-C50C-407E-A947-70E740481C1C}">
                   <a14:useLocalDpi xmlns:a14="http://schemas.microsoft.com/office/drawing/2010/main" val="0"/>
                 </a:ext>
                 <a:ext uri="{96DAC541-7B7A-43D3-8B79-37D633B846F1}">
-                  <asvg:svgBlip xmlns:asvg="http://schemas.microsoft.com/office/drawing/2016/SVG/main" r:embed="rId15"/>
+                  <asvg:svgBlip xmlns:asvg="http://schemas.microsoft.com/office/drawing/2016/SVG/main" r:embed="rId8"/>
                 </a:ext>
               </a:extLst>
             </a:blip>
@@ -38267,13 +40678,13 @@
             <p:nvPr/>
           </p:nvPicPr>
           <p:blipFill>
-            <a:blip r:embed="rId12">
+            <a:blip>
               <a:extLst>
                 <a:ext uri="{28A0092B-C50C-407E-A947-70E740481C1C}">
                   <a14:useLocalDpi xmlns:a14="http://schemas.microsoft.com/office/drawing/2010/main" val="0"/>
                 </a:ext>
                 <a:ext uri="{96DAC541-7B7A-43D3-8B79-37D633B846F1}">
-                  <asvg:svgBlip xmlns:asvg="http://schemas.microsoft.com/office/drawing/2016/SVG/main" r:embed="rId13"/>
+                  <asvg:svgBlip xmlns:asvg="http://schemas.microsoft.com/office/drawing/2016/SVG/main" r:embed="rId7"/>
                 </a:ext>
               </a:extLst>
             </a:blip>
@@ -38306,13 +40717,13 @@
             <p:nvPr/>
           </p:nvPicPr>
           <p:blipFill>
-            <a:blip r:embed="rId14">
+            <a:blip>
               <a:extLst>
                 <a:ext uri="{28A0092B-C50C-407E-A947-70E740481C1C}">
                   <a14:useLocalDpi xmlns:a14="http://schemas.microsoft.com/office/drawing/2010/main" val="0"/>
                 </a:ext>
                 <a:ext uri="{96DAC541-7B7A-43D3-8B79-37D633B846F1}">
-                  <asvg:svgBlip xmlns:asvg="http://schemas.microsoft.com/office/drawing/2016/SVG/main" r:embed="rId15"/>
+                  <asvg:svgBlip xmlns:asvg="http://schemas.microsoft.com/office/drawing/2016/SVG/main" r:embed="rId8"/>
                 </a:ext>
               </a:extLst>
             </a:blip>
@@ -38412,13 +40823,13 @@
             <p:nvPr/>
           </p:nvPicPr>
           <p:blipFill>
-            <a:blip r:embed="rId12">
+            <a:blip>
               <a:extLst>
                 <a:ext uri="{28A0092B-C50C-407E-A947-70E740481C1C}">
                   <a14:useLocalDpi xmlns:a14="http://schemas.microsoft.com/office/drawing/2010/main" val="0"/>
                 </a:ext>
                 <a:ext uri="{96DAC541-7B7A-43D3-8B79-37D633B846F1}">
-                  <asvg:svgBlip xmlns:asvg="http://schemas.microsoft.com/office/drawing/2016/SVG/main" r:embed="rId13"/>
+                  <asvg:svgBlip xmlns:asvg="http://schemas.microsoft.com/office/drawing/2016/SVG/main" r:embed="rId7"/>
                 </a:ext>
               </a:extLst>
             </a:blip>
@@ -38451,13 +40862,13 @@
             <p:nvPr/>
           </p:nvPicPr>
           <p:blipFill>
-            <a:blip r:embed="rId14">
+            <a:blip>
               <a:extLst>
                 <a:ext uri="{28A0092B-C50C-407E-A947-70E740481C1C}">
                   <a14:useLocalDpi xmlns:a14="http://schemas.microsoft.com/office/drawing/2010/main" val="0"/>
                 </a:ext>
                 <a:ext uri="{96DAC541-7B7A-43D3-8B79-37D633B846F1}">
-                  <asvg:svgBlip xmlns:asvg="http://schemas.microsoft.com/office/drawing/2016/SVG/main" r:embed="rId15"/>
+                  <asvg:svgBlip xmlns:asvg="http://schemas.microsoft.com/office/drawing/2016/SVG/main" r:embed="rId8"/>
                 </a:ext>
               </a:extLst>
             </a:blip>
@@ -39141,13 +41552,13 @@
           <p:nvPr/>
         </p:nvPicPr>
         <p:blipFill>
-          <a:blip r:embed="rId16">
+          <a:blip>
             <a:extLst>
               <a:ext uri="{28A0092B-C50C-407E-A947-70E740481C1C}">
                 <a14:useLocalDpi xmlns:a14="http://schemas.microsoft.com/office/drawing/2010/main" val="0"/>
               </a:ext>
               <a:ext uri="{96DAC541-7B7A-43D3-8B79-37D633B846F1}">
-                <asvg:svgBlip xmlns:asvg="http://schemas.microsoft.com/office/drawing/2016/SVG/main" r:embed="rId17"/>
+                <asvg:svgBlip xmlns:asvg="http://schemas.microsoft.com/office/drawing/2016/SVG/main" r:embed="rId9"/>
               </a:ext>
             </a:extLst>
           </a:blip>
@@ -39234,13 +41645,13 @@
           <p:nvPr/>
         </p:nvPicPr>
         <p:blipFill>
-          <a:blip r:embed="rId16">
+          <a:blip>
             <a:extLst>
               <a:ext uri="{28A0092B-C50C-407E-A947-70E740481C1C}">
                 <a14:useLocalDpi xmlns:a14="http://schemas.microsoft.com/office/drawing/2010/main" val="0"/>
               </a:ext>
               <a:ext uri="{96DAC541-7B7A-43D3-8B79-37D633B846F1}">
-                <asvg:svgBlip xmlns:asvg="http://schemas.microsoft.com/office/drawing/2016/SVG/main" r:embed="rId17"/>
+                <asvg:svgBlip xmlns:asvg="http://schemas.microsoft.com/office/drawing/2016/SVG/main" r:embed="rId9"/>
               </a:ext>
             </a:extLst>
           </a:blip>
@@ -39273,7 +41684,7 @@
           <p:nvPr/>
         </p:nvPicPr>
         <p:blipFill>
-          <a:blip r:embed="rId18">
+          <a:blip r:embed="rId10">
             <a:extLst>
               <a:ext uri="{28A0092B-C50C-407E-A947-70E740481C1C}">
                 <a14:useLocalDpi xmlns:a14="http://schemas.microsoft.com/office/drawing/2010/main" val="0"/>
@@ -39490,13 +41901,13 @@
           <p:nvPr/>
         </p:nvPicPr>
         <p:blipFill>
-          <a:blip r:embed="rId16">
+          <a:blip>
             <a:extLst>
               <a:ext uri="{28A0092B-C50C-407E-A947-70E740481C1C}">
                 <a14:useLocalDpi xmlns:a14="http://schemas.microsoft.com/office/drawing/2010/main" val="0"/>
               </a:ext>
               <a:ext uri="{96DAC541-7B7A-43D3-8B79-37D633B846F1}">
-                <asvg:svgBlip xmlns:asvg="http://schemas.microsoft.com/office/drawing/2016/SVG/main" r:embed="rId17"/>
+                <asvg:svgBlip xmlns:asvg="http://schemas.microsoft.com/office/drawing/2016/SVG/main" r:embed="rId9"/>
               </a:ext>
             </a:extLst>
           </a:blip>
@@ -39569,13 +41980,13 @@
           <p:nvPr/>
         </p:nvPicPr>
         <p:blipFill>
-          <a:blip r:embed="rId16">
+          <a:blip>
             <a:extLst>
               <a:ext uri="{28A0092B-C50C-407E-A947-70E740481C1C}">
                 <a14:useLocalDpi xmlns:a14="http://schemas.microsoft.com/office/drawing/2010/main" val="0"/>
               </a:ext>
               <a:ext uri="{96DAC541-7B7A-43D3-8B79-37D633B846F1}">
-                <asvg:svgBlip xmlns:asvg="http://schemas.microsoft.com/office/drawing/2016/SVG/main" r:embed="rId17"/>
+                <asvg:svgBlip xmlns:asvg="http://schemas.microsoft.com/office/drawing/2016/SVG/main" r:embed="rId9"/>
               </a:ext>
             </a:extLst>
           </a:blip>
@@ -39608,7 +42019,7 @@
           <p:nvPr/>
         </p:nvPicPr>
         <p:blipFill>
-          <a:blip r:embed="rId18">
+          <a:blip r:embed="rId10">
             <a:extLst>
               <a:ext uri="{28A0092B-C50C-407E-A947-70E740481C1C}">
                 <a14:useLocalDpi xmlns:a14="http://schemas.microsoft.com/office/drawing/2010/main" val="0"/>
@@ -39865,13 +42276,13 @@
           <p:nvPr/>
         </p:nvPicPr>
         <p:blipFill>
-          <a:blip r:embed="rId16">
+          <a:blip>
             <a:extLst>
               <a:ext uri="{28A0092B-C50C-407E-A947-70E740481C1C}">
                 <a14:useLocalDpi xmlns:a14="http://schemas.microsoft.com/office/drawing/2010/main" val="0"/>
               </a:ext>
               <a:ext uri="{96DAC541-7B7A-43D3-8B79-37D633B846F1}">
-                <asvg:svgBlip xmlns:asvg="http://schemas.microsoft.com/office/drawing/2016/SVG/main" r:embed="rId17"/>
+                <asvg:svgBlip xmlns:asvg="http://schemas.microsoft.com/office/drawing/2016/SVG/main" r:embed="rId9"/>
               </a:ext>
             </a:extLst>
           </a:blip>
@@ -41705,13 +44116,13 @@
           <p:nvPr/>
         </p:nvPicPr>
         <p:blipFill>
-          <a:blip r:embed="rId3">
+          <a:blip>
             <a:extLst>
               <a:ext uri="{28A0092B-C50C-407E-A947-70E740481C1C}">
                 <a14:useLocalDpi xmlns:a14="http://schemas.microsoft.com/office/drawing/2010/main" val="0"/>
               </a:ext>
               <a:ext uri="{96DAC541-7B7A-43D3-8B79-37D633B846F1}">
-                <asvg:svgBlip xmlns:asvg="http://schemas.microsoft.com/office/drawing/2016/SVG/main" r:embed="rId4"/>
+                <asvg:svgBlip xmlns:asvg="http://schemas.microsoft.com/office/drawing/2016/SVG/main" r:embed="rId3"/>
               </a:ext>
             </a:extLst>
           </a:blip>
@@ -41836,13 +44247,13 @@
           <p:nvPr/>
         </p:nvPicPr>
         <p:blipFill>
-          <a:blip r:embed="rId5">
+          <a:blip>
             <a:extLst>
               <a:ext uri="{28A0092B-C50C-407E-A947-70E740481C1C}">
                 <a14:useLocalDpi xmlns:a14="http://schemas.microsoft.com/office/drawing/2010/main" val="0"/>
               </a:ext>
               <a:ext uri="{96DAC541-7B7A-43D3-8B79-37D633B846F1}">
-                <asvg:svgBlip xmlns:asvg="http://schemas.microsoft.com/office/drawing/2016/SVG/main" r:embed="rId6"/>
+                <asvg:svgBlip xmlns:asvg="http://schemas.microsoft.com/office/drawing/2016/SVG/main" r:embed="rId4"/>
               </a:ext>
             </a:extLst>
           </a:blip>
@@ -41875,7 +44286,7 @@
           <p:nvPr/>
         </p:nvPicPr>
         <p:blipFill rotWithShape="1">
-          <a:blip r:embed="rId7">
+          <a:blip>
             <a:duotone>
               <a:schemeClr val="accent1">
                 <a:shade val="45000"/>
@@ -41888,7 +44299,7 @@
                 <a14:useLocalDpi xmlns:a14="http://schemas.microsoft.com/office/drawing/2010/main" val="0"/>
               </a:ext>
               <a:ext uri="{96DAC541-7B7A-43D3-8B79-37D633B846F1}">
-                <asvg:svgBlip xmlns:asvg="http://schemas.microsoft.com/office/drawing/2016/SVG/main" r:embed="rId8"/>
+                <asvg:svgBlip xmlns:asvg="http://schemas.microsoft.com/office/drawing/2016/SVG/main" r:embed="rId5"/>
               </a:ext>
             </a:extLst>
           </a:blip>
@@ -41920,7 +44331,7 @@
           <p:nvPr/>
         </p:nvPicPr>
         <p:blipFill rotWithShape="1">
-          <a:blip r:embed="rId7">
+          <a:blip>
             <a:duotone>
               <a:schemeClr val="accent2">
                 <a:shade val="45000"/>
@@ -41933,7 +44344,7 @@
                 <a14:useLocalDpi xmlns:a14="http://schemas.microsoft.com/office/drawing/2010/main" val="0"/>
               </a:ext>
               <a:ext uri="{96DAC541-7B7A-43D3-8B79-37D633B846F1}">
-                <asvg:svgBlip xmlns:asvg="http://schemas.microsoft.com/office/drawing/2016/SVG/main" r:embed="rId8"/>
+                <asvg:svgBlip xmlns:asvg="http://schemas.microsoft.com/office/drawing/2016/SVG/main" r:embed="rId5"/>
               </a:ext>
             </a:extLst>
           </a:blip>
@@ -42186,7 +44597,7 @@
           <p:nvPr/>
         </p:nvPicPr>
         <p:blipFill rotWithShape="1">
-          <a:blip r:embed="rId7">
+          <a:blip>
             <a:duotone>
               <a:schemeClr val="accent2">
                 <a:shade val="45000"/>
@@ -42199,7 +44610,7 @@
                 <a14:useLocalDpi xmlns:a14="http://schemas.microsoft.com/office/drawing/2010/main" val="0"/>
               </a:ext>
               <a:ext uri="{96DAC541-7B7A-43D3-8B79-37D633B846F1}">
-                <asvg:svgBlip xmlns:asvg="http://schemas.microsoft.com/office/drawing/2016/SVG/main" r:embed="rId8"/>
+                <asvg:svgBlip xmlns:asvg="http://schemas.microsoft.com/office/drawing/2016/SVG/main" r:embed="rId5"/>
               </a:ext>
             </a:extLst>
           </a:blip>
@@ -42392,13 +44803,13 @@
             <p:nvPr/>
           </p:nvPicPr>
           <p:blipFill>
-            <a:blip r:embed="rId9">
+            <a:blip>
               <a:extLst>
                 <a:ext uri="{28A0092B-C50C-407E-A947-70E740481C1C}">
                   <a14:useLocalDpi xmlns:a14="http://schemas.microsoft.com/office/drawing/2010/main" val="0"/>
                 </a:ext>
                 <a:ext uri="{96DAC541-7B7A-43D3-8B79-37D633B846F1}">
-                  <asvg:svgBlip xmlns:asvg="http://schemas.microsoft.com/office/drawing/2016/SVG/main" r:embed="rId10"/>
+                  <asvg:svgBlip xmlns:asvg="http://schemas.microsoft.com/office/drawing/2016/SVG/main" r:embed="rId6"/>
                 </a:ext>
               </a:extLst>
             </a:blip>
@@ -42524,13 +44935,13 @@
             <p:nvPr/>
           </p:nvPicPr>
           <p:blipFill>
-            <a:blip r:embed="rId9">
+            <a:blip>
               <a:extLst>
                 <a:ext uri="{28A0092B-C50C-407E-A947-70E740481C1C}">
                   <a14:useLocalDpi xmlns:a14="http://schemas.microsoft.com/office/drawing/2010/main" val="0"/>
                 </a:ext>
                 <a:ext uri="{96DAC541-7B7A-43D3-8B79-37D633B846F1}">
-                  <asvg:svgBlip xmlns:asvg="http://schemas.microsoft.com/office/drawing/2016/SVG/main" r:embed="rId10"/>
+                  <asvg:svgBlip xmlns:asvg="http://schemas.microsoft.com/office/drawing/2016/SVG/main" r:embed="rId6"/>
                 </a:ext>
               </a:extLst>
             </a:blip>
@@ -42584,13 +44995,13 @@
             <p:nvPr/>
           </p:nvPicPr>
           <p:blipFill>
-            <a:blip r:embed="rId9">
+            <a:blip>
               <a:extLst>
                 <a:ext uri="{28A0092B-C50C-407E-A947-70E740481C1C}">
                   <a14:useLocalDpi xmlns:a14="http://schemas.microsoft.com/office/drawing/2010/main" val="0"/>
                 </a:ext>
                 <a:ext uri="{96DAC541-7B7A-43D3-8B79-37D633B846F1}">
-                  <asvg:svgBlip xmlns:asvg="http://schemas.microsoft.com/office/drawing/2016/SVG/main" r:embed="rId10"/>
+                  <asvg:svgBlip xmlns:asvg="http://schemas.microsoft.com/office/drawing/2016/SVG/main" r:embed="rId6"/>
                 </a:ext>
               </a:extLst>
             </a:blip>
@@ -42689,13 +45100,13 @@
             <p:nvPr/>
           </p:nvPicPr>
           <p:blipFill>
-            <a:blip r:embed="rId9">
+            <a:blip>
               <a:extLst>
                 <a:ext uri="{28A0092B-C50C-407E-A947-70E740481C1C}">
                   <a14:useLocalDpi xmlns:a14="http://schemas.microsoft.com/office/drawing/2010/main" val="0"/>
                 </a:ext>
                 <a:ext uri="{96DAC541-7B7A-43D3-8B79-37D633B846F1}">
-                  <asvg:svgBlip xmlns:asvg="http://schemas.microsoft.com/office/drawing/2016/SVG/main" r:embed="rId10"/>
+                  <asvg:svgBlip xmlns:asvg="http://schemas.microsoft.com/office/drawing/2016/SVG/main" r:embed="rId6"/>
                 </a:ext>
               </a:extLst>
             </a:blip>
@@ -42831,13 +45242,13 @@
             <p:nvPr/>
           </p:nvPicPr>
           <p:blipFill>
-            <a:blip r:embed="rId11">
+            <a:blip>
               <a:extLst>
                 <a:ext uri="{28A0092B-C50C-407E-A947-70E740481C1C}">
                   <a14:useLocalDpi xmlns:a14="http://schemas.microsoft.com/office/drawing/2010/main" val="0"/>
                 </a:ext>
                 <a:ext uri="{96DAC541-7B7A-43D3-8B79-37D633B846F1}">
-                  <asvg:svgBlip xmlns:asvg="http://schemas.microsoft.com/office/drawing/2016/SVG/main" r:embed="rId12"/>
+                  <asvg:svgBlip xmlns:asvg="http://schemas.microsoft.com/office/drawing/2016/SVG/main" r:embed="rId7"/>
                 </a:ext>
               </a:extLst>
             </a:blip>
@@ -42870,13 +45281,13 @@
             <p:nvPr/>
           </p:nvPicPr>
           <p:blipFill>
-            <a:blip r:embed="rId13">
+            <a:blip>
               <a:extLst>
                 <a:ext uri="{28A0092B-C50C-407E-A947-70E740481C1C}">
                   <a14:useLocalDpi xmlns:a14="http://schemas.microsoft.com/office/drawing/2010/main" val="0"/>
                 </a:ext>
                 <a:ext uri="{96DAC541-7B7A-43D3-8B79-37D633B846F1}">
-                  <asvg:svgBlip xmlns:asvg="http://schemas.microsoft.com/office/drawing/2016/SVG/main" r:embed="rId14"/>
+                  <asvg:svgBlip xmlns:asvg="http://schemas.microsoft.com/office/drawing/2016/SVG/main" r:embed="rId8"/>
                 </a:ext>
               </a:extLst>
             </a:blip>
@@ -42976,13 +45387,13 @@
             <p:nvPr/>
           </p:nvPicPr>
           <p:blipFill>
-            <a:blip r:embed="rId11">
+            <a:blip>
               <a:extLst>
                 <a:ext uri="{28A0092B-C50C-407E-A947-70E740481C1C}">
                   <a14:useLocalDpi xmlns:a14="http://schemas.microsoft.com/office/drawing/2010/main" val="0"/>
                 </a:ext>
                 <a:ext uri="{96DAC541-7B7A-43D3-8B79-37D633B846F1}">
-                  <asvg:svgBlip xmlns:asvg="http://schemas.microsoft.com/office/drawing/2016/SVG/main" r:embed="rId12"/>
+                  <asvg:svgBlip xmlns:asvg="http://schemas.microsoft.com/office/drawing/2016/SVG/main" r:embed="rId7"/>
                 </a:ext>
               </a:extLst>
             </a:blip>
@@ -43015,13 +45426,13 @@
             <p:nvPr/>
           </p:nvPicPr>
           <p:blipFill>
-            <a:blip r:embed="rId13">
+            <a:blip>
               <a:extLst>
                 <a:ext uri="{28A0092B-C50C-407E-A947-70E740481C1C}">
                   <a14:useLocalDpi xmlns:a14="http://schemas.microsoft.com/office/drawing/2010/main" val="0"/>
                 </a:ext>
                 <a:ext uri="{96DAC541-7B7A-43D3-8B79-37D633B846F1}">
-                  <asvg:svgBlip xmlns:asvg="http://schemas.microsoft.com/office/drawing/2016/SVG/main" r:embed="rId14"/>
+                  <asvg:svgBlip xmlns:asvg="http://schemas.microsoft.com/office/drawing/2016/SVG/main" r:embed="rId8"/>
                 </a:ext>
               </a:extLst>
             </a:blip>
@@ -43121,13 +45532,13 @@
             <p:nvPr/>
           </p:nvPicPr>
           <p:blipFill>
-            <a:blip r:embed="rId11">
+            <a:blip>
               <a:extLst>
                 <a:ext uri="{28A0092B-C50C-407E-A947-70E740481C1C}">
                   <a14:useLocalDpi xmlns:a14="http://schemas.microsoft.com/office/drawing/2010/main" val="0"/>
                 </a:ext>
                 <a:ext uri="{96DAC541-7B7A-43D3-8B79-37D633B846F1}">
-                  <asvg:svgBlip xmlns:asvg="http://schemas.microsoft.com/office/drawing/2016/SVG/main" r:embed="rId12"/>
+                  <asvg:svgBlip xmlns:asvg="http://schemas.microsoft.com/office/drawing/2016/SVG/main" r:embed="rId7"/>
                 </a:ext>
               </a:extLst>
             </a:blip>
@@ -43160,13 +45571,13 @@
             <p:nvPr/>
           </p:nvPicPr>
           <p:blipFill>
-            <a:blip r:embed="rId13">
+            <a:blip>
               <a:extLst>
                 <a:ext uri="{28A0092B-C50C-407E-A947-70E740481C1C}">
                   <a14:useLocalDpi xmlns:a14="http://schemas.microsoft.com/office/drawing/2010/main" val="0"/>
                 </a:ext>
                 <a:ext uri="{96DAC541-7B7A-43D3-8B79-37D633B846F1}">
-                  <asvg:svgBlip xmlns:asvg="http://schemas.microsoft.com/office/drawing/2016/SVG/main" r:embed="rId14"/>
+                  <asvg:svgBlip xmlns:asvg="http://schemas.microsoft.com/office/drawing/2016/SVG/main" r:embed="rId8"/>
                 </a:ext>
               </a:extLst>
             </a:blip>
@@ -43358,13 +45769,13 @@
             <p:nvPr/>
           </p:nvPicPr>
           <p:blipFill>
-            <a:blip r:embed="rId11">
+            <a:blip>
               <a:extLst>
                 <a:ext uri="{28A0092B-C50C-407E-A947-70E740481C1C}">
                   <a14:useLocalDpi xmlns:a14="http://schemas.microsoft.com/office/drawing/2010/main" val="0"/>
                 </a:ext>
                 <a:ext uri="{96DAC541-7B7A-43D3-8B79-37D633B846F1}">
-                  <asvg:svgBlip xmlns:asvg="http://schemas.microsoft.com/office/drawing/2016/SVG/main" r:embed="rId12"/>
+                  <asvg:svgBlip xmlns:asvg="http://schemas.microsoft.com/office/drawing/2016/SVG/main" r:embed="rId7"/>
                 </a:ext>
               </a:extLst>
             </a:blip>
@@ -43397,13 +45808,13 @@
             <p:nvPr/>
           </p:nvPicPr>
           <p:blipFill>
-            <a:blip r:embed="rId13">
+            <a:blip>
               <a:extLst>
                 <a:ext uri="{28A0092B-C50C-407E-A947-70E740481C1C}">
                   <a14:useLocalDpi xmlns:a14="http://schemas.microsoft.com/office/drawing/2010/main" val="0"/>
                 </a:ext>
                 <a:ext uri="{96DAC541-7B7A-43D3-8B79-37D633B846F1}">
-                  <asvg:svgBlip xmlns:asvg="http://schemas.microsoft.com/office/drawing/2016/SVG/main" r:embed="rId14"/>
+                  <asvg:svgBlip xmlns:asvg="http://schemas.microsoft.com/office/drawing/2016/SVG/main" r:embed="rId8"/>
                 </a:ext>
               </a:extLst>
             </a:blip>
@@ -43503,13 +45914,13 @@
             <p:nvPr/>
           </p:nvPicPr>
           <p:blipFill>
-            <a:blip r:embed="rId11">
+            <a:blip>
               <a:extLst>
                 <a:ext uri="{28A0092B-C50C-407E-A947-70E740481C1C}">
                   <a14:useLocalDpi xmlns:a14="http://schemas.microsoft.com/office/drawing/2010/main" val="0"/>
                 </a:ext>
                 <a:ext uri="{96DAC541-7B7A-43D3-8B79-37D633B846F1}">
-                  <asvg:svgBlip xmlns:asvg="http://schemas.microsoft.com/office/drawing/2016/SVG/main" r:embed="rId12"/>
+                  <asvg:svgBlip xmlns:asvg="http://schemas.microsoft.com/office/drawing/2016/SVG/main" r:embed="rId7"/>
                 </a:ext>
               </a:extLst>
             </a:blip>
@@ -43542,13 +45953,13 @@
             <p:nvPr/>
           </p:nvPicPr>
           <p:blipFill>
-            <a:blip r:embed="rId13">
+            <a:blip>
               <a:extLst>
                 <a:ext uri="{28A0092B-C50C-407E-A947-70E740481C1C}">
                   <a14:useLocalDpi xmlns:a14="http://schemas.microsoft.com/office/drawing/2010/main" val="0"/>
                 </a:ext>
                 <a:ext uri="{96DAC541-7B7A-43D3-8B79-37D633B846F1}">
-                  <asvg:svgBlip xmlns:asvg="http://schemas.microsoft.com/office/drawing/2016/SVG/main" r:embed="rId14"/>
+                  <asvg:svgBlip xmlns:asvg="http://schemas.microsoft.com/office/drawing/2016/SVG/main" r:embed="rId8"/>
                 </a:ext>
               </a:extLst>
             </a:blip>
@@ -43648,13 +46059,13 @@
             <p:nvPr/>
           </p:nvPicPr>
           <p:blipFill>
-            <a:blip r:embed="rId11">
+            <a:blip>
               <a:extLst>
                 <a:ext uri="{28A0092B-C50C-407E-A947-70E740481C1C}">
                   <a14:useLocalDpi xmlns:a14="http://schemas.microsoft.com/office/drawing/2010/main" val="0"/>
                 </a:ext>
                 <a:ext uri="{96DAC541-7B7A-43D3-8B79-37D633B846F1}">
-                  <asvg:svgBlip xmlns:asvg="http://schemas.microsoft.com/office/drawing/2016/SVG/main" r:embed="rId12"/>
+                  <asvg:svgBlip xmlns:asvg="http://schemas.microsoft.com/office/drawing/2016/SVG/main" r:embed="rId7"/>
                 </a:ext>
               </a:extLst>
             </a:blip>
@@ -43687,13 +46098,13 @@
             <p:nvPr/>
           </p:nvPicPr>
           <p:blipFill>
-            <a:blip r:embed="rId13">
+            <a:blip>
               <a:extLst>
                 <a:ext uri="{28A0092B-C50C-407E-A947-70E740481C1C}">
                   <a14:useLocalDpi xmlns:a14="http://schemas.microsoft.com/office/drawing/2010/main" val="0"/>
                 </a:ext>
                 <a:ext uri="{96DAC541-7B7A-43D3-8B79-37D633B846F1}">
-                  <asvg:svgBlip xmlns:asvg="http://schemas.microsoft.com/office/drawing/2016/SVG/main" r:embed="rId14"/>
+                  <asvg:svgBlip xmlns:asvg="http://schemas.microsoft.com/office/drawing/2016/SVG/main" r:embed="rId8"/>
                 </a:ext>
               </a:extLst>
             </a:blip>
@@ -44377,13 +46788,13 @@
           <p:nvPr/>
         </p:nvPicPr>
         <p:blipFill>
-          <a:blip r:embed="rId15">
+          <a:blip>
             <a:extLst>
               <a:ext uri="{28A0092B-C50C-407E-A947-70E740481C1C}">
                 <a14:useLocalDpi xmlns:a14="http://schemas.microsoft.com/office/drawing/2010/main" val="0"/>
               </a:ext>
               <a:ext uri="{96DAC541-7B7A-43D3-8B79-37D633B846F1}">
-                <asvg:svgBlip xmlns:asvg="http://schemas.microsoft.com/office/drawing/2016/SVG/main" r:embed="rId16"/>
+                <asvg:svgBlip xmlns:asvg="http://schemas.microsoft.com/office/drawing/2016/SVG/main" r:embed="rId9"/>
               </a:ext>
             </a:extLst>
           </a:blip>
@@ -44470,13 +46881,13 @@
           <p:nvPr/>
         </p:nvPicPr>
         <p:blipFill>
-          <a:blip r:embed="rId15">
+          <a:blip>
             <a:extLst>
               <a:ext uri="{28A0092B-C50C-407E-A947-70E740481C1C}">
                 <a14:useLocalDpi xmlns:a14="http://schemas.microsoft.com/office/drawing/2010/main" val="0"/>
               </a:ext>
               <a:ext uri="{96DAC541-7B7A-43D3-8B79-37D633B846F1}">
-                <asvg:svgBlip xmlns:asvg="http://schemas.microsoft.com/office/drawing/2016/SVG/main" r:embed="rId16"/>
+                <asvg:svgBlip xmlns:asvg="http://schemas.microsoft.com/office/drawing/2016/SVG/main" r:embed="rId9"/>
               </a:ext>
             </a:extLst>
           </a:blip>
@@ -44509,7 +46920,7 @@
           <p:nvPr/>
         </p:nvPicPr>
         <p:blipFill>
-          <a:blip r:embed="rId17">
+          <a:blip r:embed="rId10">
             <a:extLst>
               <a:ext uri="{28A0092B-C50C-407E-A947-70E740481C1C}">
                 <a14:useLocalDpi xmlns:a14="http://schemas.microsoft.com/office/drawing/2010/main" val="0"/>
@@ -44726,13 +47137,13 @@
           <p:nvPr/>
         </p:nvPicPr>
         <p:blipFill>
-          <a:blip r:embed="rId15">
+          <a:blip>
             <a:extLst>
               <a:ext uri="{28A0092B-C50C-407E-A947-70E740481C1C}">
                 <a14:useLocalDpi xmlns:a14="http://schemas.microsoft.com/office/drawing/2010/main" val="0"/>
               </a:ext>
               <a:ext uri="{96DAC541-7B7A-43D3-8B79-37D633B846F1}">
-                <asvg:svgBlip xmlns:asvg="http://schemas.microsoft.com/office/drawing/2016/SVG/main" r:embed="rId16"/>
+                <asvg:svgBlip xmlns:asvg="http://schemas.microsoft.com/office/drawing/2016/SVG/main" r:embed="rId9"/>
               </a:ext>
             </a:extLst>
           </a:blip>
@@ -44805,13 +47216,13 @@
           <p:nvPr/>
         </p:nvPicPr>
         <p:blipFill>
-          <a:blip r:embed="rId15">
+          <a:blip>
             <a:extLst>
               <a:ext uri="{28A0092B-C50C-407E-A947-70E740481C1C}">
                 <a14:useLocalDpi xmlns:a14="http://schemas.microsoft.com/office/drawing/2010/main" val="0"/>
               </a:ext>
               <a:ext uri="{96DAC541-7B7A-43D3-8B79-37D633B846F1}">
-                <asvg:svgBlip xmlns:asvg="http://schemas.microsoft.com/office/drawing/2016/SVG/main" r:embed="rId16"/>
+                <asvg:svgBlip xmlns:asvg="http://schemas.microsoft.com/office/drawing/2016/SVG/main" r:embed="rId9"/>
               </a:ext>
             </a:extLst>
           </a:blip>
@@ -44844,7 +47255,7 @@
           <p:nvPr/>
         </p:nvPicPr>
         <p:blipFill>
-          <a:blip r:embed="rId17">
+          <a:blip r:embed="rId10">
             <a:extLst>
               <a:ext uri="{28A0092B-C50C-407E-A947-70E740481C1C}">
                 <a14:useLocalDpi xmlns:a14="http://schemas.microsoft.com/office/drawing/2010/main" val="0"/>
@@ -45115,13 +47526,13 @@
           <p:nvPr/>
         </p:nvPicPr>
         <p:blipFill>
-          <a:blip r:embed="rId15">
+          <a:blip>
             <a:extLst>
               <a:ext uri="{28A0092B-C50C-407E-A947-70E740481C1C}">
                 <a14:useLocalDpi xmlns:a14="http://schemas.microsoft.com/office/drawing/2010/main" val="0"/>
               </a:ext>
               <a:ext uri="{96DAC541-7B7A-43D3-8B79-37D633B846F1}">
-                <asvg:svgBlip xmlns:asvg="http://schemas.microsoft.com/office/drawing/2016/SVG/main" r:embed="rId16"/>
+                <asvg:svgBlip xmlns:asvg="http://schemas.microsoft.com/office/drawing/2016/SVG/main" r:embed="rId9"/>
               </a:ext>
             </a:extLst>
           </a:blip>
@@ -45578,13 +47989,13 @@
           <p:nvPr/>
         </p:nvPicPr>
         <p:blipFill>
-          <a:blip r:embed="rId18">
+          <a:blip>
             <a:extLst>
               <a:ext uri="{28A0092B-C50C-407E-A947-70E740481C1C}">
                 <a14:useLocalDpi xmlns:a14="http://schemas.microsoft.com/office/drawing/2010/main" val="0"/>
               </a:ext>
               <a:ext uri="{96DAC541-7B7A-43D3-8B79-37D633B846F1}">
-                <asvg:svgBlip xmlns:asvg="http://schemas.microsoft.com/office/drawing/2016/SVG/main" r:embed="rId19"/>
+                <asvg:svgBlip xmlns:asvg="http://schemas.microsoft.com/office/drawing/2016/SVG/main" r:embed="rId11"/>
               </a:ext>
             </a:extLst>
           </a:blip>
@@ -45676,13 +48087,13 @@
           <p:nvPr/>
         </p:nvPicPr>
         <p:blipFill>
-          <a:blip r:embed="rId18">
+          <a:blip>
             <a:extLst>
               <a:ext uri="{28A0092B-C50C-407E-A947-70E740481C1C}">
                 <a14:useLocalDpi xmlns:a14="http://schemas.microsoft.com/office/drawing/2010/main" val="0"/>
               </a:ext>
               <a:ext uri="{96DAC541-7B7A-43D3-8B79-37D633B846F1}">
-                <asvg:svgBlip xmlns:asvg="http://schemas.microsoft.com/office/drawing/2016/SVG/main" r:embed="rId19"/>
+                <asvg:svgBlip xmlns:asvg="http://schemas.microsoft.com/office/drawing/2016/SVG/main" r:embed="rId11"/>
               </a:ext>
             </a:extLst>
           </a:blip>
@@ -47685,13 +50096,13 @@
           <p:nvPr/>
         </p:nvPicPr>
         <p:blipFill>
-          <a:blip r:embed="rId20">
+          <a:blip r:embed="rId12">
             <a:extLst>
               <a:ext uri="{28A0092B-C50C-407E-A947-70E740481C1C}">
                 <a14:useLocalDpi xmlns:a14="http://schemas.microsoft.com/office/drawing/2010/main" val="0"/>
               </a:ext>
               <a:ext uri="{837473B0-CC2E-450A-ABE3-18F120FF3D39}">
-                <a1611:picAttrSrcUrl xmlns:a1611="http://schemas.microsoft.com/office/drawing/2016/11/main" r:id="rId21"/>
+                <a1611:picAttrSrcUrl xmlns:a1611="http://schemas.microsoft.com/office/drawing/2016/11/main" r:id="rId13"/>
               </a:ext>
             </a:extLst>
           </a:blip>
@@ -47724,13 +50135,13 @@
           <p:nvPr/>
         </p:nvPicPr>
         <p:blipFill>
-          <a:blip r:embed="rId20">
+          <a:blip r:embed="rId12">
             <a:extLst>
               <a:ext uri="{28A0092B-C50C-407E-A947-70E740481C1C}">
                 <a14:useLocalDpi xmlns:a14="http://schemas.microsoft.com/office/drawing/2010/main" val="0"/>
               </a:ext>
               <a:ext uri="{837473B0-CC2E-450A-ABE3-18F120FF3D39}">
-                <a1611:picAttrSrcUrl xmlns:a1611="http://schemas.microsoft.com/office/drawing/2016/11/main" r:id="rId21"/>
+                <a1611:picAttrSrcUrl xmlns:a1611="http://schemas.microsoft.com/office/drawing/2016/11/main" r:id="rId13"/>
               </a:ext>
             </a:extLst>
           </a:blip>
@@ -47780,10 +50191,10 @@
       </p:grpSpPr>
       <p:sp>
         <p:nvSpPr>
-          <p:cNvPr id="72" name="TextBox 71">
-            <a:extLst>
-              <a:ext uri="{FF2B5EF4-FFF2-40B4-BE49-F238E27FC236}">
-                <a16:creationId xmlns:a16="http://schemas.microsoft.com/office/drawing/2014/main" id="{2203EEF7-8763-B761-8E52-FD53115C8BC4}"/>
+          <p:cNvPr id="10" name="TextBox 9">
+            <a:extLst>
+              <a:ext uri="{FF2B5EF4-FFF2-40B4-BE49-F238E27FC236}">
+                <a16:creationId xmlns:a16="http://schemas.microsoft.com/office/drawing/2014/main" id="{BEC74A4A-9A6B-6324-94BC-FCE66F880A05}"/>
               </a:ext>
             </a:extLst>
           </p:cNvPr>
@@ -47792,8 +50203,8 @@
         </p:nvSpPr>
         <p:spPr>
           <a:xfrm>
-            <a:off x="3582792" y="2879178"/>
-            <a:ext cx="587020" cy="248209"/>
+            <a:off x="3573016" y="2411126"/>
+            <a:ext cx="688009" cy="248209"/>
           </a:xfrm>
           <a:prstGeom prst="rect">
             <a:avLst/>
@@ -47808,22 +50219,22 @@
           <a:p>
             <a:pPr algn="ctr"/>
             <a:r>
-              <a:rPr lang="fr-CA" sz="1013" dirty="0">
+              <a:rPr lang="fr-CA" sz="1013" b="1" dirty="0">
                 <a:solidFill>
                   <a:schemeClr val="accent1"/>
                 </a:solidFill>
               </a:rPr>
-              <a:t>owlcms</a:t>
+              <a:t>OWLCMS</a:t>
             </a:r>
           </a:p>
         </p:txBody>
       </p:sp>
       <p:pic>
         <p:nvPicPr>
-          <p:cNvPr id="78" name="Graphic 77" descr="Laptop">
-            <a:extLst>
-              <a:ext uri="{FF2B5EF4-FFF2-40B4-BE49-F238E27FC236}">
-                <a16:creationId xmlns:a16="http://schemas.microsoft.com/office/drawing/2014/main" id="{4BF89AD2-596B-7C94-1344-0D34039A4EE0}"/>
+          <p:cNvPr id="11" name="Graphic 10" descr="Laptop">
+            <a:extLst>
+              <a:ext uri="{FF2B5EF4-FFF2-40B4-BE49-F238E27FC236}">
+                <a16:creationId xmlns:a16="http://schemas.microsoft.com/office/drawing/2014/main" id="{6B6FEBB2-E5AE-DC68-713A-B3331604E5C1}"/>
               </a:ext>
             </a:extLst>
           </p:cNvPr>
@@ -47833,7 +50244,7 @@
           <p:nvPr/>
         </p:nvPicPr>
         <p:blipFill>
-          <a:blip r:embed="rId2">
+          <a:blip>
             <a:extLst>
               <a:ext uri="{28A0092B-C50C-407E-A947-70E740481C1C}">
                 <a14:useLocalDpi xmlns:a14="http://schemas.microsoft.com/office/drawing/2010/main" val="0"/>
@@ -47849,7 +50260,7 @@
         </p:blipFill>
         <p:spPr>
           <a:xfrm>
-            <a:off x="3606828" y="2543115"/>
+            <a:off x="3651657" y="2046026"/>
             <a:ext cx="514350" cy="514350"/>
           </a:xfrm>
           <a:prstGeom prst="rect">
@@ -47857,108 +50268,12 @@
           </a:prstGeom>
         </p:spPr>
       </p:pic>
-      <p:grpSp>
-        <p:nvGrpSpPr>
-          <p:cNvPr id="60" name="Group 59">
-            <a:extLst>
-              <a:ext uri="{FF2B5EF4-FFF2-40B4-BE49-F238E27FC236}">
-                <a16:creationId xmlns:a16="http://schemas.microsoft.com/office/drawing/2014/main" id="{74AFF561-DD6F-5BB8-4DC0-216725C3D8B7}"/>
-              </a:ext>
-            </a:extLst>
-          </p:cNvPr>
-          <p:cNvGrpSpPr/>
-          <p:nvPr/>
-        </p:nvGrpSpPr>
-        <p:grpSpPr>
-          <a:xfrm>
-            <a:off x="3655245" y="1695889"/>
-            <a:ext cx="437452" cy="728430"/>
-            <a:chOff x="2313501" y="958704"/>
-            <a:chExt cx="437452" cy="728430"/>
-          </a:xfrm>
-        </p:grpSpPr>
-        <p:pic>
-          <p:nvPicPr>
-            <p:cNvPr id="68" name="Graphic 67" descr="Laptop">
-              <a:extLst>
-                <a:ext uri="{FF2B5EF4-FFF2-40B4-BE49-F238E27FC236}">
-                  <a16:creationId xmlns:a16="http://schemas.microsoft.com/office/drawing/2014/main" id="{0856CCFE-A969-C49A-E832-1C0E6BA50241}"/>
-                </a:ext>
-              </a:extLst>
-            </p:cNvPr>
-            <p:cNvPicPr>
-              <a:picLocks noChangeAspect="1"/>
-            </p:cNvPicPr>
-            <p:nvPr/>
-          </p:nvPicPr>
-          <p:blipFill>
-            <a:blip r:embed="rId4">
-              <a:extLst>
-                <a:ext uri="{28A0092B-C50C-407E-A947-70E740481C1C}">
-                  <a14:useLocalDpi xmlns:a14="http://schemas.microsoft.com/office/drawing/2010/main" val="0"/>
-                </a:ext>
-                <a:ext uri="{96DAC541-7B7A-43D3-8B79-37D633B846F1}">
-                  <asvg:svgBlip xmlns:asvg="http://schemas.microsoft.com/office/drawing/2016/SVG/main" r:embed="rId5"/>
-                </a:ext>
-              </a:extLst>
-            </a:blip>
-            <a:stretch>
-              <a:fillRect/>
-            </a:stretch>
-          </p:blipFill>
-          <p:spPr>
-            <a:xfrm>
-              <a:off x="2313501" y="958704"/>
-              <a:ext cx="437452" cy="456245"/>
-            </a:xfrm>
-            <a:prstGeom prst="rect">
-              <a:avLst/>
-            </a:prstGeom>
-          </p:spPr>
-        </p:pic>
-        <p:sp>
-          <p:nvSpPr>
-            <p:cNvPr id="73" name="TextBox 72">
-              <a:extLst>
-                <a:ext uri="{FF2B5EF4-FFF2-40B4-BE49-F238E27FC236}">
-                  <a16:creationId xmlns:a16="http://schemas.microsoft.com/office/drawing/2014/main" id="{0925C640-24D2-31D1-53A7-2FF27E10A476}"/>
-                </a:ext>
-              </a:extLst>
-            </p:cNvPr>
-            <p:cNvSpPr txBox="1"/>
-            <p:nvPr/>
-          </p:nvSpPr>
-          <p:spPr>
-            <a:xfrm>
-              <a:off x="2439868" y="1283049"/>
-              <a:ext cx="184730" cy="404085"/>
-            </a:xfrm>
-            <a:prstGeom prst="rect">
-              <a:avLst/>
-            </a:prstGeom>
-            <a:noFill/>
-          </p:spPr>
-          <p:txBody>
-            <a:bodyPr wrap="none" rtlCol="0">
-              <a:spAutoFit/>
-            </a:bodyPr>
-            <a:lstStyle/>
-            <a:p>
-              <a:pPr algn="ctr"/>
-              <a:br>
-                <a:rPr lang="fr-CA" sz="1013" dirty="0"/>
-              </a:br>
-              <a:endParaRPr lang="fr-CA" sz="1013" dirty="0"/>
-            </a:p>
-          </p:txBody>
-        </p:sp>
-      </p:grpSp>
       <p:pic>
         <p:nvPicPr>
-          <p:cNvPr id="107" name="Graphic 106" descr="Monitor with solid fill">
-            <a:extLst>
-              <a:ext uri="{FF2B5EF4-FFF2-40B4-BE49-F238E27FC236}">
-                <a16:creationId xmlns:a16="http://schemas.microsoft.com/office/drawing/2014/main" id="{F2E2F63C-280E-F8B1-E28C-3D71849220AE}"/>
+          <p:cNvPr id="15" name="Graphic 14" descr="Monitor with solid fill">
+            <a:extLst>
+              <a:ext uri="{FF2B5EF4-FFF2-40B4-BE49-F238E27FC236}">
+                <a16:creationId xmlns:a16="http://schemas.microsoft.com/office/drawing/2014/main" id="{D8714033-DC02-0678-EA43-81BA3C609227}"/>
               </a:ext>
             </a:extLst>
           </p:cNvPr>
@@ -47968,13 +50283,13 @@
           <p:nvPr/>
         </p:nvPicPr>
         <p:blipFill>
-          <a:blip r:embed="rId6">
+          <a:blip>
             <a:extLst>
               <a:ext uri="{28A0092B-C50C-407E-A947-70E740481C1C}">
                 <a14:useLocalDpi xmlns:a14="http://schemas.microsoft.com/office/drawing/2010/main" val="0"/>
               </a:ext>
               <a:ext uri="{96DAC541-7B7A-43D3-8B79-37D633B846F1}">
-                <asvg:svgBlip xmlns:asvg="http://schemas.microsoft.com/office/drawing/2016/SVG/main" r:embed="rId7"/>
+                <asvg:svgBlip xmlns:asvg="http://schemas.microsoft.com/office/drawing/2016/SVG/main" r:embed="rId4"/>
               </a:ext>
             </a:extLst>
           </a:blip>
@@ -47984,7 +50299,7 @@
         </p:blipFill>
         <p:spPr>
           <a:xfrm>
-            <a:off x="2725945" y="1695889"/>
+            <a:off x="781729" y="2052591"/>
             <a:ext cx="463422" cy="463422"/>
           </a:xfrm>
           <a:prstGeom prst="rect">
@@ -47994,10 +50309,10 @@
       </p:pic>
       <p:sp>
         <p:nvSpPr>
-          <p:cNvPr id="116" name="TextBox 115">
-            <a:extLst>
-              <a:ext uri="{FF2B5EF4-FFF2-40B4-BE49-F238E27FC236}">
-                <a16:creationId xmlns:a16="http://schemas.microsoft.com/office/drawing/2014/main" id="{BE3673FE-B82F-67A8-446D-0436EA62049E}"/>
+          <p:cNvPr id="16" name="TextBox 15">
+            <a:extLst>
+              <a:ext uri="{FF2B5EF4-FFF2-40B4-BE49-F238E27FC236}">
+                <a16:creationId xmlns:a16="http://schemas.microsoft.com/office/drawing/2014/main" id="{7A2D6B24-3E8A-1B58-33E7-60A6A63C9C79}"/>
               </a:ext>
             </a:extLst>
           </p:cNvPr>
@@ -48006,8 +50321,8 @@
         </p:nvSpPr>
         <p:spPr>
           <a:xfrm>
-            <a:off x="2492896" y="2060104"/>
-            <a:ext cx="939371" cy="317651"/>
+            <a:off x="548680" y="2416806"/>
+            <a:ext cx="939371" cy="426784"/>
           </a:xfrm>
           <a:prstGeom prst="rect">
             <a:avLst/>
@@ -48033,30 +50348,37 @@
               <a:rPr lang="fr-CA" sz="1013" dirty="0"/>
             </a:br>
             <a:r>
+              <a:rPr lang="fr-CA" sz="1000" dirty="0"/>
+              <a:t>Scoreboard</a:t>
+            </a:r>
+            <a:br>
               <a:rPr lang="fr-CA" sz="1013" dirty="0"/>
-              <a:t>Scoreboard</a:t>
+            </a:br>
+            <a:r>
+              <a:rPr lang="fr-CA" sz="1013" dirty="0"/>
+              <a:t>TV</a:t>
             </a:r>
           </a:p>
         </p:txBody>
       </p:sp>
       <p:cxnSp>
         <p:nvCxnSpPr>
-          <p:cNvPr id="156" name="Straight Arrow Connector 155">
-            <a:extLst>
-              <a:ext uri="{FF2B5EF4-FFF2-40B4-BE49-F238E27FC236}">
-                <a16:creationId xmlns:a16="http://schemas.microsoft.com/office/drawing/2014/main" id="{4DA848C7-A301-8B2E-29CB-1AF6F55C4FE1}"/>
+          <p:cNvPr id="17" name="Straight Arrow Connector 16">
+            <a:extLst>
+              <a:ext uri="{FF2B5EF4-FFF2-40B4-BE49-F238E27FC236}">
+                <a16:creationId xmlns:a16="http://schemas.microsoft.com/office/drawing/2014/main" id="{298EBD93-3D9E-FB6D-F68C-C9A9FC4C93D0}"/>
               </a:ext>
             </a:extLst>
           </p:cNvPr>
           <p:cNvCxnSpPr>
-            <a:stCxn id="68" idx="1"/>
-            <a:endCxn id="107" idx="3"/>
+            <a:cxnSpLocks/>
+            <a:endCxn id="15" idx="3"/>
           </p:cNvCxnSpPr>
           <p:nvPr/>
         </p:nvCxnSpPr>
         <p:spPr>
           <a:xfrm flipH="1">
-            <a:off x="3189367" y="1924012"/>
+            <a:off x="1245151" y="2280714"/>
             <a:ext cx="465878" cy="3588"/>
           </a:xfrm>
           <a:prstGeom prst="straightConnector1">
@@ -48088,10 +50410,10 @@
       </p:cxnSp>
       <p:pic>
         <p:nvPicPr>
-          <p:cNvPr id="269" name="Graphic 268">
-            <a:extLst>
-              <a:ext uri="{FF2B5EF4-FFF2-40B4-BE49-F238E27FC236}">
-                <a16:creationId xmlns:a16="http://schemas.microsoft.com/office/drawing/2014/main" id="{1E362577-7114-0110-5DE8-8E20B2BB9FFE}"/>
+          <p:cNvPr id="18" name="Graphic 17">
+            <a:extLst>
+              <a:ext uri="{FF2B5EF4-FFF2-40B4-BE49-F238E27FC236}">
+                <a16:creationId xmlns:a16="http://schemas.microsoft.com/office/drawing/2014/main" id="{094EED7F-CECF-3E81-047E-45D426B178FB}"/>
               </a:ext>
             </a:extLst>
           </p:cNvPr>
@@ -48101,7 +50423,7 @@
           <p:nvPr/>
         </p:nvPicPr>
         <p:blipFill rotWithShape="1">
-          <a:blip r:embed="rId8">
+          <a:blip>
             <a:duotone>
               <a:schemeClr val="accent1">
                 <a:shade val="45000"/>
@@ -48114,7 +50436,7 @@
                 <a14:useLocalDpi xmlns:a14="http://schemas.microsoft.com/office/drawing/2010/main" val="0"/>
               </a:ext>
               <a:ext uri="{96DAC541-7B7A-43D3-8B79-37D633B846F1}">
-                <asvg:svgBlip xmlns:asvg="http://schemas.microsoft.com/office/drawing/2016/SVG/main" r:embed="rId9"/>
+                <asvg:svgBlip xmlns:asvg="http://schemas.microsoft.com/office/drawing/2016/SVG/main" r:embed="rId5"/>
               </a:ext>
             </a:extLst>
           </a:blip>
@@ -48123,7 +50445,7 @@
         </p:blipFill>
         <p:spPr>
           <a:xfrm>
-            <a:off x="4293096" y="2987212"/>
+            <a:off x="3053075" y="755576"/>
             <a:ext cx="710946" cy="291944"/>
           </a:xfrm>
           <a:prstGeom prst="rect">
@@ -48131,103 +50453,12 @@
           </a:prstGeom>
         </p:spPr>
       </p:pic>
-      <p:cxnSp>
-        <p:nvCxnSpPr>
-          <p:cNvPr id="337" name="Straight Arrow Connector 336">
-            <a:extLst>
-              <a:ext uri="{FF2B5EF4-FFF2-40B4-BE49-F238E27FC236}">
-                <a16:creationId xmlns:a16="http://schemas.microsoft.com/office/drawing/2014/main" id="{1985680E-6AB2-BF60-CFEB-6ED7AB3E08BA}"/>
-              </a:ext>
-            </a:extLst>
-          </p:cNvPr>
-          <p:cNvCxnSpPr>
-            <a:cxnSpLocks/>
-          </p:cNvCxnSpPr>
-          <p:nvPr/>
-        </p:nvCxnSpPr>
-        <p:spPr>
-          <a:xfrm flipH="1">
-            <a:off x="4048428" y="2800290"/>
-            <a:ext cx="320174" cy="0"/>
-          </a:xfrm>
-          <a:prstGeom prst="straightConnector1">
-            <a:avLst/>
-          </a:prstGeom>
-          <a:ln w="12700">
-            <a:solidFill>
-              <a:schemeClr val="accent1"/>
-            </a:solidFill>
-            <a:headEnd type="triangle"/>
-            <a:tailEnd type="triangle"/>
-          </a:ln>
-        </p:spPr>
-        <p:style>
-          <a:lnRef idx="1">
-            <a:schemeClr val="accent1"/>
-          </a:lnRef>
-          <a:fillRef idx="0">
-            <a:schemeClr val="accent1"/>
-          </a:fillRef>
-          <a:effectRef idx="0">
-            <a:schemeClr val="accent1"/>
-          </a:effectRef>
-          <a:fontRef idx="minor">
-            <a:schemeClr val="tx1"/>
-          </a:fontRef>
-        </p:style>
-      </p:cxnSp>
-      <p:cxnSp>
-        <p:nvCxnSpPr>
-          <p:cNvPr id="386" name="Connector: Elbow 385">
-            <a:extLst>
-              <a:ext uri="{FF2B5EF4-FFF2-40B4-BE49-F238E27FC236}">
-                <a16:creationId xmlns:a16="http://schemas.microsoft.com/office/drawing/2014/main" id="{B9268D69-00FB-E4C8-1218-14CB2BF516D2}"/>
-              </a:ext>
-            </a:extLst>
-          </p:cNvPr>
-          <p:cNvCxnSpPr>
-            <a:cxnSpLocks/>
-            <a:stCxn id="94" idx="3"/>
-            <a:endCxn id="68" idx="3"/>
-          </p:cNvCxnSpPr>
-          <p:nvPr/>
-        </p:nvCxnSpPr>
-        <p:spPr>
-          <a:xfrm flipV="1">
-            <a:off x="3992590" y="1924012"/>
-            <a:ext cx="100107" cy="1953033"/>
-          </a:xfrm>
-          <a:prstGeom prst="bentConnector3">
-            <a:avLst>
-              <a:gd name="adj1" fmla="val 401429"/>
-            </a:avLst>
-          </a:prstGeom>
-          <a:ln w="12700">
-            <a:headEnd type="triangle" w="med" len="med"/>
-            <a:tailEnd type="triangle" w="med" len="med"/>
-          </a:ln>
-        </p:spPr>
-        <p:style>
-          <a:lnRef idx="1">
-            <a:schemeClr val="accent1"/>
-          </a:lnRef>
-          <a:fillRef idx="0">
-            <a:schemeClr val="accent1"/>
-          </a:fillRef>
-          <a:effectRef idx="0">
-            <a:schemeClr val="accent1"/>
-          </a:effectRef>
-          <a:fontRef idx="minor">
-            <a:schemeClr val="tx1"/>
-          </a:fontRef>
-        </p:style>
-      </p:cxnSp>
       <p:sp>
         <p:nvSpPr>
-          <p:cNvPr id="407" name="TextBox 406">
-            <a:extLst>
-              <a:ext uri="{FF2B5EF4-FFF2-40B4-BE49-F238E27FC236}">
-                <a16:creationId xmlns:a16="http://schemas.microsoft.com/office/drawing/2014/main" id="{BE01BD03-1013-EEB8-B968-1DB1110B6135}"/>
+          <p:cNvPr id="21" name="TextBox 20">
+            <a:extLst>
+              <a:ext uri="{FF2B5EF4-FFF2-40B4-BE49-F238E27FC236}">
+                <a16:creationId xmlns:a16="http://schemas.microsoft.com/office/drawing/2014/main" id="{811BBB27-76F9-1977-E4FA-6ABF0D5D9BBB}"/>
               </a:ext>
             </a:extLst>
           </p:cNvPr>
@@ -48236,7 +50467,7 @@
         </p:nvSpPr>
         <p:spPr>
           <a:xfrm>
-            <a:off x="4827855" y="3003282"/>
+            <a:off x="2960948" y="539552"/>
             <a:ext cx="862685" cy="317651"/>
           </a:xfrm>
           <a:prstGeom prst="rect">
@@ -48271,10 +50502,10 @@
       </p:sp>
       <p:sp>
         <p:nvSpPr>
-          <p:cNvPr id="12" name="TextBox 11">
-            <a:extLst>
-              <a:ext uri="{FF2B5EF4-FFF2-40B4-BE49-F238E27FC236}">
-                <a16:creationId xmlns:a16="http://schemas.microsoft.com/office/drawing/2014/main" id="{BE21DD6A-F02D-D638-943C-F12CEEF526A6}"/>
+          <p:cNvPr id="22" name="TextBox 21">
+            <a:extLst>
+              <a:ext uri="{FF2B5EF4-FFF2-40B4-BE49-F238E27FC236}">
+                <a16:creationId xmlns:a16="http://schemas.microsoft.com/office/drawing/2014/main" id="{6A3AED17-5333-CF33-2DC6-BD13E8A7ABB4}"/>
               </a:ext>
             </a:extLst>
           </p:cNvPr>
@@ -48283,7 +50514,7 @@
         </p:nvSpPr>
         <p:spPr>
           <a:xfrm>
-            <a:off x="3263539" y="1759619"/>
+            <a:off x="1319323" y="2116321"/>
             <a:ext cx="425116" cy="184089"/>
           </a:xfrm>
           <a:prstGeom prst="rect">
@@ -48311,10 +50542,10 @@
       </p:sp>
       <p:sp>
         <p:nvSpPr>
-          <p:cNvPr id="18" name="TextBox 17">
-            <a:extLst>
-              <a:ext uri="{FF2B5EF4-FFF2-40B4-BE49-F238E27FC236}">
-                <a16:creationId xmlns:a16="http://schemas.microsoft.com/office/drawing/2014/main" id="{E2C70ECE-016A-9A22-AD05-903DFA223D4B}"/>
+          <p:cNvPr id="23" name="TextBox 22">
+            <a:extLst>
+              <a:ext uri="{FF2B5EF4-FFF2-40B4-BE49-F238E27FC236}">
+                <a16:creationId xmlns:a16="http://schemas.microsoft.com/office/drawing/2014/main" id="{A53CD5E0-5893-5523-42A4-8C8237BA9519}"/>
               </a:ext>
             </a:extLst>
           </p:cNvPr>
@@ -48323,8 +50554,8 @@
         </p:nvSpPr>
         <p:spPr>
           <a:xfrm>
-            <a:off x="3392996" y="3023828"/>
-            <a:ext cx="939371" cy="317651"/>
+            <a:off x="3455273" y="2616660"/>
+            <a:ext cx="939371" cy="208519"/>
           </a:xfrm>
           <a:prstGeom prst="rect">
             <a:avLst/>
@@ -48343,15 +50574,8 @@
               </a:lnSpc>
             </a:pPr>
             <a:r>
-              <a:rPr lang="fr-CA" sz="1013" dirty="0" err="1"/>
+              <a:rPr lang="fr-CA" sz="1000" dirty="0" err="1"/>
               <a:t>Announcer</a:t>
-            </a:r>
-            <a:br>
-              <a:rPr lang="fr-CA" sz="1013" dirty="0"/>
-            </a:br>
-            <a:r>
-              <a:rPr lang="fr-CA" sz="1013" dirty="0" err="1"/>
-              <a:t>Timekeeper</a:t>
             </a:r>
             <a:endParaRPr lang="fr-CA" sz="1013" dirty="0"/>
           </a:p>
@@ -48359,10 +50583,10 @@
       </p:sp>
       <p:sp>
         <p:nvSpPr>
-          <p:cNvPr id="79" name="TextBox 78">
-            <a:extLst>
-              <a:ext uri="{FF2B5EF4-FFF2-40B4-BE49-F238E27FC236}">
-                <a16:creationId xmlns:a16="http://schemas.microsoft.com/office/drawing/2014/main" id="{90C8B18D-E554-35ED-B5A1-FB8971D127E8}"/>
+          <p:cNvPr id="24" name="TextBox 23">
+            <a:extLst>
+              <a:ext uri="{FF2B5EF4-FFF2-40B4-BE49-F238E27FC236}">
+                <a16:creationId xmlns:a16="http://schemas.microsoft.com/office/drawing/2014/main" id="{868BD2C2-0AF0-EA78-E204-42C95178DE18}"/>
               </a:ext>
             </a:extLst>
           </p:cNvPr>
@@ -48371,8 +50595,8 @@
         </p:nvSpPr>
         <p:spPr>
           <a:xfrm>
-            <a:off x="3422911" y="2052591"/>
-            <a:ext cx="939371" cy="317651"/>
+            <a:off x="1481517" y="2439998"/>
+            <a:ext cx="939371" cy="208519"/>
           </a:xfrm>
           <a:prstGeom prst="rect">
             <a:avLst/>
@@ -48391,15 +50615,8 @@
               </a:lnSpc>
             </a:pPr>
             <a:r>
-              <a:rPr lang="fr-CA" sz="1013" dirty="0"/>
+              <a:rPr lang="fr-CA" sz="1000" dirty="0"/>
               <a:t>Marshall</a:t>
-            </a:r>
-            <a:br>
-              <a:rPr lang="fr-CA" sz="1013" dirty="0"/>
-            </a:br>
-            <a:r>
-              <a:rPr lang="fr-CA" sz="1013" dirty="0" err="1"/>
-              <a:t>Secretary</a:t>
             </a:r>
             <a:endParaRPr lang="fr-CA" sz="1013" dirty="0"/>
           </a:p>
@@ -48407,10 +50624,10 @@
       </p:sp>
       <p:pic>
         <p:nvPicPr>
-          <p:cNvPr id="87" name="Graphic 86" descr="Monitor with solid fill">
-            <a:extLst>
-              <a:ext uri="{FF2B5EF4-FFF2-40B4-BE49-F238E27FC236}">
-                <a16:creationId xmlns:a16="http://schemas.microsoft.com/office/drawing/2014/main" id="{6ACA4A9E-0CD9-FF26-669D-2D0AE15C084F}"/>
+          <p:cNvPr id="25" name="Graphic 24" descr="Monitor with solid fill">
+            <a:extLst>
+              <a:ext uri="{FF2B5EF4-FFF2-40B4-BE49-F238E27FC236}">
+                <a16:creationId xmlns:a16="http://schemas.microsoft.com/office/drawing/2014/main" id="{0FDA4C62-48C5-1C75-F3BD-9CB7B3034C9D}"/>
               </a:ext>
             </a:extLst>
           </p:cNvPr>
@@ -48420,13 +50637,13 @@
           <p:nvPr/>
         </p:nvPicPr>
         <p:blipFill>
-          <a:blip r:embed="rId6">
+          <a:blip>
             <a:extLst>
               <a:ext uri="{28A0092B-C50C-407E-A947-70E740481C1C}">
                 <a14:useLocalDpi xmlns:a14="http://schemas.microsoft.com/office/drawing/2010/main" val="0"/>
               </a:ext>
               <a:ext uri="{96DAC541-7B7A-43D3-8B79-37D633B846F1}">
-                <asvg:svgBlip xmlns:asvg="http://schemas.microsoft.com/office/drawing/2016/SVG/main" r:embed="rId7"/>
+                <asvg:svgBlip xmlns:asvg="http://schemas.microsoft.com/office/drawing/2016/SVG/main" r:embed="rId4"/>
               </a:ext>
             </a:extLst>
           </a:blip>
@@ -48436,7 +50653,7 @@
         </p:blipFill>
         <p:spPr>
           <a:xfrm>
-            <a:off x="2712187" y="2555776"/>
+            <a:off x="2725330" y="2087724"/>
             <a:ext cx="463422" cy="463422"/>
           </a:xfrm>
           <a:prstGeom prst="rect">
@@ -48446,10 +50663,10 @@
       </p:pic>
       <p:sp>
         <p:nvSpPr>
-          <p:cNvPr id="88" name="TextBox 87">
-            <a:extLst>
-              <a:ext uri="{FF2B5EF4-FFF2-40B4-BE49-F238E27FC236}">
-                <a16:creationId xmlns:a16="http://schemas.microsoft.com/office/drawing/2014/main" id="{5BBB9911-3114-A179-1134-162E24C1AD3A}"/>
+          <p:cNvPr id="26" name="TextBox 25">
+            <a:extLst>
+              <a:ext uri="{FF2B5EF4-FFF2-40B4-BE49-F238E27FC236}">
+                <a16:creationId xmlns:a16="http://schemas.microsoft.com/office/drawing/2014/main" id="{F8033C86-21D6-D1C1-4A2A-1A04B8ADEA4D}"/>
               </a:ext>
             </a:extLst>
           </p:cNvPr>
@@ -48458,8 +50675,8 @@
         </p:nvSpPr>
         <p:spPr>
           <a:xfrm>
-            <a:off x="2492896" y="2849072"/>
-            <a:ext cx="939371" cy="426784"/>
+            <a:off x="2506039" y="2381020"/>
+            <a:ext cx="939371" cy="535916"/>
           </a:xfrm>
           <a:prstGeom prst="rect">
             <a:avLst/>
@@ -48493,30 +50710,36 @@
               </a:lnSpc>
             </a:pPr>
             <a:r>
-              <a:rPr lang="fr-CA" sz="1013" dirty="0" err="1"/>
+              <a:rPr lang="fr-CA" sz="1013" dirty="0"/>
               <a:t>Board</a:t>
             </a:r>
-            <a:endParaRPr lang="fr-CA" sz="1013" dirty="0"/>
+            <a:br>
+              <a:rPr lang="fr-CA" sz="1013" dirty="0"/>
+            </a:br>
+            <a:r>
+              <a:rPr lang="fr-CA" sz="1013" dirty="0"/>
+              <a:t>TV</a:t>
+            </a:r>
           </a:p>
         </p:txBody>
       </p:sp>
       <p:cxnSp>
         <p:nvCxnSpPr>
-          <p:cNvPr id="91" name="Straight Arrow Connector 90">
-            <a:extLst>
-              <a:ext uri="{FF2B5EF4-FFF2-40B4-BE49-F238E27FC236}">
-                <a16:creationId xmlns:a16="http://schemas.microsoft.com/office/drawing/2014/main" id="{7B4A887B-52B4-A7A8-4678-09EAEEA5EDCF}"/>
+          <p:cNvPr id="27" name="Straight Arrow Connector 26">
+            <a:extLst>
+              <a:ext uri="{FF2B5EF4-FFF2-40B4-BE49-F238E27FC236}">
+                <a16:creationId xmlns:a16="http://schemas.microsoft.com/office/drawing/2014/main" id="{6EB21CB1-394C-27AB-CB04-EACEA55331A4}"/>
               </a:ext>
             </a:extLst>
           </p:cNvPr>
           <p:cNvCxnSpPr>
-            <a:endCxn id="87" idx="3"/>
+            <a:endCxn id="25" idx="3"/>
           </p:cNvCxnSpPr>
           <p:nvPr/>
         </p:nvCxnSpPr>
         <p:spPr>
           <a:xfrm flipH="1">
-            <a:off x="3175609" y="2783899"/>
+            <a:off x="3188752" y="2315847"/>
             <a:ext cx="465878" cy="3588"/>
           </a:xfrm>
           <a:prstGeom prst="straightConnector1">
@@ -48548,10 +50771,10 @@
       </p:cxnSp>
       <p:sp>
         <p:nvSpPr>
-          <p:cNvPr id="93" name="TextBox 92">
-            <a:extLst>
-              <a:ext uri="{FF2B5EF4-FFF2-40B4-BE49-F238E27FC236}">
-                <a16:creationId xmlns:a16="http://schemas.microsoft.com/office/drawing/2014/main" id="{2F7B7D8D-39F5-1A4D-9DE3-F1C990EBED96}"/>
+          <p:cNvPr id="28" name="TextBox 27">
+            <a:extLst>
+              <a:ext uri="{FF2B5EF4-FFF2-40B4-BE49-F238E27FC236}">
+                <a16:creationId xmlns:a16="http://schemas.microsoft.com/office/drawing/2014/main" id="{DEE91B53-5945-020E-CE17-0ED915FCEAAC}"/>
               </a:ext>
             </a:extLst>
           </p:cNvPr>
@@ -48560,7 +50783,7 @@
         </p:nvSpPr>
         <p:spPr>
           <a:xfrm>
-            <a:off x="3249781" y="2619506"/>
+            <a:off x="3262924" y="2151454"/>
             <a:ext cx="425116" cy="184089"/>
           </a:xfrm>
           <a:prstGeom prst="rect">
@@ -48586,12 +50809,179 @@
           </a:p>
         </p:txBody>
       </p:sp>
+      <p:cxnSp>
+        <p:nvCxnSpPr>
+          <p:cNvPr id="36" name="Connector: Curved 35">
+            <a:extLst>
+              <a:ext uri="{FF2B5EF4-FFF2-40B4-BE49-F238E27FC236}">
+                <a16:creationId xmlns:a16="http://schemas.microsoft.com/office/drawing/2014/main" id="{58344AB2-E9C1-276F-1E0D-6FA4E2A2FD85}"/>
+              </a:ext>
+            </a:extLst>
+          </p:cNvPr>
+          <p:cNvCxnSpPr>
+            <a:cxnSpLocks/>
+            <a:endCxn id="18" idx="2"/>
+          </p:cNvCxnSpPr>
+          <p:nvPr/>
+        </p:nvCxnSpPr>
+        <p:spPr>
+          <a:xfrm rot="5400000" flipH="1" flipV="1">
+            <a:off x="2166616" y="810660"/>
+            <a:ext cx="1005071" cy="1478793"/>
+          </a:xfrm>
+          <a:prstGeom prst="curvedConnector3">
+            <a:avLst>
+              <a:gd name="adj1" fmla="val 50000"/>
+            </a:avLst>
+          </a:prstGeom>
+          <a:ln>
+            <a:headEnd type="triangle"/>
+            <a:tailEnd type="triangle"/>
+          </a:ln>
+        </p:spPr>
+        <p:style>
+          <a:lnRef idx="1">
+            <a:schemeClr val="accent1"/>
+          </a:lnRef>
+          <a:fillRef idx="0">
+            <a:schemeClr val="accent1"/>
+          </a:fillRef>
+          <a:effectRef idx="0">
+            <a:schemeClr val="accent1"/>
+          </a:effectRef>
+          <a:fontRef idx="minor">
+            <a:schemeClr val="tx1"/>
+          </a:fontRef>
+        </p:style>
+      </p:cxnSp>
+      <p:cxnSp>
+        <p:nvCxnSpPr>
+          <p:cNvPr id="42" name="Connector: Curved 41">
+            <a:extLst>
+              <a:ext uri="{FF2B5EF4-FFF2-40B4-BE49-F238E27FC236}">
+                <a16:creationId xmlns:a16="http://schemas.microsoft.com/office/drawing/2014/main" id="{83FE8853-F181-E766-4D07-13E0941AF202}"/>
+              </a:ext>
+            </a:extLst>
+          </p:cNvPr>
+          <p:cNvCxnSpPr>
+            <a:cxnSpLocks/>
+          </p:cNvCxnSpPr>
+          <p:nvPr/>
+        </p:nvCxnSpPr>
+        <p:spPr>
+          <a:xfrm rot="16200000" flipV="1">
+            <a:off x="3184879" y="1360321"/>
+            <a:ext cx="1008066" cy="376473"/>
+          </a:xfrm>
+          <a:prstGeom prst="curvedConnector3">
+            <a:avLst/>
+          </a:prstGeom>
+          <a:ln>
+            <a:headEnd type="triangle"/>
+            <a:tailEnd type="triangle"/>
+          </a:ln>
+        </p:spPr>
+        <p:style>
+          <a:lnRef idx="1">
+            <a:schemeClr val="accent1"/>
+          </a:lnRef>
+          <a:fillRef idx="0">
+            <a:schemeClr val="accent1"/>
+          </a:fillRef>
+          <a:effectRef idx="0">
+            <a:schemeClr val="accent1"/>
+          </a:effectRef>
+          <a:fontRef idx="minor">
+            <a:schemeClr val="tx1"/>
+          </a:fontRef>
+        </p:style>
+      </p:cxnSp>
+      <p:sp>
+        <p:nvSpPr>
+          <p:cNvPr id="54" name="TextBox 53">
+            <a:extLst>
+              <a:ext uri="{FF2B5EF4-FFF2-40B4-BE49-F238E27FC236}">
+                <a16:creationId xmlns:a16="http://schemas.microsoft.com/office/drawing/2014/main" id="{40289E34-EB8E-92FB-8F4A-960EB1434706}"/>
+              </a:ext>
+            </a:extLst>
+          </p:cNvPr>
+          <p:cNvSpPr txBox="1"/>
+          <p:nvPr/>
+        </p:nvSpPr>
+        <p:spPr>
+          <a:xfrm>
+            <a:off x="2130870" y="1375948"/>
+            <a:ext cx="939371" cy="208519"/>
+          </a:xfrm>
+          <a:prstGeom prst="rect">
+            <a:avLst/>
+          </a:prstGeom>
+          <a:noFill/>
+        </p:spPr>
+        <p:txBody>
+          <a:bodyPr wrap="square" rtlCol="0">
+            <a:spAutoFit/>
+          </a:bodyPr>
+          <a:lstStyle/>
+          <a:p>
+            <a:pPr algn="ctr">
+              <a:lnSpc>
+                <a:spcPct val="70000"/>
+              </a:lnSpc>
+            </a:pPr>
+            <a:r>
+              <a:rPr lang="fr-CA" sz="1013" dirty="0"/>
+              <a:t>Ethernet</a:t>
+            </a:r>
+          </a:p>
+        </p:txBody>
+      </p:sp>
+      <p:sp>
+        <p:nvSpPr>
+          <p:cNvPr id="55" name="TextBox 54">
+            <a:extLst>
+              <a:ext uri="{FF2B5EF4-FFF2-40B4-BE49-F238E27FC236}">
+                <a16:creationId xmlns:a16="http://schemas.microsoft.com/office/drawing/2014/main" id="{63057B69-E967-ABDC-BE41-AA6E58DEC489}"/>
+              </a:ext>
+            </a:extLst>
+          </p:cNvPr>
+          <p:cNvSpPr txBox="1"/>
+          <p:nvPr/>
+        </p:nvSpPr>
+        <p:spPr>
+          <a:xfrm>
+            <a:off x="3061972" y="1563130"/>
+            <a:ext cx="939371" cy="208519"/>
+          </a:xfrm>
+          <a:prstGeom prst="rect">
+            <a:avLst/>
+          </a:prstGeom>
+          <a:noFill/>
+        </p:spPr>
+        <p:txBody>
+          <a:bodyPr wrap="square" rtlCol="0">
+            <a:spAutoFit/>
+          </a:bodyPr>
+          <a:lstStyle/>
+          <a:p>
+            <a:pPr algn="ctr">
+              <a:lnSpc>
+                <a:spcPct val="70000"/>
+              </a:lnSpc>
+            </a:pPr>
+            <a:r>
+              <a:rPr lang="fr-CA" sz="1013" dirty="0"/>
+              <a:t>Ethernet</a:t>
+            </a:r>
+          </a:p>
+        </p:txBody>
+      </p:sp>
       <p:pic>
         <p:nvPicPr>
-          <p:cNvPr id="94" name="Graphic 93" descr="Smart Phone">
-            <a:extLst>
-              <a:ext uri="{FF2B5EF4-FFF2-40B4-BE49-F238E27FC236}">
-                <a16:creationId xmlns:a16="http://schemas.microsoft.com/office/drawing/2014/main" id="{7C77A85E-7AAA-8DAA-EC3F-67A83B132FDE}"/>
+          <p:cNvPr id="57" name="Graphic 56" descr="Smart Phone">
+            <a:extLst>
+              <a:ext uri="{FF2B5EF4-FFF2-40B4-BE49-F238E27FC236}">
+                <a16:creationId xmlns:a16="http://schemas.microsoft.com/office/drawing/2014/main" id="{5CFFC46B-6B7C-6F4F-5A55-549E3CA2B91E}"/>
               </a:ext>
             </a:extLst>
           </p:cNvPr>
@@ -48601,13 +50991,13 @@
           <p:nvPr/>
         </p:nvPicPr>
         <p:blipFill>
-          <a:blip r:embed="rId10">
+          <a:blip>
             <a:extLst>
               <a:ext uri="{28A0092B-C50C-407E-A947-70E740481C1C}">
                 <a14:useLocalDpi xmlns:a14="http://schemas.microsoft.com/office/drawing/2010/main" val="0"/>
               </a:ext>
               <a:ext uri="{96DAC541-7B7A-43D3-8B79-37D633B846F1}">
-                <asvg:svgBlip xmlns:asvg="http://schemas.microsoft.com/office/drawing/2016/SVG/main" r:embed="rId11"/>
+                <asvg:svgBlip xmlns:asvg="http://schemas.microsoft.com/office/drawing/2016/SVG/main" r:embed="rId6"/>
               </a:ext>
             </a:extLst>
           </a:blip>
@@ -48617,7 +51007,7 @@
         </p:blipFill>
         <p:spPr>
           <a:xfrm>
-            <a:off x="3735415" y="3748457"/>
+            <a:off x="5538677" y="2153951"/>
             <a:ext cx="257175" cy="257175"/>
           </a:xfrm>
           <a:prstGeom prst="rect">
@@ -48627,10 +51017,10 @@
       </p:pic>
       <p:pic>
         <p:nvPicPr>
-          <p:cNvPr id="98" name="Graphic 97" descr="Smart Phone">
-            <a:extLst>
-              <a:ext uri="{FF2B5EF4-FFF2-40B4-BE49-F238E27FC236}">
-                <a16:creationId xmlns:a16="http://schemas.microsoft.com/office/drawing/2014/main" id="{C185BAE4-F4A2-B662-61BA-B911E5DF12DE}"/>
+          <p:cNvPr id="58" name="Graphic 57" descr="Smart Phone">
+            <a:extLst>
+              <a:ext uri="{FF2B5EF4-FFF2-40B4-BE49-F238E27FC236}">
+                <a16:creationId xmlns:a16="http://schemas.microsoft.com/office/drawing/2014/main" id="{B0CAA565-94C3-D6AD-55FC-1951BA0BCF83}"/>
               </a:ext>
             </a:extLst>
           </p:cNvPr>
@@ -48640,13 +51030,13 @@
           <p:nvPr/>
         </p:nvPicPr>
         <p:blipFill>
-          <a:blip r:embed="rId10">
+          <a:blip>
             <a:extLst>
               <a:ext uri="{28A0092B-C50C-407E-A947-70E740481C1C}">
                 <a14:useLocalDpi xmlns:a14="http://schemas.microsoft.com/office/drawing/2010/main" val="0"/>
               </a:ext>
               <a:ext uri="{96DAC541-7B7A-43D3-8B79-37D633B846F1}">
-                <asvg:svgBlip xmlns:asvg="http://schemas.microsoft.com/office/drawing/2016/SVG/main" r:embed="rId11"/>
+                <asvg:svgBlip xmlns:asvg="http://schemas.microsoft.com/office/drawing/2016/SVG/main" r:embed="rId6"/>
               </a:ext>
             </a:extLst>
           </a:blip>
@@ -48656,7 +51046,7 @@
         </p:blipFill>
         <p:spPr>
           <a:xfrm>
-            <a:off x="3487671" y="3748142"/>
+            <a:off x="5290933" y="2153636"/>
             <a:ext cx="257175" cy="257175"/>
           </a:xfrm>
           <a:prstGeom prst="rect">
@@ -48666,10 +51056,10 @@
       </p:pic>
       <p:pic>
         <p:nvPicPr>
-          <p:cNvPr id="99" name="Graphic 98" descr="Smart Phone">
-            <a:extLst>
-              <a:ext uri="{FF2B5EF4-FFF2-40B4-BE49-F238E27FC236}">
-                <a16:creationId xmlns:a16="http://schemas.microsoft.com/office/drawing/2014/main" id="{371710D2-DDB3-16DC-BC2D-4ADDACCA58BE}"/>
+          <p:cNvPr id="59" name="Graphic 58" descr="Smart Phone">
+            <a:extLst>
+              <a:ext uri="{FF2B5EF4-FFF2-40B4-BE49-F238E27FC236}">
+                <a16:creationId xmlns:a16="http://schemas.microsoft.com/office/drawing/2014/main" id="{18605944-742B-F486-3162-05A9C04E81AC}"/>
               </a:ext>
             </a:extLst>
           </p:cNvPr>
@@ -48679,13 +51069,13 @@
           <p:nvPr/>
         </p:nvPicPr>
         <p:blipFill>
-          <a:blip r:embed="rId10">
+          <a:blip>
             <a:extLst>
               <a:ext uri="{28A0092B-C50C-407E-A947-70E740481C1C}">
                 <a14:useLocalDpi xmlns:a14="http://schemas.microsoft.com/office/drawing/2010/main" val="0"/>
               </a:ext>
               <a:ext uri="{96DAC541-7B7A-43D3-8B79-37D633B846F1}">
-                <asvg:svgBlip xmlns:asvg="http://schemas.microsoft.com/office/drawing/2016/SVG/main" r:embed="rId11"/>
+                <asvg:svgBlip xmlns:asvg="http://schemas.microsoft.com/office/drawing/2016/SVG/main" r:embed="rId6"/>
               </a:ext>
             </a:extLst>
           </a:blip>
@@ -48695,47 +51085,8 @@
         </p:blipFill>
         <p:spPr>
           <a:xfrm>
-            <a:off x="3239927" y="3747827"/>
+            <a:off x="5043189" y="2153321"/>
             <a:ext cx="257175" cy="257175"/>
-          </a:xfrm>
-          <a:prstGeom prst="rect">
-            <a:avLst/>
-          </a:prstGeom>
-        </p:spPr>
-      </p:pic>
-      <p:pic>
-        <p:nvPicPr>
-          <p:cNvPr id="109" name="Picture 108">
-            <a:extLst>
-              <a:ext uri="{FF2B5EF4-FFF2-40B4-BE49-F238E27FC236}">
-                <a16:creationId xmlns:a16="http://schemas.microsoft.com/office/drawing/2014/main" id="{0FECFE45-D370-6CD6-A81A-3660C17F1505}"/>
-              </a:ext>
-            </a:extLst>
-          </p:cNvPr>
-          <p:cNvPicPr>
-            <a:picLocks noChangeAspect="1"/>
-          </p:cNvPicPr>
-          <p:nvPr/>
-        </p:nvPicPr>
-        <p:blipFill>
-          <a:blip r:embed="rId12">
-            <a:extLst>
-              <a:ext uri="{28A0092B-C50C-407E-A947-70E740481C1C}">
-                <a14:useLocalDpi xmlns:a14="http://schemas.microsoft.com/office/drawing/2010/main" val="0"/>
-              </a:ext>
-              <a:ext uri="{837473B0-CC2E-450A-ABE3-18F120FF3D39}">
-                <a1611:picAttrSrcUrl xmlns:a1611="http://schemas.microsoft.com/office/drawing/2016/11/main" r:id="rId13"/>
-              </a:ext>
-            </a:extLst>
-          </a:blip>
-          <a:stretch>
-            <a:fillRect/>
-          </a:stretch>
-        </p:blipFill>
-        <p:spPr>
-          <a:xfrm>
-            <a:off x="4108515" y="3695051"/>
-            <a:ext cx="182880" cy="134684"/>
           </a:xfrm>
           <a:prstGeom prst="rect">
             <a:avLst/>
@@ -48744,10 +51095,10 @@
       </p:pic>
       <p:sp>
         <p:nvSpPr>
-          <p:cNvPr id="110" name="TextBox 109">
-            <a:extLst>
-              <a:ext uri="{FF2B5EF4-FFF2-40B4-BE49-F238E27FC236}">
-                <a16:creationId xmlns:a16="http://schemas.microsoft.com/office/drawing/2014/main" id="{8B3F18EF-195C-F030-D7F5-D1C95D7DFBFE}"/>
+          <p:cNvPr id="61" name="TextBox 60">
+            <a:extLst>
+              <a:ext uri="{FF2B5EF4-FFF2-40B4-BE49-F238E27FC236}">
+                <a16:creationId xmlns:a16="http://schemas.microsoft.com/office/drawing/2014/main" id="{AC2BF8F8-A3DC-2941-B9B3-B4B29649B234}"/>
               </a:ext>
             </a:extLst>
           </p:cNvPr>
@@ -48756,7 +51107,7 @@
         </p:nvSpPr>
         <p:spPr>
           <a:xfrm>
-            <a:off x="2507645" y="3718213"/>
+            <a:off x="5043189" y="2430587"/>
             <a:ext cx="862685" cy="317651"/>
           </a:xfrm>
           <a:prstGeom prst="rect">
@@ -48789,10 +51140,264 @@
           </a:p>
         </p:txBody>
       </p:sp>
+      <p:cxnSp>
+        <p:nvCxnSpPr>
+          <p:cNvPr id="62" name="Connector: Curved 61">
+            <a:extLst>
+              <a:ext uri="{FF2B5EF4-FFF2-40B4-BE49-F238E27FC236}">
+                <a16:creationId xmlns:a16="http://schemas.microsoft.com/office/drawing/2014/main" id="{4E1D8FC4-0BE6-70A2-E558-21184BD8697D}"/>
+              </a:ext>
+            </a:extLst>
+          </p:cNvPr>
+          <p:cNvCxnSpPr>
+            <a:cxnSpLocks/>
+            <a:stCxn id="57" idx="0"/>
+          </p:cNvCxnSpPr>
+          <p:nvPr/>
+        </p:nvCxnSpPr>
+        <p:spPr>
+          <a:xfrm rot="16200000" flipV="1">
+            <a:off x="4087062" y="573748"/>
+            <a:ext cx="1257163" cy="1903244"/>
+          </a:xfrm>
+          <a:prstGeom prst="curvedConnector2">
+            <a:avLst/>
+          </a:prstGeom>
+          <a:ln>
+            <a:prstDash val="lgDash"/>
+            <a:headEnd type="triangle"/>
+            <a:tailEnd type="triangle"/>
+          </a:ln>
+        </p:spPr>
+        <p:style>
+          <a:lnRef idx="1">
+            <a:schemeClr val="accent1"/>
+          </a:lnRef>
+          <a:fillRef idx="0">
+            <a:schemeClr val="accent1"/>
+          </a:fillRef>
+          <a:effectRef idx="0">
+            <a:schemeClr val="accent1"/>
+          </a:effectRef>
+          <a:fontRef idx="minor">
+            <a:schemeClr val="tx1"/>
+          </a:fontRef>
+        </p:style>
+      </p:cxnSp>
+      <p:cxnSp>
+        <p:nvCxnSpPr>
+          <p:cNvPr id="63" name="Connector: Curved 62">
+            <a:extLst>
+              <a:ext uri="{FF2B5EF4-FFF2-40B4-BE49-F238E27FC236}">
+                <a16:creationId xmlns:a16="http://schemas.microsoft.com/office/drawing/2014/main" id="{F29B206F-237A-682E-C0ED-746B2DF9C2FD}"/>
+              </a:ext>
+            </a:extLst>
+          </p:cNvPr>
+          <p:cNvCxnSpPr>
+            <a:cxnSpLocks/>
+            <a:stCxn id="58" idx="0"/>
+          </p:cNvCxnSpPr>
+          <p:nvPr/>
+        </p:nvCxnSpPr>
+        <p:spPr>
+          <a:xfrm rot="16200000" flipV="1">
+            <a:off x="3963347" y="697462"/>
+            <a:ext cx="1256848" cy="1655500"/>
+          </a:xfrm>
+          <a:prstGeom prst="curvedConnector2">
+            <a:avLst/>
+          </a:prstGeom>
+          <a:ln>
+            <a:prstDash val="lgDash"/>
+            <a:headEnd type="triangle"/>
+            <a:tailEnd type="triangle"/>
+          </a:ln>
+        </p:spPr>
+        <p:style>
+          <a:lnRef idx="1">
+            <a:schemeClr val="accent1"/>
+          </a:lnRef>
+          <a:fillRef idx="0">
+            <a:schemeClr val="accent1"/>
+          </a:fillRef>
+          <a:effectRef idx="0">
+            <a:schemeClr val="accent1"/>
+          </a:effectRef>
+          <a:fontRef idx="minor">
+            <a:schemeClr val="tx1"/>
+          </a:fontRef>
+        </p:style>
+      </p:cxnSp>
+      <p:sp>
+        <p:nvSpPr>
+          <p:cNvPr id="65" name="TextBox 64">
+            <a:extLst>
+              <a:ext uri="{FF2B5EF4-FFF2-40B4-BE49-F238E27FC236}">
+                <a16:creationId xmlns:a16="http://schemas.microsoft.com/office/drawing/2014/main" id="{8A1EA137-DA49-C987-7710-FBDD7B687A40}"/>
+              </a:ext>
+            </a:extLst>
+          </p:cNvPr>
+          <p:cNvSpPr txBox="1"/>
+          <p:nvPr/>
+        </p:nvSpPr>
+        <p:spPr>
+          <a:xfrm>
+            <a:off x="4178973" y="1515046"/>
+            <a:ext cx="939371" cy="208519"/>
+          </a:xfrm>
+          <a:prstGeom prst="rect">
+            <a:avLst/>
+          </a:prstGeom>
+          <a:noFill/>
+        </p:spPr>
+        <p:txBody>
+          <a:bodyPr wrap="square" rtlCol="0">
+            <a:spAutoFit/>
+          </a:bodyPr>
+          <a:lstStyle/>
+          <a:p>
+            <a:pPr algn="ctr">
+              <a:lnSpc>
+                <a:spcPct val="70000"/>
+              </a:lnSpc>
+            </a:pPr>
+            <a:r>
+              <a:rPr lang="fr-CA" sz="1013" dirty="0" err="1"/>
+              <a:t>WiFi</a:t>
+            </a:r>
+            <a:endParaRPr lang="fr-CA" sz="1013" dirty="0"/>
+          </a:p>
+        </p:txBody>
+      </p:sp>
+      <p:cxnSp>
+        <p:nvCxnSpPr>
+          <p:cNvPr id="64" name="Connector: Curved 63">
+            <a:extLst>
+              <a:ext uri="{FF2B5EF4-FFF2-40B4-BE49-F238E27FC236}">
+                <a16:creationId xmlns:a16="http://schemas.microsoft.com/office/drawing/2014/main" id="{4746C57A-C4F9-F4CB-356A-EBB5373244E7}"/>
+              </a:ext>
+            </a:extLst>
+          </p:cNvPr>
+          <p:cNvCxnSpPr>
+            <a:cxnSpLocks/>
+            <a:stCxn id="59" idx="0"/>
+          </p:cNvCxnSpPr>
+          <p:nvPr/>
+        </p:nvCxnSpPr>
+        <p:spPr>
+          <a:xfrm rot="16200000" flipV="1">
+            <a:off x="3842013" y="823557"/>
+            <a:ext cx="1251773" cy="1407756"/>
+          </a:xfrm>
+          <a:prstGeom prst="curvedConnector2">
+            <a:avLst/>
+          </a:prstGeom>
+          <a:ln>
+            <a:prstDash val="lgDash"/>
+            <a:headEnd type="triangle"/>
+            <a:tailEnd type="triangle"/>
+          </a:ln>
+        </p:spPr>
+        <p:style>
+          <a:lnRef idx="1">
+            <a:schemeClr val="accent1"/>
+          </a:lnRef>
+          <a:fillRef idx="0">
+            <a:schemeClr val="accent1"/>
+          </a:fillRef>
+          <a:effectRef idx="0">
+            <a:schemeClr val="accent1"/>
+          </a:effectRef>
+          <a:fontRef idx="minor">
+            <a:schemeClr val="tx1"/>
+          </a:fontRef>
+        </p:style>
+      </p:cxnSp>
+      <p:pic>
+        <p:nvPicPr>
+          <p:cNvPr id="60" name="Picture 59">
+            <a:extLst>
+              <a:ext uri="{FF2B5EF4-FFF2-40B4-BE49-F238E27FC236}">
+                <a16:creationId xmlns:a16="http://schemas.microsoft.com/office/drawing/2014/main" id="{F667D4F4-292F-036B-D697-A347A242C850}"/>
+              </a:ext>
+            </a:extLst>
+          </p:cNvPr>
+          <p:cNvPicPr>
+            <a:picLocks noChangeAspect="1"/>
+          </p:cNvPicPr>
+          <p:nvPr/>
+        </p:nvPicPr>
+        <p:blipFill>
+          <a:blip r:embed="rId7">
+            <a:extLst>
+              <a:ext uri="{28A0092B-C50C-407E-A947-70E740481C1C}">
+                <a14:useLocalDpi xmlns:a14="http://schemas.microsoft.com/office/drawing/2010/main" val="0"/>
+              </a:ext>
+              <a:ext uri="{837473B0-CC2E-450A-ABE3-18F120FF3D39}">
+                <a1611:picAttrSrcUrl xmlns:a1611="http://schemas.microsoft.com/office/drawing/2016/11/main" r:id="rId8"/>
+              </a:ext>
+            </a:extLst>
+          </a:blip>
+          <a:stretch>
+            <a:fillRect/>
+          </a:stretch>
+        </p:blipFill>
+        <p:spPr>
+          <a:xfrm>
+            <a:off x="3702387" y="834258"/>
+            <a:ext cx="182880" cy="134684"/>
+          </a:xfrm>
+          <a:prstGeom prst="rect">
+            <a:avLst/>
+          </a:prstGeom>
+          <a:solidFill>
+            <a:srgbClr val="FFFFFF"/>
+          </a:solidFill>
+        </p:spPr>
+      </p:pic>
+      <p:pic>
+        <p:nvPicPr>
+          <p:cNvPr id="68" name="Graphic 67" descr="Laptop">
+            <a:extLst>
+              <a:ext uri="{FF2B5EF4-FFF2-40B4-BE49-F238E27FC236}">
+                <a16:creationId xmlns:a16="http://schemas.microsoft.com/office/drawing/2014/main" id="{9629EFA4-7181-F977-FA93-EFAA60F9B41F}"/>
+              </a:ext>
+            </a:extLst>
+          </p:cNvPr>
+          <p:cNvPicPr>
+            <a:picLocks noChangeAspect="1"/>
+          </p:cNvPicPr>
+          <p:nvPr/>
+        </p:nvPicPr>
+        <p:blipFill>
+          <a:blip>
+            <a:extLst>
+              <a:ext uri="{28A0092B-C50C-407E-A947-70E740481C1C}">
+                <a14:useLocalDpi xmlns:a14="http://schemas.microsoft.com/office/drawing/2010/main" val="0"/>
+              </a:ext>
+              <a:ext uri="{96DAC541-7B7A-43D3-8B79-37D633B846F1}">
+                <asvg:svgBlip xmlns:asvg="http://schemas.microsoft.com/office/drawing/2016/SVG/main" r:embed="rId3"/>
+              </a:ext>
+            </a:extLst>
+          </a:blip>
+          <a:stretch>
+            <a:fillRect/>
+          </a:stretch>
+        </p:blipFill>
+        <p:spPr>
+          <a:xfrm>
+            <a:off x="1700331" y="2020880"/>
+            <a:ext cx="514350" cy="514350"/>
+          </a:xfrm>
+          <a:prstGeom prst="rect">
+            <a:avLst/>
+          </a:prstGeom>
+        </p:spPr>
+      </p:pic>
     </p:spTree>
     <p:extLst>
       <p:ext uri="{BB962C8B-B14F-4D97-AF65-F5344CB8AC3E}">
-        <p14:creationId xmlns:p14="http://schemas.microsoft.com/office/powerpoint/2010/main" val="2910309073"/>
+        <p14:creationId xmlns:p14="http://schemas.microsoft.com/office/powerpoint/2010/main" val="2196762454"/>
       </p:ext>
     </p:extLst>
   </p:cSld>
